--- a/outputs/reports/Caramba-North-OM-PostNDA.pptx
+++ b/outputs/reports/Caramba-North-OM-PostNDA.pptx
@@ -17,9 +17,11 @@
     <p:sldId id="265" r:id="rId11"/>
     <p:sldId id="266" r:id="rId12"/>
     <p:sldId id="267" r:id="rId13"/>
+    <p:sldId id="268" r:id="rId14"/>
+    <p:sldId id="269" r:id="rId15"/>
   </p:sldIdLst>
   <p:notesMasterIdLst>
-    <p:notesMasterId r:id="rId14"/>
+    <p:notesMasterId r:id="rId16"/>
   </p:notesMasterIdLst>
   <p:sldSz cx="12192000" cy="6858000"/>
   <p:notesSz cx="6858000" cy="12192000"/>
@@ -1172,6 +1174,182 @@
             <a:fld id="{F7021451-1387-4CA6-816F-3879F97B5CBC}" type="slidenum">
               <a:rPr lang="en-US"/>
               <a:t>12</a:t>
+            </a:fld>
+            <a:endParaRPr lang="en-US"/>
+          </a:p>
+        </p:txBody>
+      </p:sp>
+    </p:spTree>
+    <p:extLst>
+      <p:ext uri="{BB962C8B-B14F-4D97-AF65-F5344CB8AC3E}">
+        <p14:creationId xmlns:p14="http://schemas.microsoft.com/office/powerpoint/2010/main" val="1024086991"/>
+      </p:ext>
+    </p:extLst>
+  </p:cSld>
+  <p:clrMapOvr>
+    <a:masterClrMapping/>
+  </p:clrMapOvr>
+</p:notes>
+</file>
+
+<file path=ppt/notesSlides/notesSlide13.xml><?xml version="1.0" encoding="utf-8"?>
+<p:notes xmlns:a="http://schemas.openxmlformats.org/drawingml/2006/main" xmlns:r="http://schemas.openxmlformats.org/officeDocument/2006/relationships" xmlns:p="http://schemas.openxmlformats.org/presentationml/2006/main">
+  <p:cSld>
+    <p:spTree>
+      <p:nvGrpSpPr>
+        <p:cNvPr id="1" name=""/>
+        <p:cNvGrpSpPr/>
+        <p:nvPr/>
+      </p:nvGrpSpPr>
+      <p:grpSpPr>
+        <a:xfrm>
+          <a:off x="0" y="0"/>
+          <a:ext cx="0" cy="0"/>
+          <a:chOff x="0" y="0"/>
+          <a:chExt cx="0" cy="0"/>
+        </a:xfrm>
+      </p:grpSpPr>
+      <p:sp>
+        <p:nvSpPr>
+          <p:cNvPr id="2" name="Slide Image Placeholder 1"/>
+          <p:cNvSpPr>
+            <a:spLocks noGrp="1" noRot="1" noChangeAspect="1"/>
+          </p:cNvSpPr>
+          <p:nvPr>
+            <p:ph type="sldImg"/>
+          </p:nvPr>
+        </p:nvSpPr>
+        <p:spPr/>
+      </p:sp>
+      <p:sp>
+        <p:nvSpPr>
+          <p:cNvPr id="3" name="Notes Placeholder 2"/>
+          <p:cNvSpPr>
+            <a:spLocks noGrp="1"/>
+          </p:cNvSpPr>
+          <p:nvPr>
+            <p:ph type="body" idx="1"/>
+          </p:nvPr>
+        </p:nvSpPr>
+        <p:spPr/>
+        <p:txBody>
+          <a:bodyPr/>
+          <a:lstStyle/>
+          <a:p>
+            <a:r>
+              <a:rPr lang="en-US" dirty="0"/>
+              <a:t/>
+            </a:r>
+            <a:endParaRPr lang="en-US" dirty="0"/>
+          </a:p>
+        </p:txBody>
+      </p:sp>
+      <p:sp>
+        <p:nvSpPr>
+          <p:cNvPr id="4" name="Slide Number Placeholder 3"/>
+          <p:cNvSpPr>
+            <a:spLocks noGrp="1"/>
+          </p:cNvSpPr>
+          <p:nvPr>
+            <p:ph type="sldNum" sz="quarter" idx="10"/>
+          </p:nvPr>
+        </p:nvSpPr>
+        <p:spPr/>
+        <p:txBody>
+          <a:bodyPr/>
+          <a:lstStyle/>
+          <a:p>
+            <a:fld id="{F7021451-1387-4CA6-816F-3879F97B5CBC}" type="slidenum">
+              <a:rPr lang="en-US"/>
+              <a:t>13</a:t>
+            </a:fld>
+            <a:endParaRPr lang="en-US"/>
+          </a:p>
+        </p:txBody>
+      </p:sp>
+    </p:spTree>
+    <p:extLst>
+      <p:ext uri="{BB962C8B-B14F-4D97-AF65-F5344CB8AC3E}">
+        <p14:creationId xmlns:p14="http://schemas.microsoft.com/office/powerpoint/2010/main" val="1024086991"/>
+      </p:ext>
+    </p:extLst>
+  </p:cSld>
+  <p:clrMapOvr>
+    <a:masterClrMapping/>
+  </p:clrMapOvr>
+</p:notes>
+</file>
+
+<file path=ppt/notesSlides/notesSlide14.xml><?xml version="1.0" encoding="utf-8"?>
+<p:notes xmlns:a="http://schemas.openxmlformats.org/drawingml/2006/main" xmlns:r="http://schemas.openxmlformats.org/officeDocument/2006/relationships" xmlns:p="http://schemas.openxmlformats.org/presentationml/2006/main">
+  <p:cSld>
+    <p:spTree>
+      <p:nvGrpSpPr>
+        <p:cNvPr id="1" name=""/>
+        <p:cNvGrpSpPr/>
+        <p:nvPr/>
+      </p:nvGrpSpPr>
+      <p:grpSpPr>
+        <a:xfrm>
+          <a:off x="0" y="0"/>
+          <a:ext cx="0" cy="0"/>
+          <a:chOff x="0" y="0"/>
+          <a:chExt cx="0" cy="0"/>
+        </a:xfrm>
+      </p:grpSpPr>
+      <p:sp>
+        <p:nvSpPr>
+          <p:cNvPr id="2" name="Slide Image Placeholder 1"/>
+          <p:cNvSpPr>
+            <a:spLocks noGrp="1" noRot="1" noChangeAspect="1"/>
+          </p:cNvSpPr>
+          <p:nvPr>
+            <p:ph type="sldImg"/>
+          </p:nvPr>
+        </p:nvSpPr>
+        <p:spPr/>
+      </p:sp>
+      <p:sp>
+        <p:nvSpPr>
+          <p:cNvPr id="3" name="Notes Placeholder 2"/>
+          <p:cNvSpPr>
+            <a:spLocks noGrp="1"/>
+          </p:cNvSpPr>
+          <p:nvPr>
+            <p:ph type="body" idx="1"/>
+          </p:nvPr>
+        </p:nvSpPr>
+        <p:spPr/>
+        <p:txBody>
+          <a:bodyPr/>
+          <a:lstStyle/>
+          <a:p>
+            <a:r>
+              <a:rPr lang="en-US" dirty="0"/>
+              <a:t/>
+            </a:r>
+            <a:endParaRPr lang="en-US" dirty="0"/>
+          </a:p>
+        </p:txBody>
+      </p:sp>
+      <p:sp>
+        <p:nvSpPr>
+          <p:cNvPr id="4" name="Slide Number Placeholder 3"/>
+          <p:cNvSpPr>
+            <a:spLocks noGrp="1"/>
+          </p:cNvSpPr>
+          <p:nvPr>
+            <p:ph type="sldNum" sz="quarter" idx="10"/>
+          </p:nvPr>
+        </p:nvSpPr>
+        <p:spPr/>
+        <p:txBody>
+          <a:bodyPr/>
+          <a:lstStyle/>
+          <a:p>
+            <a:fld id="{F7021451-1387-4CA6-816F-3879F97B5CBC}" type="slidenum">
+              <a:rPr lang="en-US"/>
+              <a:t>14</a:t>
             </a:fld>
             <a:endParaRPr lang="en-US"/>
           </a:p>
@@ -2889,7 +3067,7 @@
                 <a:ea typeface="Calibri" pitchFamily="34" charset="-122"/>
                 <a:cs typeface="Calibri" pitchFamily="34" charset="-120"/>
               </a:rPr>
-              <a:t>2026-08-20  ·  Executive summary deck — editable working draft</a:t>
+              <a:t>2026-08-23  ·  Executive summary deck — editable working draft</a:t>
             </a:r>
             <a:endParaRPr lang="en-US" sz="1000" dirty="0"/>
           </a:p>
@@ -2929,14 +3107,65 @@
       </p:grpSpPr>
       <p:sp>
         <p:nvSpPr>
-          <p:cNvPr id="2" name="Text 0"/>
-          <p:cNvSpPr/>
-          <p:nvPr/>
-        </p:nvSpPr>
-        <p:spPr>
-          <a:xfrm>
-            <a:off x="548640" y="384048"/>
-            <a:ext cx="9144000" cy="320040"/>
+          <p:cNvPr id="2" name="Shape 0"/>
+          <p:cNvSpPr/>
+          <p:nvPr/>
+        </p:nvSpPr>
+        <p:spPr>
+          <a:xfrm>
+            <a:off x="548640" y="310896"/>
+            <a:ext cx="402336" cy="402336"/>
+          </a:xfrm>
+          <a:prstGeom prst="ellipse">
+            <a:avLst/>
+          </a:prstGeom>
+          <a:solidFill>
+            <a:srgbClr val="0F1B2D"/>
+          </a:solidFill>
+          <a:ln/>
+          <a:effectLst>
+            <a:outerShdw sx="100000" sy="100000" kx="0" ky="0" algn="bl" rotWithShape="0" blurRad="88900" dist="25400" dir="5400000">
+              <a:srgbClr val="0F1B2D">
+                <a:alpha val="16000"/>
+              </a:srgbClr>
+            </a:outerShdw>
+          </a:effectLst>
+        </p:spPr>
+      </p:sp>
+      <p:pic>
+        <p:nvPicPr>
+          <p:cNvPr id="3" name="Image 0" descr="preencoded.png">    </p:cNvPr>
+          <p:cNvPicPr>
+            <a:picLocks noChangeAspect="1"/>
+          </p:cNvPicPr>
+          <p:nvPr/>
+        </p:nvPicPr>
+        <p:blipFill>
+          <a:blip r:embed="rId1"/>
+          <a:stretch>
+            <a:fillRect/>
+          </a:stretch>
+        </p:blipFill>
+        <p:spPr>
+          <a:xfrm>
+            <a:off x="653247" y="415503"/>
+            <a:ext cx="193121" cy="193121"/>
+          </a:xfrm>
+          <a:prstGeom prst="rect">
+            <a:avLst/>
+          </a:prstGeom>
+        </p:spPr>
+      </p:pic>
+      <p:sp>
+        <p:nvSpPr>
+          <p:cNvPr id="4" name="Text 1"/>
+          <p:cNvSpPr/>
+          <p:nvPr/>
+        </p:nvSpPr>
+        <p:spPr>
+          <a:xfrm>
+            <a:off x="1097280" y="365760"/>
+            <a:ext cx="9144000" cy="365760"/>
           </a:xfrm>
           <a:prstGeom prst="rect">
             <a:avLst/>
@@ -2954,13 +3183,13 @@
             <a:r>
               <a:rPr lang="en-US" sz="1200" b="1" spc="200" kern="0" dirty="0">
                 <a:solidFill>
-                  <a:srgbClr val="B91C1C"/>
+                  <a:srgbClr val="0F1B2D"/>
                 </a:solidFill>
                 <a:latin typeface="Calibri" pitchFamily="34" charset="0"/>
                 <a:ea typeface="Calibri" pitchFamily="34" charset="-122"/>
                 <a:cs typeface="Calibri" pitchFamily="34" charset="-120"/>
               </a:rPr>
-              <a:t>09 · SUBSURFACE &amp; DRILLING ACTIVITY</a:t>
+              <a:t>FEATURE · LONGFELLOW / PROJECT HORIZON</a:t>
             </a:r>
             <a:endParaRPr lang="en-US" sz="1200" dirty="0"/>
           </a:p>
@@ -2968,14 +3197,14 @@
       </p:sp>
       <p:sp>
         <p:nvSpPr>
-          <p:cNvPr id="3" name="Text 1"/>
-          <p:cNvSpPr/>
-          <p:nvPr/>
-        </p:nvSpPr>
-        <p:spPr>
-          <a:xfrm>
-            <a:off x="548640" y="713232"/>
-            <a:ext cx="11064240" cy="914400"/>
+          <p:cNvPr id="5" name="Text 2"/>
+          <p:cNvSpPr/>
+          <p:nvPr/>
+        </p:nvSpPr>
+        <p:spPr>
+          <a:xfrm>
+            <a:off x="548640" y="841248"/>
+            <a:ext cx="11064240" cy="822960"/>
           </a:xfrm>
           <a:prstGeom prst="rect">
             <a:avLst/>
@@ -2991,7 +3220,7 @@
               <a:buNone/>
             </a:pPr>
             <a:r>
-              <a:rPr lang="en-US" sz="2600" b="1" dirty="0">
+              <a:rPr lang="en-US" sz="2500" b="1" dirty="0">
                 <a:solidFill>
                   <a:srgbClr val="0F1B2D"/>
                 </a:solidFill>
@@ -2999,30 +3228,58 @@
                 <a:ea typeface="Cambria" pitchFamily="34" charset="-122"/>
                 <a:cs typeface="Cambria" pitchFamily="34" charset="-120"/>
               </a:rPr>
-              <a:t>No new drilling is occurring at or near the site</a:t>
-            </a:r>
-            <a:endParaRPr lang="en-US" sz="2600" dirty="0"/>
-          </a:p>
-        </p:txBody>
-      </p:sp>
-      <p:sp>
-        <p:nvSpPr>
-          <p:cNvPr id="4" name="Shape 2"/>
-          <p:cNvSpPr/>
-          <p:nvPr/>
-        </p:nvSpPr>
-        <p:spPr>
-          <a:xfrm>
-            <a:off x="548640" y="1783080"/>
-            <a:ext cx="2583180" cy="1051560"/>
-          </a:xfrm>
-          <a:prstGeom prst="rect">
-            <a:avLst/>
-          </a:prstGeom>
-          <a:solidFill>
-            <a:srgbClr val="F1F5F9"/>
-          </a:solidFill>
-          <a:ln w="9525">
+              <a:t>CoreWeave exits Project Horizon — ≈ 19.7 miles from Caramba North</a:t>
+            </a:r>
+            <a:endParaRPr lang="en-US" sz="2500" dirty="0"/>
+          </a:p>
+        </p:txBody>
+      </p:sp>
+      <p:pic>
+        <p:nvPicPr>
+          <p:cNvPr id="6" name="Image 1" descr="/home/claude/repo/outputs/reports/om_exhibits/exhibit_longfellow.jpg">    </p:cNvPr>
+          <p:cNvPicPr>
+            <a:picLocks noChangeAspect="1"/>
+          </p:cNvPicPr>
+          <p:nvPr/>
+        </p:nvPicPr>
+        <p:blipFill>
+          <a:blip r:embed="rId2"/>
+          <a:stretch>
+            <a:fillRect/>
+          </a:stretch>
+        </p:blipFill>
+        <p:spPr>
+          <a:xfrm>
+            <a:off x="548640" y="1737360"/>
+            <a:ext cx="5806440" cy="2078442"/>
+          </a:xfrm>
+          <a:prstGeom prst="rect">
+            <a:avLst/>
+          </a:prstGeom>
+          <a:effectLst>
+            <a:outerShdw sx="100000" sy="100000" kx="0" ky="0" algn="bl" rotWithShape="0" blurRad="88900" dist="25400" dir="5400000">
+              <a:srgbClr val="0F1B2D">
+                <a:alpha val="16000"/>
+              </a:srgbClr>
+            </a:outerShdw>
+          </a:effectLst>
+        </p:spPr>
+      </p:pic>
+      <p:sp>
+        <p:nvSpPr>
+          <p:cNvPr id="7" name="Shape 3"/>
+          <p:cNvSpPr/>
+          <p:nvPr/>
+        </p:nvSpPr>
+        <p:spPr>
+          <a:xfrm>
+            <a:off x="548640" y="1737360"/>
+            <a:ext cx="5806440" cy="2078442"/>
+          </a:xfrm>
+          <a:prstGeom prst="rect">
+            <a:avLst/>
+          </a:prstGeom>
+          <a:ln w="12700">
             <a:solidFill>
               <a:srgbClr val="E2E8F0"/>
             </a:solidFill>
@@ -3032,14 +3289,14 @@
       </p:sp>
       <p:sp>
         <p:nvSpPr>
-          <p:cNvPr id="5" name="Text 3"/>
-          <p:cNvSpPr/>
-          <p:nvPr/>
-        </p:nvSpPr>
-        <p:spPr>
-          <a:xfrm>
-            <a:off x="658368" y="1856232"/>
-            <a:ext cx="2363724" cy="548640"/>
+          <p:cNvPr id="8" name="Text 4"/>
+          <p:cNvSpPr/>
+          <p:nvPr/>
+        </p:nvSpPr>
+        <p:spPr>
+          <a:xfrm>
+            <a:off x="548640" y="3907242"/>
+            <a:ext cx="5806440" cy="640080"/>
           </a:xfrm>
           <a:prstGeom prst="rect">
             <a:avLst/>
@@ -3048,53 +3305,14 @@
           <a:ln/>
         </p:spPr>
         <p:txBody>
-          <a:bodyPr wrap="square" rtlCol="0" anchor="b"/>
+          <a:bodyPr wrap="square" rtlCol="0" anchor="ctr"/>
           <a:lstStyle/>
           <a:p>
             <a:pPr indent="0" marL="0">
               <a:buNone/>
             </a:pPr>
             <a:r>
-              <a:rPr lang="en-US" sz="2200" b="1" dirty="0">
-                <a:solidFill>
-                  <a:srgbClr val="0F1B2D"/>
-                </a:solidFill>
-                <a:latin typeface="Calibri" pitchFamily="34" charset="0"/>
-                <a:ea typeface="Calibri" pitchFamily="34" charset="-122"/>
-                <a:cs typeface="Calibri" pitchFamily="34" charset="-120"/>
-              </a:rPr>
-              <a:t>0</a:t>
-            </a:r>
-            <a:endParaRPr lang="en-US" sz="2200" dirty="0"/>
-          </a:p>
-        </p:txBody>
-      </p:sp>
-      <p:sp>
-        <p:nvSpPr>
-          <p:cNvPr id="6" name="Text 4"/>
-          <p:cNvSpPr/>
-          <p:nvPr/>
-        </p:nvSpPr>
-        <p:spPr>
-          <a:xfrm>
-            <a:off x="658368" y="2450592"/>
-            <a:ext cx="2363724" cy="329184"/>
-          </a:xfrm>
-          <a:prstGeom prst="rect">
-            <a:avLst/>
-          </a:prstGeom>
-          <a:noFill/>
-          <a:ln/>
-        </p:spPr>
-        <p:txBody>
-          <a:bodyPr wrap="square" rtlCol="0" anchor="t"/>
-          <a:lstStyle/>
-          <a:p>
-            <a:pPr indent="0" marL="0">
-              <a:buNone/>
-            </a:pPr>
-            <a:r>
-              <a:rPr lang="en-US" sz="850" spc="100" kern="0" dirty="0">
+              <a:rPr lang="en-US" sz="950" i="1" dirty="0">
                 <a:solidFill>
                   <a:srgbClr val="64748B"/>
                 </a:solidFill>
@@ -3102,47 +3320,73 @@
                 <a:ea typeface="Calibri" pitchFamily="34" charset="-122"/>
                 <a:cs typeface="Calibri" pitchFamily="34" charset="-120"/>
               </a:rPr>
-              <a:t>NEW-DRILL WELLS ≤ 2 MI SINCE 2020</a:t>
-            </a:r>
-            <a:endParaRPr lang="en-US" sz="850" dirty="0"/>
-          </a:p>
-        </p:txBody>
-      </p:sp>
-      <p:sp>
-        <p:nvSpPr>
-          <p:cNvPr id="7" name="Shape 5"/>
-          <p:cNvSpPr/>
-          <p:nvPr/>
-        </p:nvSpPr>
-        <p:spPr>
-          <a:xfrm>
-            <a:off x="3268980" y="1783080"/>
-            <a:ext cx="2583180" cy="1051560"/>
-          </a:xfrm>
-          <a:prstGeom prst="rect">
+              <a:t>Exhibit — Longfellow / Project Horizon site (highlighted) and its straight-line distance to the Caramba North tract centroid, ≈ 19.7 miles. Base map: Exhibit 7.1.</a:t>
+            </a:r>
+            <a:endParaRPr lang="en-US" sz="950" dirty="0"/>
+          </a:p>
+        </p:txBody>
+      </p:sp>
+      <p:sp>
+        <p:nvSpPr>
+          <p:cNvPr id="9" name="Shape 5"/>
+          <p:cNvSpPr/>
+          <p:nvPr/>
+        </p:nvSpPr>
+        <p:spPr>
+          <a:xfrm>
+            <a:off x="6629400" y="1792224"/>
+            <a:ext cx="457200" cy="457200"/>
+          </a:xfrm>
+          <a:prstGeom prst="ellipse">
             <a:avLst/>
           </a:prstGeom>
           <a:solidFill>
-            <a:srgbClr val="F1F5F9"/>
+            <a:srgbClr val="B91C1C"/>
           </a:solidFill>
-          <a:ln w="9525">
-            <a:solidFill>
-              <a:srgbClr val="E2E8F0"/>
-            </a:solidFill>
-            <a:prstDash val="solid"/>
-          </a:ln>
-        </p:spPr>
-      </p:sp>
-      <p:sp>
-        <p:nvSpPr>
-          <p:cNvPr id="8" name="Text 6"/>
-          <p:cNvSpPr/>
-          <p:nvPr/>
-        </p:nvSpPr>
-        <p:spPr>
-          <a:xfrm>
-            <a:off x="3378708" y="1856232"/>
-            <a:ext cx="2363724" cy="548640"/>
+          <a:ln/>
+          <a:effectLst>
+            <a:outerShdw sx="100000" sy="100000" kx="0" ky="0" algn="bl" rotWithShape="0" blurRad="88900" dist="25400" dir="5400000">
+              <a:srgbClr val="0F1B2D">
+                <a:alpha val="16000"/>
+              </a:srgbClr>
+            </a:outerShdw>
+          </a:effectLst>
+        </p:spPr>
+      </p:sp>
+      <p:pic>
+        <p:nvPicPr>
+          <p:cNvPr id="10" name="Image 2" descr="preencoded.png">    </p:cNvPr>
+          <p:cNvPicPr>
+            <a:picLocks noChangeAspect="1"/>
+          </p:cNvPicPr>
+          <p:nvPr/>
+        </p:nvPicPr>
+        <p:blipFill>
+          <a:blip r:embed="rId3"/>
+          <a:stretch>
+            <a:fillRect/>
+          </a:stretch>
+        </p:blipFill>
+        <p:spPr>
+          <a:xfrm>
+            <a:off x="6748272" y="1911096"/>
+            <a:ext cx="219456" cy="219456"/>
+          </a:xfrm>
+          <a:prstGeom prst="rect">
+            <a:avLst/>
+          </a:prstGeom>
+        </p:spPr>
+      </p:pic>
+      <p:sp>
+        <p:nvSpPr>
+          <p:cNvPr id="11" name="Text 6"/>
+          <p:cNvSpPr/>
+          <p:nvPr/>
+        </p:nvSpPr>
+        <p:spPr>
+          <a:xfrm>
+            <a:off x="7251192" y="1691640"/>
+            <a:ext cx="4407408" cy="289682"/>
           </a:xfrm>
           <a:prstGeom prst="rect">
             <a:avLst/>
@@ -3152,370 +3396,6 @@
         </p:spPr>
         <p:txBody>
           <a:bodyPr wrap="square" rtlCol="0" anchor="b"/>
-          <a:lstStyle/>
-          <a:p>
-            <a:pPr indent="0" marL="0">
-              <a:buNone/>
-            </a:pPr>
-            <a:r>
-              <a:rPr lang="en-US" sz="2200" b="1" dirty="0">
-                <a:solidFill>
-                  <a:srgbClr val="0F1B2D"/>
-                </a:solidFill>
-                <a:latin typeface="Calibri" pitchFamily="34" charset="0"/>
-                <a:ea typeface="Calibri" pitchFamily="34" charset="-122"/>
-                <a:cs typeface="Calibri" pitchFamily="34" charset="-120"/>
-              </a:rPr>
-              <a:t>0</a:t>
-            </a:r>
-            <a:endParaRPr lang="en-US" sz="2200" dirty="0"/>
-          </a:p>
-        </p:txBody>
-      </p:sp>
-      <p:sp>
-        <p:nvSpPr>
-          <p:cNvPr id="9" name="Text 7"/>
-          <p:cNvSpPr/>
-          <p:nvPr/>
-        </p:nvSpPr>
-        <p:spPr>
-          <a:xfrm>
-            <a:off x="3378708" y="2450592"/>
-            <a:ext cx="2363724" cy="329184"/>
-          </a:xfrm>
-          <a:prstGeom prst="rect">
-            <a:avLst/>
-          </a:prstGeom>
-          <a:noFill/>
-          <a:ln/>
-        </p:spPr>
-        <p:txBody>
-          <a:bodyPr wrap="square" rtlCol="0" anchor="t"/>
-          <a:lstStyle/>
-          <a:p>
-            <a:pPr indent="0" marL="0">
-              <a:buNone/>
-            </a:pPr>
-            <a:r>
-              <a:rPr lang="en-US" sz="850" spc="100" kern="0" dirty="0">
-                <a:solidFill>
-                  <a:srgbClr val="64748B"/>
-                </a:solidFill>
-                <a:latin typeface="Calibri" pitchFamily="34" charset="0"/>
-                <a:ea typeface="Calibri" pitchFamily="34" charset="-122"/>
-                <a:cs typeface="Calibri" pitchFamily="34" charset="-120"/>
-              </a:rPr>
-              <a:t>NEW-DRILL WELLS ≤ 5 MI SINCE 2020</a:t>
-            </a:r>
-            <a:endParaRPr lang="en-US" sz="850" dirty="0"/>
-          </a:p>
-        </p:txBody>
-      </p:sp>
-      <p:sp>
-        <p:nvSpPr>
-          <p:cNvPr id="10" name="Shape 8"/>
-          <p:cNvSpPr/>
-          <p:nvPr/>
-        </p:nvSpPr>
-        <p:spPr>
-          <a:xfrm>
-            <a:off x="5989320" y="1783080"/>
-            <a:ext cx="2583180" cy="1051560"/>
-          </a:xfrm>
-          <a:prstGeom prst="rect">
-            <a:avLst/>
-          </a:prstGeom>
-          <a:solidFill>
-            <a:srgbClr val="F1F5F9"/>
-          </a:solidFill>
-          <a:ln w="9525">
-            <a:solidFill>
-              <a:srgbClr val="E2E8F0"/>
-            </a:solidFill>
-            <a:prstDash val="solid"/>
-          </a:ln>
-        </p:spPr>
-      </p:sp>
-      <p:sp>
-        <p:nvSpPr>
-          <p:cNvPr id="11" name="Text 9"/>
-          <p:cNvSpPr/>
-          <p:nvPr/>
-        </p:nvSpPr>
-        <p:spPr>
-          <a:xfrm>
-            <a:off x="6099048" y="1856232"/>
-            <a:ext cx="2363724" cy="548640"/>
-          </a:xfrm>
-          <a:prstGeom prst="rect">
-            <a:avLst/>
-          </a:prstGeom>
-          <a:noFill/>
-          <a:ln/>
-        </p:spPr>
-        <p:txBody>
-          <a:bodyPr wrap="square" rtlCol="0" anchor="b"/>
-          <a:lstStyle/>
-          <a:p>
-            <a:pPr indent="0" marL="0">
-              <a:buNone/>
-            </a:pPr>
-            <a:r>
-              <a:rPr lang="en-US" sz="2200" b="1" dirty="0">
-                <a:solidFill>
-                  <a:srgbClr val="0F1B2D"/>
-                </a:solidFill>
-                <a:latin typeface="Calibri" pitchFamily="34" charset="0"/>
-                <a:ea typeface="Calibri" pitchFamily="34" charset="-122"/>
-                <a:cs typeface="Calibri" pitchFamily="34" charset="-120"/>
-              </a:rPr>
-              <a:t>1</a:t>
-            </a:r>
-            <a:endParaRPr lang="en-US" sz="2200" dirty="0"/>
-          </a:p>
-        </p:txBody>
-      </p:sp>
-      <p:sp>
-        <p:nvSpPr>
-          <p:cNvPr id="12" name="Text 10"/>
-          <p:cNvSpPr/>
-          <p:nvPr/>
-        </p:nvSpPr>
-        <p:spPr>
-          <a:xfrm>
-            <a:off x="6099048" y="2450592"/>
-            <a:ext cx="2363724" cy="329184"/>
-          </a:xfrm>
-          <a:prstGeom prst="rect">
-            <a:avLst/>
-          </a:prstGeom>
-          <a:noFill/>
-          <a:ln/>
-        </p:spPr>
-        <p:txBody>
-          <a:bodyPr wrap="square" rtlCol="0" anchor="t"/>
-          <a:lstStyle/>
-          <a:p>
-            <a:pPr indent="0" marL="0">
-              <a:buNone/>
-            </a:pPr>
-            <a:r>
-              <a:rPr lang="en-US" sz="850" spc="100" kern="0" dirty="0">
-                <a:solidFill>
-                  <a:srgbClr val="64748B"/>
-                </a:solidFill>
-                <a:latin typeface="Calibri" pitchFamily="34" charset="0"/>
-                <a:ea typeface="Calibri" pitchFamily="34" charset="-122"/>
-                <a:cs typeface="Calibri" pitchFamily="34" charset="-120"/>
-              </a:rPr>
-              <a:t>NEW-DRILL WELLS ≤ 10 MI SINCE 2020</a:t>
-            </a:r>
-            <a:endParaRPr lang="en-US" sz="850" dirty="0"/>
-          </a:p>
-        </p:txBody>
-      </p:sp>
-      <p:sp>
-        <p:nvSpPr>
-          <p:cNvPr id="13" name="Shape 11"/>
-          <p:cNvSpPr/>
-          <p:nvPr/>
-        </p:nvSpPr>
-        <p:spPr>
-          <a:xfrm>
-            <a:off x="8709660" y="1783080"/>
-            <a:ext cx="2583180" cy="1051560"/>
-          </a:xfrm>
-          <a:prstGeom prst="rect">
-            <a:avLst/>
-          </a:prstGeom>
-          <a:solidFill>
-            <a:srgbClr val="F1F5F9"/>
-          </a:solidFill>
-          <a:ln w="9525">
-            <a:solidFill>
-              <a:srgbClr val="E2E8F0"/>
-            </a:solidFill>
-            <a:prstDash val="solid"/>
-          </a:ln>
-        </p:spPr>
-      </p:sp>
-      <p:sp>
-        <p:nvSpPr>
-          <p:cNvPr id="14" name="Text 12"/>
-          <p:cNvSpPr/>
-          <p:nvPr/>
-        </p:nvSpPr>
-        <p:spPr>
-          <a:xfrm>
-            <a:off x="8819388" y="1856232"/>
-            <a:ext cx="2363724" cy="548640"/>
-          </a:xfrm>
-          <a:prstGeom prst="rect">
-            <a:avLst/>
-          </a:prstGeom>
-          <a:noFill/>
-          <a:ln/>
-        </p:spPr>
-        <p:txBody>
-          <a:bodyPr wrap="square" rtlCol="0" anchor="b"/>
-          <a:lstStyle/>
-          <a:p>
-            <a:pPr indent="0" marL="0">
-              <a:buNone/>
-            </a:pPr>
-            <a:r>
-              <a:rPr lang="en-US" sz="2200" b="1" dirty="0">
-                <a:solidFill>
-                  <a:srgbClr val="0F1B2D"/>
-                </a:solidFill>
-                <a:latin typeface="Calibri" pitchFamily="34" charset="0"/>
-                <a:ea typeface="Calibri" pitchFamily="34" charset="-122"/>
-                <a:cs typeface="Calibri" pitchFamily="34" charset="-120"/>
-              </a:rPr>
-              <a:t>0</a:t>
-            </a:r>
-            <a:endParaRPr lang="en-US" sz="2200" dirty="0"/>
-          </a:p>
-        </p:txBody>
-      </p:sp>
-      <p:sp>
-        <p:nvSpPr>
-          <p:cNvPr id="15" name="Text 13"/>
-          <p:cNvSpPr/>
-          <p:nvPr/>
-        </p:nvSpPr>
-        <p:spPr>
-          <a:xfrm>
-            <a:off x="8819388" y="2450592"/>
-            <a:ext cx="2363724" cy="329184"/>
-          </a:xfrm>
-          <a:prstGeom prst="rect">
-            <a:avLst/>
-          </a:prstGeom>
-          <a:noFill/>
-          <a:ln/>
-        </p:spPr>
-        <p:txBody>
-          <a:bodyPr wrap="square" rtlCol="0" anchor="t"/>
-          <a:lstStyle/>
-          <a:p>
-            <a:pPr indent="0" marL="0">
-              <a:buNone/>
-            </a:pPr>
-            <a:r>
-              <a:rPr lang="en-US" sz="850" spc="100" kern="0" dirty="0">
-                <a:solidFill>
-                  <a:srgbClr val="64748B"/>
-                </a:solidFill>
-                <a:latin typeface="Calibri" pitchFamily="34" charset="0"/>
-                <a:ea typeface="Calibri" pitchFamily="34" charset="-122"/>
-                <a:cs typeface="Calibri" pitchFamily="34" charset="-120"/>
-              </a:rPr>
-              <a:t>NEW-DRILL FRACKS ≤ 2 MI, EVER</a:t>
-            </a:r>
-            <a:endParaRPr lang="en-US" sz="850" dirty="0"/>
-          </a:p>
-        </p:txBody>
-      </p:sp>
-      <p:graphicFrame>
-        <p:nvGraphicFramePr>
-          <p:cNvPr id="16" name="Chart 0" descr=""/>
-          <p:cNvGraphicFramePr/>
-          <p:nvPr/>
-        </p:nvGraphicFramePr>
-        <p:xfrm>
-          <a:off x="548640" y="3063240"/>
-          <a:ext cx="6675120" cy="3200400"/>
-        </p:xfrm>
-        <a:graphic xmlns:a="http://schemas.openxmlformats.org/drawingml/2006/main">
-          <a:graphicData uri="http://schemas.openxmlformats.org/drawingml/2006/chart">
-            <c:chart xmlns:c="http://schemas.openxmlformats.org/drawingml/2006/chart" r:id="rId1"/>
-          </a:graphicData>
-        </a:graphic>
-      </p:graphicFrame>
-      <p:sp>
-        <p:nvSpPr>
-          <p:cNvPr id="17" name="Shape 14"/>
-          <p:cNvSpPr/>
-          <p:nvPr/>
-        </p:nvSpPr>
-        <p:spPr>
-          <a:xfrm>
-            <a:off x="7452360" y="3063240"/>
-            <a:ext cx="4206240" cy="3200400"/>
-          </a:xfrm>
-          <a:prstGeom prst="rect">
-            <a:avLst/>
-          </a:prstGeom>
-          <a:solidFill>
-            <a:srgbClr val="FEF7F7"/>
-          </a:solidFill>
-          <a:ln w="15875">
-            <a:solidFill>
-              <a:srgbClr val="B91C1C"/>
-            </a:solidFill>
-            <a:prstDash val="solid"/>
-          </a:ln>
-        </p:spPr>
-      </p:sp>
-      <p:sp>
-        <p:nvSpPr>
-          <p:cNvPr id="18" name="Text 15"/>
-          <p:cNvSpPr/>
-          <p:nvPr/>
-        </p:nvSpPr>
-        <p:spPr>
-          <a:xfrm>
-            <a:off x="7680960" y="3246120"/>
-            <a:ext cx="3749040" cy="274320"/>
-          </a:xfrm>
-          <a:prstGeom prst="rect">
-            <a:avLst/>
-          </a:prstGeom>
-          <a:noFill/>
-          <a:ln/>
-        </p:spPr>
-        <p:txBody>
-          <a:bodyPr wrap="square" rtlCol="0" anchor="ctr"/>
-          <a:lstStyle/>
-          <a:p>
-            <a:pPr indent="0" marL="0">
-              <a:buNone/>
-            </a:pPr>
-            <a:r>
-              <a:rPr lang="en-US" sz="1000" b="1" spc="150" kern="0" dirty="0">
-                <a:solidFill>
-                  <a:srgbClr val="B91C1C"/>
-                </a:solidFill>
-                <a:latin typeface="Calibri" pitchFamily="34" charset="0"/>
-                <a:ea typeface="Calibri" pitchFamily="34" charset="-122"/>
-                <a:cs typeface="Calibri" pitchFamily="34" charset="-120"/>
-              </a:rPr>
-              <a:t>BOTTOM LINE</a:t>
-            </a:r>
-            <a:endParaRPr lang="en-US" sz="1000" dirty="0"/>
-          </a:p>
-        </p:txBody>
-      </p:sp>
-      <p:sp>
-        <p:nvSpPr>
-          <p:cNvPr id="19" name="Text 16"/>
-          <p:cNvSpPr/>
-          <p:nvPr/>
-        </p:nvSpPr>
-        <p:spPr>
-          <a:xfrm>
-            <a:off x="7680960" y="3566160"/>
-            <a:ext cx="3749040" cy="1554480"/>
-          </a:xfrm>
-          <a:prstGeom prst="rect">
-            <a:avLst/>
-          </a:prstGeom>
-          <a:noFill/>
-          <a:ln/>
-        </p:spPr>
-        <p:txBody>
-          <a:bodyPr wrap="square" rtlCol="0" anchor="ctr"/>
           <a:lstStyle/>
           <a:p>
             <a:pPr indent="0" marL="0">
@@ -3530,7 +3410,7 @@
                 <a:ea typeface="Calibri" pitchFamily="34" charset="-122"/>
                 <a:cs typeface="Calibri" pitchFamily="34" charset="-120"/>
               </a:rPr>
-              <a:t>Shallow drilling, hydraulic fracturing, or new drilling of any kind — three independent public records point the same way: it is not happening at or near this site.</a:t>
+              <a:t>568-acre site, Pecos County</a:t>
             </a:r>
             <a:endParaRPr lang="en-US" sz="1300" dirty="0"/>
           </a:p>
@@ -3538,14 +3418,14 @@
       </p:sp>
       <p:sp>
         <p:nvSpPr>
-          <p:cNvPr id="20" name="Text 17"/>
-          <p:cNvSpPr/>
-          <p:nvPr/>
-        </p:nvSpPr>
-        <p:spPr>
-          <a:xfrm>
-            <a:off x="7680960" y="5120640"/>
-            <a:ext cx="3749040" cy="1005840"/>
+          <p:cNvPr id="12" name="Text 7"/>
+          <p:cNvSpPr/>
+          <p:nvPr/>
+        </p:nvSpPr>
+        <p:spPr>
+          <a:xfrm>
+            <a:off x="7251192" y="1968155"/>
+            <a:ext cx="4407408" cy="381853"/>
           </a:xfrm>
           <a:prstGeom prst="rect">
             <a:avLst/>
@@ -3554,14 +3434,14 @@
           <a:ln/>
         </p:spPr>
         <p:txBody>
-          <a:bodyPr wrap="square" rtlCol="0" anchor="ctr"/>
+          <a:bodyPr wrap="square" rtlCol="0" anchor="t"/>
           <a:lstStyle/>
           <a:p>
             <a:pPr indent="0" marL="0">
               <a:buNone/>
             </a:pPr>
             <a:r>
-              <a:rPr lang="en-US" sz="1000" dirty="0">
+              <a:rPr lang="en-US" sz="1050" dirty="0">
                 <a:solidFill>
                   <a:srgbClr val="475569"/>
                 </a:solidFill>
@@ -3569,15 +3449,611 @@
                 <a:ea typeface="Calibri" pitchFamily="34" charset="-122"/>
                 <a:cs typeface="Calibri" pitchFamily="34" charset="-120"/>
               </a:rPr>
-              <a:t>Pecos: 115 new wells since 2020 vs. peer average 1,181. 83% of non-plugged wellbores ≤10 mi are marginal/end-of-life.</a:t>
-            </a:r>
-            <a:endParaRPr lang="en-US" sz="1000" dirty="0"/>
-          </a:p>
-        </p:txBody>
-      </p:sp>
-      <p:sp>
-        <p:nvSpPr>
-          <p:cNvPr id="21" name="Text 18"/>
+              <a:t>Longfellow Ranch (Mitchell family), ≈ 25 miles from Fort Stockton — announced Oct 2025 as a 2 GW, 8-phase campus.</a:t>
+            </a:r>
+            <a:endParaRPr lang="en-US" sz="1050" dirty="0"/>
+          </a:p>
+        </p:txBody>
+      </p:sp>
+      <p:sp>
+        <p:nvSpPr>
+          <p:cNvPr id="13" name="Shape 8"/>
+          <p:cNvSpPr/>
+          <p:nvPr/>
+        </p:nvSpPr>
+        <p:spPr>
+          <a:xfrm>
+            <a:off x="6629400" y="2450592"/>
+            <a:ext cx="457200" cy="457200"/>
+          </a:xfrm>
+          <a:prstGeom prst="ellipse">
+            <a:avLst/>
+          </a:prstGeom>
+          <a:solidFill>
+            <a:srgbClr val="B91C1C"/>
+          </a:solidFill>
+          <a:ln/>
+          <a:effectLst>
+            <a:outerShdw sx="100000" sy="100000" kx="0" ky="0" algn="bl" rotWithShape="0" blurRad="88900" dist="25400" dir="5400000">
+              <a:srgbClr val="0F1B2D">
+                <a:alpha val="16000"/>
+              </a:srgbClr>
+            </a:outerShdw>
+          </a:effectLst>
+        </p:spPr>
+      </p:sp>
+      <p:pic>
+        <p:nvPicPr>
+          <p:cNvPr id="14" name="Image 3" descr="preencoded.png">    </p:cNvPr>
+          <p:cNvPicPr>
+            <a:picLocks noChangeAspect="1"/>
+          </p:cNvPicPr>
+          <p:nvPr/>
+        </p:nvPicPr>
+        <p:blipFill>
+          <a:blip r:embed="rId4"/>
+          <a:stretch>
+            <a:fillRect/>
+          </a:stretch>
+        </p:blipFill>
+        <p:spPr>
+          <a:xfrm>
+            <a:off x="6748272" y="2569464"/>
+            <a:ext cx="219456" cy="219456"/>
+          </a:xfrm>
+          <a:prstGeom prst="rect">
+            <a:avLst/>
+          </a:prstGeom>
+        </p:spPr>
+      </p:pic>
+      <p:sp>
+        <p:nvSpPr>
+          <p:cNvPr id="15" name="Text 9"/>
+          <p:cNvSpPr/>
+          <p:nvPr/>
+        </p:nvSpPr>
+        <p:spPr>
+          <a:xfrm>
+            <a:off x="7251192" y="2350008"/>
+            <a:ext cx="4407408" cy="289682"/>
+          </a:xfrm>
+          <a:prstGeom prst="rect">
+            <a:avLst/>
+          </a:prstGeom>
+          <a:noFill/>
+          <a:ln/>
+        </p:spPr>
+        <p:txBody>
+          <a:bodyPr wrap="square" rtlCol="0" anchor="b"/>
+          <a:lstStyle/>
+          <a:p>
+            <a:pPr indent="0" marL="0">
+              <a:buNone/>
+            </a:pPr>
+            <a:r>
+              <a:rPr lang="en-US" sz="1300" b="1" dirty="0">
+                <a:solidFill>
+                  <a:srgbClr val="0F1B2D"/>
+                </a:solidFill>
+                <a:latin typeface="Calibri" pitchFamily="34" charset="0"/>
+                <a:ea typeface="Calibri" pitchFamily="34" charset="-122"/>
+                <a:cs typeface="Calibri" pitchFamily="34" charset="-120"/>
+              </a:rPr>
+              <a:t>CoreWeave exited the anchor lease, Apr 2026</a:t>
+            </a:r>
+            <a:endParaRPr lang="en-US" sz="1300" dirty="0"/>
+          </a:p>
+        </p:txBody>
+      </p:sp>
+      <p:sp>
+        <p:nvSpPr>
+          <p:cNvPr id="16" name="Text 10"/>
+          <p:cNvSpPr/>
+          <p:nvPr/>
+        </p:nvSpPr>
+        <p:spPr>
+          <a:xfrm>
+            <a:off x="7251192" y="2626523"/>
+            <a:ext cx="4407408" cy="381853"/>
+          </a:xfrm>
+          <a:prstGeom prst="rect">
+            <a:avLst/>
+          </a:prstGeom>
+          <a:noFill/>
+          <a:ln/>
+        </p:spPr>
+        <p:txBody>
+          <a:bodyPr wrap="square" rtlCol="0" anchor="t"/>
+          <a:lstStyle/>
+          <a:p>
+            <a:pPr indent="0" marL="0">
+              <a:buNone/>
+            </a:pPr>
+            <a:r>
+              <a:rPr lang="en-US" sz="1050" dirty="0">
+                <a:solidFill>
+                  <a:srgbClr val="475569"/>
+                </a:solidFill>
+                <a:latin typeface="Calibri" pitchFamily="34" charset="0"/>
+                <a:ea typeface="Calibri" pitchFamily="34" charset="-122"/>
+                <a:cs typeface="Calibri" pitchFamily="34" charset="-120"/>
+              </a:rPr>
+              <a:t>250 MW / 15-yr lease (to 500 MW) plus 40,000+ GPUs — exited after Poolside missed its GPU timeline and its funding round fell through.</a:t>
+            </a:r>
+            <a:endParaRPr lang="en-US" sz="1050" dirty="0"/>
+          </a:p>
+        </p:txBody>
+      </p:sp>
+      <p:sp>
+        <p:nvSpPr>
+          <p:cNvPr id="17" name="Shape 11"/>
+          <p:cNvSpPr/>
+          <p:nvPr/>
+        </p:nvSpPr>
+        <p:spPr>
+          <a:xfrm>
+            <a:off x="6629400" y="3108960"/>
+            <a:ext cx="457200" cy="457200"/>
+          </a:xfrm>
+          <a:prstGeom prst="ellipse">
+            <a:avLst/>
+          </a:prstGeom>
+          <a:solidFill>
+            <a:srgbClr val="B91C1C"/>
+          </a:solidFill>
+          <a:ln/>
+          <a:effectLst>
+            <a:outerShdw sx="100000" sy="100000" kx="0" ky="0" algn="bl" rotWithShape="0" blurRad="88900" dist="25400" dir="5400000">
+              <a:srgbClr val="0F1B2D">
+                <a:alpha val="16000"/>
+              </a:srgbClr>
+            </a:outerShdw>
+          </a:effectLst>
+        </p:spPr>
+      </p:sp>
+      <p:pic>
+        <p:nvPicPr>
+          <p:cNvPr id="18" name="Image 4" descr="preencoded.png">    </p:cNvPr>
+          <p:cNvPicPr>
+            <a:picLocks noChangeAspect="1"/>
+          </p:cNvPicPr>
+          <p:nvPr/>
+        </p:nvPicPr>
+        <p:blipFill>
+          <a:blip r:embed="rId5"/>
+          <a:stretch>
+            <a:fillRect/>
+          </a:stretch>
+        </p:blipFill>
+        <p:spPr>
+          <a:xfrm>
+            <a:off x="6748272" y="3227832"/>
+            <a:ext cx="219456" cy="219456"/>
+          </a:xfrm>
+          <a:prstGeom prst="rect">
+            <a:avLst/>
+          </a:prstGeom>
+        </p:spPr>
+      </p:pic>
+      <p:sp>
+        <p:nvSpPr>
+          <p:cNvPr id="19" name="Text 12"/>
+          <p:cNvSpPr/>
+          <p:nvPr/>
+        </p:nvSpPr>
+        <p:spPr>
+          <a:xfrm>
+            <a:off x="7251192" y="3008376"/>
+            <a:ext cx="4407408" cy="289682"/>
+          </a:xfrm>
+          <a:prstGeom prst="rect">
+            <a:avLst/>
+          </a:prstGeom>
+          <a:noFill/>
+          <a:ln/>
+        </p:spPr>
+        <p:txBody>
+          <a:bodyPr wrap="square" rtlCol="0" anchor="b"/>
+          <a:lstStyle/>
+          <a:p>
+            <a:pPr indent="0" marL="0">
+              <a:buNone/>
+            </a:pPr>
+            <a:r>
+              <a:rPr lang="en-US" sz="1300" b="1" dirty="0">
+                <a:solidFill>
+                  <a:srgbClr val="0F1B2D"/>
+                </a:solidFill>
+                <a:latin typeface="Calibri" pitchFamily="34" charset="0"/>
+                <a:ea typeface="Calibri" pitchFamily="34" charset="-122"/>
+                <a:cs typeface="Calibri" pitchFamily="34" charset="-120"/>
+              </a:rPr>
+              <a:t>Behind-the-meter gas, no confirmed permit on file</a:t>
+            </a:r>
+            <a:endParaRPr lang="en-US" sz="1300" dirty="0"/>
+          </a:p>
+        </p:txBody>
+      </p:sp>
+      <p:sp>
+        <p:nvSpPr>
+          <p:cNvPr id="20" name="Text 13"/>
+          <p:cNvSpPr/>
+          <p:nvPr/>
+        </p:nvSpPr>
+        <p:spPr>
+          <a:xfrm>
+            <a:off x="7251192" y="3284891"/>
+            <a:ext cx="4407408" cy="381853"/>
+          </a:xfrm>
+          <a:prstGeom prst="rect">
+            <a:avLst/>
+          </a:prstGeom>
+          <a:noFill/>
+          <a:ln/>
+        </p:spPr>
+        <p:txBody>
+          <a:bodyPr wrap="square" rtlCol="0" anchor="t"/>
+          <a:lstStyle/>
+          <a:p>
+            <a:pPr indent="0" marL="0">
+              <a:buNone/>
+            </a:pPr>
+            <a:r>
+              <a:rPr lang="en-US" sz="1050" dirty="0">
+                <a:solidFill>
+                  <a:srgbClr val="475569"/>
+                </a:solidFill>
+                <a:latin typeface="Calibri" pitchFamily="34" charset="0"/>
+                <a:ea typeface="Calibri" pitchFamily="34" charset="-122"/>
+                <a:cs typeface="Calibri" pitchFamily="34" charset="-120"/>
+              </a:rPr>
+              <a:t>SCR-equipped aero-derivative turbines planned; no TCEQ air-permit or ERCOT queue record found for this site as of Aug 2026.</a:t>
+            </a:r>
+            <a:endParaRPr lang="en-US" sz="1050" dirty="0"/>
+          </a:p>
+        </p:txBody>
+      </p:sp>
+      <p:sp>
+        <p:nvSpPr>
+          <p:cNvPr id="21" name="Shape 14"/>
+          <p:cNvSpPr/>
+          <p:nvPr/>
+        </p:nvSpPr>
+        <p:spPr>
+          <a:xfrm>
+            <a:off x="6629400" y="3767328"/>
+            <a:ext cx="457200" cy="457200"/>
+          </a:xfrm>
+          <a:prstGeom prst="ellipse">
+            <a:avLst/>
+          </a:prstGeom>
+          <a:solidFill>
+            <a:srgbClr val="B91C1C"/>
+          </a:solidFill>
+          <a:ln/>
+          <a:effectLst>
+            <a:outerShdw sx="100000" sy="100000" kx="0" ky="0" algn="bl" rotWithShape="0" blurRad="88900" dist="25400" dir="5400000">
+              <a:srgbClr val="0F1B2D">
+                <a:alpha val="16000"/>
+              </a:srgbClr>
+            </a:outerShdw>
+          </a:effectLst>
+        </p:spPr>
+      </p:sp>
+      <p:pic>
+        <p:nvPicPr>
+          <p:cNvPr id="22" name="Image 5" descr="preencoded.png">    </p:cNvPr>
+          <p:cNvPicPr>
+            <a:picLocks noChangeAspect="1"/>
+          </p:cNvPicPr>
+          <p:nvPr/>
+        </p:nvPicPr>
+        <p:blipFill>
+          <a:blip r:embed="rId6"/>
+          <a:stretch>
+            <a:fillRect/>
+          </a:stretch>
+        </p:blipFill>
+        <p:spPr>
+          <a:xfrm>
+            <a:off x="6748272" y="3886200"/>
+            <a:ext cx="219456" cy="219456"/>
+          </a:xfrm>
+          <a:prstGeom prst="rect">
+            <a:avLst/>
+          </a:prstGeom>
+        </p:spPr>
+      </p:pic>
+      <p:sp>
+        <p:nvSpPr>
+          <p:cNvPr id="23" name="Text 15"/>
+          <p:cNvSpPr/>
+          <p:nvPr/>
+        </p:nvSpPr>
+        <p:spPr>
+          <a:xfrm>
+            <a:off x="7251192" y="3666744"/>
+            <a:ext cx="4407408" cy="289682"/>
+          </a:xfrm>
+          <a:prstGeom prst="rect">
+            <a:avLst/>
+          </a:prstGeom>
+          <a:noFill/>
+          <a:ln/>
+        </p:spPr>
+        <p:txBody>
+          <a:bodyPr wrap="square" rtlCol="0" anchor="b"/>
+          <a:lstStyle/>
+          <a:p>
+            <a:pPr indent="0" marL="0">
+              <a:buNone/>
+            </a:pPr>
+            <a:r>
+              <a:rPr lang="en-US" sz="1300" b="1" dirty="0">
+                <a:solidFill>
+                  <a:srgbClr val="0F1B2D"/>
+                </a:solidFill>
+                <a:latin typeface="Calibri" pitchFamily="34" charset="0"/>
+                <a:ea typeface="Calibri" pitchFamily="34" charset="-122"/>
+                <a:cs typeface="Calibri" pitchFamily="34" charset="-120"/>
+              </a:rPr>
+              <a:t>Revised to ~1.2 GW initial, scaling toward ~7 GW</a:t>
+            </a:r>
+            <a:endParaRPr lang="en-US" sz="1300" dirty="0"/>
+          </a:p>
+        </p:txBody>
+      </p:sp>
+      <p:sp>
+        <p:nvSpPr>
+          <p:cNvPr id="24" name="Text 16"/>
+          <p:cNvSpPr/>
+          <p:nvPr/>
+        </p:nvSpPr>
+        <p:spPr>
+          <a:xfrm>
+            <a:off x="7251192" y="3943259"/>
+            <a:ext cx="4407408" cy="381853"/>
+          </a:xfrm>
+          <a:prstGeom prst="rect">
+            <a:avLst/>
+          </a:prstGeom>
+          <a:noFill/>
+          <a:ln/>
+        </p:spPr>
+        <p:txBody>
+          <a:bodyPr wrap="square" rtlCol="0" anchor="t"/>
+          <a:lstStyle/>
+          <a:p>
+            <a:pPr indent="0" marL="0">
+              <a:buNone/>
+            </a:pPr>
+            <a:r>
+              <a:rPr lang="en-US" sz="1050" dirty="0">
+                <a:solidFill>
+                  <a:srgbClr val="475569"/>
+                </a:solidFill>
+                <a:latin typeface="Calibri" pitchFamily="34" charset="0"/>
+                <a:ea typeface="Calibri" pitchFamily="34" charset="-122"/>
+                <a:cs typeface="Calibri" pitchFamily="34" charset="-120"/>
+              </a:rPr>
+              <a:t>Per Jun 2026 reporting — down from the original 2 GW first-phase framing, pending a new anchor tenant.</a:t>
+            </a:r>
+            <a:endParaRPr lang="en-US" sz="1050" dirty="0"/>
+          </a:p>
+        </p:txBody>
+      </p:sp>
+      <p:sp>
+        <p:nvSpPr>
+          <p:cNvPr id="25" name="Shape 17"/>
+          <p:cNvSpPr/>
+          <p:nvPr/>
+        </p:nvSpPr>
+        <p:spPr>
+          <a:xfrm>
+            <a:off x="6629400" y="4425696"/>
+            <a:ext cx="457200" cy="457200"/>
+          </a:xfrm>
+          <a:prstGeom prst="ellipse">
+            <a:avLst/>
+          </a:prstGeom>
+          <a:solidFill>
+            <a:srgbClr val="B91C1C"/>
+          </a:solidFill>
+          <a:ln/>
+          <a:effectLst>
+            <a:outerShdw sx="100000" sy="100000" kx="0" ky="0" algn="bl" rotWithShape="0" blurRad="88900" dist="25400" dir="5400000">
+              <a:srgbClr val="0F1B2D">
+                <a:alpha val="16000"/>
+              </a:srgbClr>
+            </a:outerShdw>
+          </a:effectLst>
+        </p:spPr>
+      </p:sp>
+      <p:pic>
+        <p:nvPicPr>
+          <p:cNvPr id="26" name="Image 6" descr="preencoded.png">    </p:cNvPr>
+          <p:cNvPicPr>
+            <a:picLocks noChangeAspect="1"/>
+          </p:cNvPicPr>
+          <p:nvPr/>
+        </p:nvPicPr>
+        <p:blipFill>
+          <a:blip r:embed="rId7"/>
+          <a:stretch>
+            <a:fillRect/>
+          </a:stretch>
+        </p:blipFill>
+        <p:spPr>
+          <a:xfrm>
+            <a:off x="6748272" y="4544568"/>
+            <a:ext cx="219456" cy="219456"/>
+          </a:xfrm>
+          <a:prstGeom prst="rect">
+            <a:avLst/>
+          </a:prstGeom>
+        </p:spPr>
+      </p:pic>
+      <p:sp>
+        <p:nvSpPr>
+          <p:cNvPr id="27" name="Text 18"/>
+          <p:cNvSpPr/>
+          <p:nvPr/>
+        </p:nvSpPr>
+        <p:spPr>
+          <a:xfrm>
+            <a:off x="7251192" y="4325112"/>
+            <a:ext cx="4407408" cy="289682"/>
+          </a:xfrm>
+          <a:prstGeom prst="rect">
+            <a:avLst/>
+          </a:prstGeom>
+          <a:noFill/>
+          <a:ln/>
+        </p:spPr>
+        <p:txBody>
+          <a:bodyPr wrap="square" rtlCol="0" anchor="b"/>
+          <a:lstStyle/>
+          <a:p>
+            <a:pPr indent="0" marL="0">
+              <a:buNone/>
+            </a:pPr>
+            <a:r>
+              <a:rPr lang="en-US" sz="1300" b="1" dirty="0">
+                <a:solidFill>
+                  <a:srgbClr val="0F1B2D"/>
+                </a:solidFill>
+                <a:latin typeface="Calibri" pitchFamily="34" charset="0"/>
+                <a:ea typeface="Calibri" pitchFamily="34" charset="-122"/>
+                <a:cs typeface="Calibri" pitchFamily="34" charset="-120"/>
+              </a:rPr>
+              <a:t>Now under Poolside Infrastructure Company</a:t>
+            </a:r>
+            <a:endParaRPr lang="en-US" sz="1300" dirty="0"/>
+          </a:p>
+        </p:txBody>
+      </p:sp>
+      <p:sp>
+        <p:nvSpPr>
+          <p:cNvPr id="28" name="Text 19"/>
+          <p:cNvSpPr/>
+          <p:nvPr/>
+        </p:nvSpPr>
+        <p:spPr>
+          <a:xfrm>
+            <a:off x="7251192" y="4601627"/>
+            <a:ext cx="4407408" cy="381853"/>
+          </a:xfrm>
+          <a:prstGeom prst="rect">
+            <a:avLst/>
+          </a:prstGeom>
+          <a:noFill/>
+          <a:ln/>
+        </p:spPr>
+        <p:txBody>
+          <a:bodyPr wrap="square" rtlCol="0" anchor="t"/>
+          <a:lstStyle/>
+          <a:p>
+            <a:pPr indent="0" marL="0">
+              <a:buNone/>
+            </a:pPr>
+            <a:r>
+              <a:rPr lang="en-US" sz="1050" dirty="0">
+                <a:solidFill>
+                  <a:srgbClr val="475569"/>
+                </a:solidFill>
+                <a:latin typeface="Calibri" pitchFamily="34" charset="0"/>
+                <a:ea typeface="Calibri" pitchFamily="34" charset="-122"/>
+                <a:cs typeface="Calibri" pitchFamily="34" charset="-120"/>
+              </a:rPr>
+              <a:t>Spun-off infra arm continuing the site without the AI lab; named a new CFO Jul 2026 and is courting a replacement anchor tenant.</a:t>
+            </a:r>
+            <a:endParaRPr lang="en-US" sz="1050" dirty="0"/>
+          </a:p>
+        </p:txBody>
+      </p:sp>
+      <p:sp>
+        <p:nvSpPr>
+          <p:cNvPr id="29" name="Shape 20"/>
+          <p:cNvSpPr/>
+          <p:nvPr/>
+        </p:nvSpPr>
+        <p:spPr>
+          <a:xfrm>
+            <a:off x="6629400" y="5038344"/>
+            <a:ext cx="5029200" cy="566928"/>
+          </a:xfrm>
+          <a:prstGeom prst="roundRect">
+            <a:avLst>
+              <a:gd name="adj" fmla="val 6452"/>
+            </a:avLst>
+          </a:prstGeom>
+          <a:solidFill>
+            <a:srgbClr val="FFFBEB"/>
+          </a:solidFill>
+          <a:ln w="12700">
+            <a:solidFill>
+              <a:srgbClr val="FCD34D"/>
+            </a:solidFill>
+            <a:prstDash val="solid"/>
+          </a:ln>
+        </p:spPr>
+      </p:sp>
+      <p:sp>
+        <p:nvSpPr>
+          <p:cNvPr id="30" name="Text 21"/>
+          <p:cNvSpPr/>
+          <p:nvPr/>
+        </p:nvSpPr>
+        <p:spPr>
+          <a:xfrm>
+            <a:off x="6757416" y="5084064"/>
+            <a:ext cx="4773168" cy="475488"/>
+          </a:xfrm>
+          <a:prstGeom prst="rect">
+            <a:avLst/>
+          </a:prstGeom>
+          <a:noFill/>
+          <a:ln/>
+        </p:spPr>
+        <p:txBody>
+          <a:bodyPr wrap="square" rtlCol="0" anchor="ctr"/>
+          <a:lstStyle/>
+          <a:p>
+            <a:pPr indent="0" marL="0">
+              <a:buNone/>
+            </a:pPr>
+            <a:r>
+              <a:rPr lang="en-US" sz="900" b="1" dirty="0">
+                <a:solidFill>
+                  <a:srgbClr val="78350F"/>
+                </a:solidFill>
+                <a:latin typeface="Calibri" pitchFamily="34" charset="0"/>
+                <a:ea typeface="Calibri" pitchFamily="34" charset="-122"/>
+                <a:cs typeface="Calibri" pitchFamily="34" charset="-120"/>
+              </a:rPr>
+              <a:t>Clarification — </a:t>
+            </a:r>
+            <a:pPr indent="0" marL="0">
+              <a:buNone/>
+            </a:pPr>
+            <a:r>
+              <a:rPr lang="en-US" sz="900" dirty="0">
+                <a:solidFill>
+                  <a:srgbClr val="78350F"/>
+                </a:solidFill>
+                <a:latin typeface="Calibri" pitchFamily="34" charset="0"/>
+                <a:ea typeface="Calibri" pitchFamily="34" charset="-122"/>
+                <a:cs typeface="Calibri" pitchFamily="34" charset="-120"/>
+              </a:rPr>
+              <a:t>the original 2 GW / CoreWeave framing on Exhibit 7.1 predates the Apr 2026 lease termination; treat capacity and timeline figures for this site as unresolved pending a new anchor tenant.</a:t>
+            </a:r>
+            <a:endParaRPr lang="en-US" sz="900" dirty="0"/>
+          </a:p>
+        </p:txBody>
+      </p:sp>
+      <p:sp>
+        <p:nvSpPr>
+          <p:cNvPr id="31" name="Text 22"/>
           <p:cNvSpPr/>
           <p:nvPr/>
         </p:nvSpPr>
@@ -3616,7 +4092,7 @@
       </p:sp>
       <p:sp>
         <p:nvSpPr>
-          <p:cNvPr id="22" name="Text 19"/>
+          <p:cNvPr id="32" name="Text 23"/>
           <p:cNvSpPr/>
           <p:nvPr/>
         </p:nvSpPr>
@@ -3687,14 +4163,1893 @@
       </p:grpSpPr>
       <p:sp>
         <p:nvSpPr>
-          <p:cNvPr id="2" name="Text 0"/>
-          <p:cNvSpPr/>
-          <p:nvPr/>
-        </p:nvSpPr>
-        <p:spPr>
-          <a:xfrm>
-            <a:off x="548640" y="384048"/>
-            <a:ext cx="9144000" cy="320040"/>
+          <p:cNvPr id="2" name="Shape 0"/>
+          <p:cNvSpPr/>
+          <p:nvPr/>
+        </p:nvSpPr>
+        <p:spPr>
+          <a:xfrm>
+            <a:off x="548640" y="310896"/>
+            <a:ext cx="402336" cy="402336"/>
+          </a:xfrm>
+          <a:prstGeom prst="ellipse">
+            <a:avLst/>
+          </a:prstGeom>
+          <a:solidFill>
+            <a:srgbClr val="B91C1C"/>
+          </a:solidFill>
+          <a:ln/>
+          <a:effectLst>
+            <a:outerShdw sx="100000" sy="100000" kx="0" ky="0" algn="bl" rotWithShape="0" blurRad="88900" dist="25400" dir="5400000">
+              <a:srgbClr val="0F1B2D">
+                <a:alpha val="16000"/>
+              </a:srgbClr>
+            </a:outerShdw>
+          </a:effectLst>
+        </p:spPr>
+      </p:sp>
+      <p:pic>
+        <p:nvPicPr>
+          <p:cNvPr id="3" name="Image 0" descr="preencoded.png">    </p:cNvPr>
+          <p:cNvPicPr>
+            <a:picLocks noChangeAspect="1"/>
+          </p:cNvPicPr>
+          <p:nvPr/>
+        </p:nvPicPr>
+        <p:blipFill>
+          <a:blip r:embed="rId1"/>
+          <a:stretch>
+            <a:fillRect/>
+          </a:stretch>
+        </p:blipFill>
+        <p:spPr>
+          <a:xfrm>
+            <a:off x="653247" y="415503"/>
+            <a:ext cx="193121" cy="193121"/>
+          </a:xfrm>
+          <a:prstGeom prst="rect">
+            <a:avLst/>
+          </a:prstGeom>
+        </p:spPr>
+      </p:pic>
+      <p:sp>
+        <p:nvSpPr>
+          <p:cNvPr id="4" name="Text 1"/>
+          <p:cNvSpPr/>
+          <p:nvPr/>
+        </p:nvSpPr>
+        <p:spPr>
+          <a:xfrm>
+            <a:off x="1097280" y="365760"/>
+            <a:ext cx="9144000" cy="365760"/>
+          </a:xfrm>
+          <a:prstGeom prst="rect">
+            <a:avLst/>
+          </a:prstGeom>
+          <a:noFill/>
+          <a:ln/>
+        </p:spPr>
+        <p:txBody>
+          <a:bodyPr wrap="square" rtlCol="0" anchor="ctr"/>
+          <a:lstStyle/>
+          <a:p>
+            <a:pPr indent="0" marL="0">
+              <a:buNone/>
+            </a:pPr>
+            <a:r>
+              <a:rPr lang="en-US" sz="1200" b="1" spc="200" kern="0" dirty="0">
+                <a:solidFill>
+                  <a:srgbClr val="B91C1C"/>
+                </a:solidFill>
+                <a:latin typeface="Calibri" pitchFamily="34" charset="0"/>
+                <a:ea typeface="Calibri" pitchFamily="34" charset="-122"/>
+                <a:cs typeface="Calibri" pitchFamily="34" charset="-120"/>
+              </a:rPr>
+              <a:t>08 · THE DILIGENCE PLATFORM</a:t>
+            </a:r>
+            <a:endParaRPr lang="en-US" sz="1200" dirty="0"/>
+          </a:p>
+        </p:txBody>
+      </p:sp>
+      <p:sp>
+        <p:nvSpPr>
+          <p:cNvPr id="5" name="Text 2"/>
+          <p:cNvSpPr/>
+          <p:nvPr/>
+        </p:nvSpPr>
+        <p:spPr>
+          <a:xfrm>
+            <a:off x="548640" y="841248"/>
+            <a:ext cx="11064240" cy="822960"/>
+          </a:xfrm>
+          <a:prstGeom prst="rect">
+            <a:avLst/>
+          </a:prstGeom>
+          <a:noFill/>
+          <a:ln/>
+        </p:spPr>
+        <p:txBody>
+          <a:bodyPr wrap="square" rtlCol="0" anchor="t"/>
+          <a:lstStyle/>
+          <a:p>
+            <a:pPr indent="0" marL="0">
+              <a:buNone/>
+            </a:pPr>
+            <a:r>
+              <a:rPr lang="en-US" sz="2500" b="1" dirty="0">
+                <a:solidFill>
+                  <a:srgbClr val="0F1B2D"/>
+                </a:solidFill>
+                <a:latin typeface="Cambria" pitchFamily="34" charset="0"/>
+                <a:ea typeface="Cambria" pitchFamily="34" charset="-122"/>
+                <a:cs typeface="Cambria" pitchFamily="34" charset="-120"/>
+              </a:rPr>
+              <a:t>Every figure is independently verifiable, feature by feature</a:t>
+            </a:r>
+            <a:endParaRPr lang="en-US" sz="2500" dirty="0"/>
+          </a:p>
+        </p:txBody>
+      </p:sp>
+      <p:graphicFrame>
+        <p:nvGraphicFramePr>
+          <p:cNvPr id="12" name="Table 0"/>
+          <p:cNvGraphicFramePr>
+            <a:graphicFrameLocks noGrp="1"/>
+          </p:cNvGraphicFramePr>
+          <p:nvPr>
+            <p:extLst>
+              <p:ext uri="{D42A27DB-BD31-4B8C-83A1-F6EECF244321}">
+                <p14:modId xmlns:p14="http://schemas.microsoft.com/office/powerpoint/2010/main" val="1579011935"/>
+              </p:ext>
+            </p:extLst>
+          </p:nvPr>
+        </p:nvGraphicFramePr>
+        <p:xfrm>
+          <a:off x="548640" y="1828800"/>
+          <a:ext cx="11064240" cy="914400"/>
+        </p:xfrm>
+        <a:graphic>
+          <a:graphicData uri="http://schemas.openxmlformats.org/drawingml/2006/table">
+            <a:tbl>
+              <a:tblPr/>
+              <a:tblGrid>
+                <a:gridCol w="3108960"/>
+                <a:gridCol w="7955280"/>
+              </a:tblGrid>
+              <a:tr h="0">
+                <a:tc>
+                  <a:txBody>
+                    <a:bodyPr/>
+                    <a:lstStyle/>
+                    <a:p>
+                      <a:pPr algn="l" indent="0" marL="0">
+                        <a:buNone/>
+                      </a:pPr>
+                      <a:r>
+                        <a:rPr lang="en-US" sz="1200" b="1" dirty="0">
+                          <a:solidFill>
+                            <a:srgbClr val="475569"/>
+                          </a:solidFill>
+                          <a:latin typeface="Calibri" pitchFamily="34" charset="0"/>
+                          <a:ea typeface="Calibri" pitchFamily="34" charset="-122"/>
+                          <a:cs typeface="Calibri" pitchFamily="34" charset="-120"/>
+                        </a:rPr>
+                        <a:t>PLATFORM PROPERTY</a:t>
+                      </a:r>
+                      <a:endParaRPr lang="en-US" sz="1200" dirty="0">
+                        <a:latin typeface="Calibri" charset="0"/>
+                        <a:ea typeface="Calibri" charset="0"/>
+                        <a:cs typeface="Calibri" charset="0"/>
+                      </a:endParaRPr>
+                    </a:p>
+                  </a:txBody>
+                  <a:tcPr marL="73152" marR="73152" marT="36576" marB="36576" anchor="ctr">
+                    <a:lnL w="6350" cap="flat" cmpd="sng" algn="ctr">
+                      <a:solidFill>
+                        <a:srgbClr val="E2E8F0"/>
+                      </a:solidFill>
+                      <a:prstDash val="solid"/>
+                      <a:round/>
+                      <a:headEnd type="none" w="med" len="med"/>
+                      <a:tailEnd type="none" w="med" len="med"/>
+                    </a:lnL>
+                    <a:lnR w="6350" cap="flat" cmpd="sng" algn="ctr">
+                      <a:solidFill>
+                        <a:srgbClr val="E2E8F0"/>
+                      </a:solidFill>
+                      <a:prstDash val="solid"/>
+                      <a:round/>
+                      <a:headEnd type="none" w="med" len="med"/>
+                      <a:tailEnd type="none" w="med" len="med"/>
+                    </a:lnR>
+                    <a:lnT w="6350" cap="flat" cmpd="sng" algn="ctr">
+                      <a:solidFill>
+                        <a:srgbClr val="E2E8F0"/>
+                      </a:solidFill>
+                      <a:prstDash val="solid"/>
+                      <a:round/>
+                      <a:headEnd type="none" w="med" len="med"/>
+                      <a:tailEnd type="none" w="med" len="med"/>
+                    </a:lnT>
+                    <a:lnB w="6350" cap="flat" cmpd="sng" algn="ctr">
+                      <a:solidFill>
+                        <a:srgbClr val="E2E8F0"/>
+                      </a:solidFill>
+                      <a:prstDash val="solid"/>
+                      <a:round/>
+                      <a:headEnd type="none" w="med" len="med"/>
+                      <a:tailEnd type="none" w="med" len="med"/>
+                    </a:lnB>
+                    <a:solidFill>
+                      <a:srgbClr val="F1F5F9"/>
+                    </a:solidFill>
+                  </a:tcPr>
+                </a:tc>
+                <a:tc>
+                  <a:txBody>
+                    <a:bodyPr/>
+                    <a:lstStyle/>
+                    <a:p>
+                      <a:pPr algn="l" indent="0" marL="0">
+                        <a:buNone/>
+                      </a:pPr>
+                      <a:r>
+                        <a:rPr lang="en-US" sz="1200" b="1" dirty="0">
+                          <a:solidFill>
+                            <a:srgbClr val="475569"/>
+                          </a:solidFill>
+                          <a:latin typeface="Calibri" pitchFamily="34" charset="0"/>
+                          <a:ea typeface="Calibri" pitchFamily="34" charset="-122"/>
+                          <a:cs typeface="Calibri" pitchFamily="34" charset="-120"/>
+                        </a:rPr>
+                        <a:t>WHY IT MATTERS FOR DILIGENCE</a:t>
+                      </a:r>
+                      <a:endParaRPr lang="en-US" sz="1200" dirty="0">
+                        <a:latin typeface="Calibri" charset="0"/>
+                        <a:ea typeface="Calibri" charset="0"/>
+                        <a:cs typeface="Calibri" charset="0"/>
+                      </a:endParaRPr>
+                    </a:p>
+                  </a:txBody>
+                  <a:tcPr marL="73152" marR="73152" marT="36576" marB="36576" anchor="ctr">
+                    <a:lnL w="6350" cap="flat" cmpd="sng" algn="ctr">
+                      <a:solidFill>
+                        <a:srgbClr val="E2E8F0"/>
+                      </a:solidFill>
+                      <a:prstDash val="solid"/>
+                      <a:round/>
+                      <a:headEnd type="none" w="med" len="med"/>
+                      <a:tailEnd type="none" w="med" len="med"/>
+                    </a:lnL>
+                    <a:lnR w="6350" cap="flat" cmpd="sng" algn="ctr">
+                      <a:solidFill>
+                        <a:srgbClr val="E2E8F0"/>
+                      </a:solidFill>
+                      <a:prstDash val="solid"/>
+                      <a:round/>
+                      <a:headEnd type="none" w="med" len="med"/>
+                      <a:tailEnd type="none" w="med" len="med"/>
+                    </a:lnR>
+                    <a:lnT w="6350" cap="flat" cmpd="sng" algn="ctr">
+                      <a:solidFill>
+                        <a:srgbClr val="E2E8F0"/>
+                      </a:solidFill>
+                      <a:prstDash val="solid"/>
+                      <a:round/>
+                      <a:headEnd type="none" w="med" len="med"/>
+                      <a:tailEnd type="none" w="med" len="med"/>
+                    </a:lnT>
+                    <a:lnB w="6350" cap="flat" cmpd="sng" algn="ctr">
+                      <a:solidFill>
+                        <a:srgbClr val="E2E8F0"/>
+                      </a:solidFill>
+                      <a:prstDash val="solid"/>
+                      <a:round/>
+                      <a:headEnd type="none" w="med" len="med"/>
+                      <a:tailEnd type="none" w="med" len="med"/>
+                    </a:lnB>
+                    <a:solidFill>
+                      <a:srgbClr val="F1F5F9"/>
+                    </a:solidFill>
+                  </a:tcPr>
+                </a:tc>
+              </a:tr>
+              <a:tr h="0">
+                <a:tc>
+                  <a:txBody>
+                    <a:bodyPr/>
+                    <a:lstStyle/>
+                    <a:p>
+                      <a:pPr algn="l" indent="0" marL="0">
+                        <a:buNone/>
+                      </a:pPr>
+                      <a:r>
+                        <a:rPr lang="en-US" sz="1200" dirty="0">
+                          <a:solidFill>
+                            <a:srgbClr val="16202E"/>
+                          </a:solidFill>
+                          <a:latin typeface="Calibri" pitchFamily="34" charset="0"/>
+                          <a:ea typeface="Calibri" pitchFamily="34" charset="-122"/>
+                          <a:cs typeface="Calibri" pitchFamily="34" charset="-120"/>
+                        </a:rPr>
+                        <a:t>Source-cited features</a:t>
+                      </a:r>
+                      <a:endParaRPr lang="en-US" sz="1200" dirty="0">
+                        <a:latin typeface="Calibri" charset="0"/>
+                        <a:ea typeface="Calibri" charset="0"/>
+                        <a:cs typeface="Calibri" charset="0"/>
+                      </a:endParaRPr>
+                    </a:p>
+                  </a:txBody>
+                  <a:tcPr marL="73152" marR="73152" marT="36576" marB="36576" anchor="ctr">
+                    <a:lnL w="6350" cap="flat" cmpd="sng" algn="ctr">
+                      <a:solidFill>
+                        <a:srgbClr val="E2E8F0"/>
+                      </a:solidFill>
+                      <a:prstDash val="solid"/>
+                      <a:round/>
+                      <a:headEnd type="none" w="med" len="med"/>
+                      <a:tailEnd type="none" w="med" len="med"/>
+                    </a:lnL>
+                    <a:lnR w="6350" cap="flat" cmpd="sng" algn="ctr">
+                      <a:solidFill>
+                        <a:srgbClr val="E2E8F0"/>
+                      </a:solidFill>
+                      <a:prstDash val="solid"/>
+                      <a:round/>
+                      <a:headEnd type="none" w="med" len="med"/>
+                      <a:tailEnd type="none" w="med" len="med"/>
+                    </a:lnR>
+                    <a:lnT w="6350" cap="flat" cmpd="sng" algn="ctr">
+                      <a:solidFill>
+                        <a:srgbClr val="E2E8F0"/>
+                      </a:solidFill>
+                      <a:prstDash val="solid"/>
+                      <a:round/>
+                      <a:headEnd type="none" w="med" len="med"/>
+                      <a:tailEnd type="none" w="med" len="med"/>
+                    </a:lnT>
+                    <a:lnB w="6350" cap="flat" cmpd="sng" algn="ctr">
+                      <a:solidFill>
+                        <a:srgbClr val="E2E8F0"/>
+                      </a:solidFill>
+                      <a:prstDash val="solid"/>
+                      <a:round/>
+                      <a:headEnd type="none" w="med" len="med"/>
+                      <a:tailEnd type="none" w="med" len="med"/>
+                    </a:lnB>
+                  </a:tcPr>
+                </a:tc>
+                <a:tc>
+                  <a:txBody>
+                    <a:bodyPr/>
+                    <a:lstStyle/>
+                    <a:p>
+                      <a:pPr algn="l" indent="0" marL="0">
+                        <a:buNone/>
+                      </a:pPr>
+                      <a:r>
+                        <a:rPr lang="en-US" sz="1200" dirty="0">
+                          <a:solidFill>
+                            <a:srgbClr val="16202E"/>
+                          </a:solidFill>
+                          <a:latin typeface="Calibri" pitchFamily="34" charset="0"/>
+                          <a:ea typeface="Calibri" pitchFamily="34" charset="-122"/>
+                          <a:cs typeface="Calibri" pitchFamily="34" charset="-120"/>
+                        </a:rPr>
+                        <a:t>Every point/line/boundary traces to a cited public dataset; per-feature popups</a:t>
+                      </a:r>
+                      <a:endParaRPr lang="en-US" sz="1200" dirty="0">
+                        <a:latin typeface="Calibri" charset="0"/>
+                        <a:ea typeface="Calibri" charset="0"/>
+                        <a:cs typeface="Calibri" charset="0"/>
+                      </a:endParaRPr>
+                    </a:p>
+                  </a:txBody>
+                  <a:tcPr marL="73152" marR="73152" marT="36576" marB="36576" anchor="ctr">
+                    <a:lnL w="6350" cap="flat" cmpd="sng" algn="ctr">
+                      <a:solidFill>
+                        <a:srgbClr val="E2E8F0"/>
+                      </a:solidFill>
+                      <a:prstDash val="solid"/>
+                      <a:round/>
+                      <a:headEnd type="none" w="med" len="med"/>
+                      <a:tailEnd type="none" w="med" len="med"/>
+                    </a:lnL>
+                    <a:lnR w="6350" cap="flat" cmpd="sng" algn="ctr">
+                      <a:solidFill>
+                        <a:srgbClr val="E2E8F0"/>
+                      </a:solidFill>
+                      <a:prstDash val="solid"/>
+                      <a:round/>
+                      <a:headEnd type="none" w="med" len="med"/>
+                      <a:tailEnd type="none" w="med" len="med"/>
+                    </a:lnR>
+                    <a:lnT w="6350" cap="flat" cmpd="sng" algn="ctr">
+                      <a:solidFill>
+                        <a:srgbClr val="E2E8F0"/>
+                      </a:solidFill>
+                      <a:prstDash val="solid"/>
+                      <a:round/>
+                      <a:headEnd type="none" w="med" len="med"/>
+                      <a:tailEnd type="none" w="med" len="med"/>
+                    </a:lnT>
+                    <a:lnB w="6350" cap="flat" cmpd="sng" algn="ctr">
+                      <a:solidFill>
+                        <a:srgbClr val="E2E8F0"/>
+                      </a:solidFill>
+                      <a:prstDash val="solid"/>
+                      <a:round/>
+                      <a:headEnd type="none" w="med" len="med"/>
+                      <a:tailEnd type="none" w="med" len="med"/>
+                    </a:lnB>
+                  </a:tcPr>
+                </a:tc>
+              </a:tr>
+              <a:tr h="0">
+                <a:tc>
+                  <a:txBody>
+                    <a:bodyPr/>
+                    <a:lstStyle/>
+                    <a:p>
+                      <a:pPr algn="l" indent="0" marL="0">
+                        <a:buNone/>
+                      </a:pPr>
+                      <a:r>
+                        <a:rPr lang="en-US" sz="1200" dirty="0">
+                          <a:solidFill>
+                            <a:srgbClr val="16202E"/>
+                          </a:solidFill>
+                          <a:latin typeface="Calibri" pitchFamily="34" charset="0"/>
+                          <a:ea typeface="Calibri" pitchFamily="34" charset="-122"/>
+                          <a:cs typeface="Calibri" pitchFamily="34" charset="-120"/>
+                        </a:rPr>
+                        <a:t>Refresh discipline</a:t>
+                      </a:r>
+                      <a:endParaRPr lang="en-US" sz="1200" dirty="0">
+                        <a:latin typeface="Calibri" charset="0"/>
+                        <a:ea typeface="Calibri" charset="0"/>
+                        <a:cs typeface="Calibri" charset="0"/>
+                      </a:endParaRPr>
+                    </a:p>
+                  </a:txBody>
+                  <a:tcPr marL="73152" marR="73152" marT="36576" marB="36576" anchor="ctr">
+                    <a:lnL w="6350" cap="flat" cmpd="sng" algn="ctr">
+                      <a:solidFill>
+                        <a:srgbClr val="E2E8F0"/>
+                      </a:solidFill>
+                      <a:prstDash val="solid"/>
+                      <a:round/>
+                      <a:headEnd type="none" w="med" len="med"/>
+                      <a:tailEnd type="none" w="med" len="med"/>
+                    </a:lnL>
+                    <a:lnR w="6350" cap="flat" cmpd="sng" algn="ctr">
+                      <a:solidFill>
+                        <a:srgbClr val="E2E8F0"/>
+                      </a:solidFill>
+                      <a:prstDash val="solid"/>
+                      <a:round/>
+                      <a:headEnd type="none" w="med" len="med"/>
+                      <a:tailEnd type="none" w="med" len="med"/>
+                    </a:lnR>
+                    <a:lnT w="6350" cap="flat" cmpd="sng" algn="ctr">
+                      <a:solidFill>
+                        <a:srgbClr val="E2E8F0"/>
+                      </a:solidFill>
+                      <a:prstDash val="solid"/>
+                      <a:round/>
+                      <a:headEnd type="none" w="med" len="med"/>
+                      <a:tailEnd type="none" w="med" len="med"/>
+                    </a:lnT>
+                    <a:lnB w="6350" cap="flat" cmpd="sng" algn="ctr">
+                      <a:solidFill>
+                        <a:srgbClr val="E2E8F0"/>
+                      </a:solidFill>
+                      <a:prstDash val="solid"/>
+                      <a:round/>
+                      <a:headEnd type="none" w="med" len="med"/>
+                      <a:tailEnd type="none" w="med" len="med"/>
+                    </a:lnB>
+                  </a:tcPr>
+                </a:tc>
+                <a:tc>
+                  <a:txBody>
+                    <a:bodyPr/>
+                    <a:lstStyle/>
+                    <a:p>
+                      <a:pPr algn="l" indent="0" marL="0">
+                        <a:buNone/>
+                      </a:pPr>
+                      <a:r>
+                        <a:rPr lang="en-US" sz="1200" dirty="0">
+                          <a:solidFill>
+                            <a:srgbClr val="16202E"/>
+                          </a:solidFill>
+                          <a:latin typeface="Calibri" pitchFamily="34" charset="0"/>
+                          <a:ea typeface="Calibri" pitchFamily="34" charset="-122"/>
+                          <a:cs typeface="Calibri" pitchFamily="34" charset="-120"/>
+                        </a:rPr>
+                        <a:t>RRC weekly; ERCOT queue/TPIT monthly; EIA/USGS/OSM annually</a:t>
+                      </a:r>
+                      <a:endParaRPr lang="en-US" sz="1200" dirty="0">
+                        <a:latin typeface="Calibri" charset="0"/>
+                        <a:ea typeface="Calibri" charset="0"/>
+                        <a:cs typeface="Calibri" charset="0"/>
+                      </a:endParaRPr>
+                    </a:p>
+                  </a:txBody>
+                  <a:tcPr marL="73152" marR="73152" marT="36576" marB="36576" anchor="ctr">
+                    <a:lnL w="6350" cap="flat" cmpd="sng" algn="ctr">
+                      <a:solidFill>
+                        <a:srgbClr val="E2E8F0"/>
+                      </a:solidFill>
+                      <a:prstDash val="solid"/>
+                      <a:round/>
+                      <a:headEnd type="none" w="med" len="med"/>
+                      <a:tailEnd type="none" w="med" len="med"/>
+                    </a:lnL>
+                    <a:lnR w="6350" cap="flat" cmpd="sng" algn="ctr">
+                      <a:solidFill>
+                        <a:srgbClr val="E2E8F0"/>
+                      </a:solidFill>
+                      <a:prstDash val="solid"/>
+                      <a:round/>
+                      <a:headEnd type="none" w="med" len="med"/>
+                      <a:tailEnd type="none" w="med" len="med"/>
+                    </a:lnR>
+                    <a:lnT w="6350" cap="flat" cmpd="sng" algn="ctr">
+                      <a:solidFill>
+                        <a:srgbClr val="E2E8F0"/>
+                      </a:solidFill>
+                      <a:prstDash val="solid"/>
+                      <a:round/>
+                      <a:headEnd type="none" w="med" len="med"/>
+                      <a:tailEnd type="none" w="med" len="med"/>
+                    </a:lnT>
+                    <a:lnB w="6350" cap="flat" cmpd="sng" algn="ctr">
+                      <a:solidFill>
+                        <a:srgbClr val="E2E8F0"/>
+                      </a:solidFill>
+                      <a:prstDash val="solid"/>
+                      <a:round/>
+                      <a:headEnd type="none" w="med" len="med"/>
+                      <a:tailEnd type="none" w="med" len="med"/>
+                    </a:lnB>
+                  </a:tcPr>
+                </a:tc>
+              </a:tr>
+              <a:tr h="0">
+                <a:tc>
+                  <a:txBody>
+                    <a:bodyPr/>
+                    <a:lstStyle/>
+                    <a:p>
+                      <a:pPr algn="l" indent="0" marL="0">
+                        <a:buNone/>
+                      </a:pPr>
+                      <a:r>
+                        <a:rPr lang="en-US" sz="1200" dirty="0">
+                          <a:solidFill>
+                            <a:srgbClr val="16202E"/>
+                          </a:solidFill>
+                          <a:latin typeface="Calibri" pitchFamily="34" charset="0"/>
+                          <a:ea typeface="Calibri" pitchFamily="34" charset="-122"/>
+                          <a:cs typeface="Calibri" pitchFamily="34" charset="-120"/>
+                        </a:rPr>
+                        <a:t>Analytical tooling</a:t>
+                      </a:r>
+                      <a:endParaRPr lang="en-US" sz="1200" dirty="0">
+                        <a:latin typeface="Calibri" charset="0"/>
+                        <a:ea typeface="Calibri" charset="0"/>
+                        <a:cs typeface="Calibri" charset="0"/>
+                      </a:endParaRPr>
+                    </a:p>
+                  </a:txBody>
+                  <a:tcPr marL="73152" marR="73152" marT="36576" marB="36576" anchor="ctr">
+                    <a:lnL w="6350" cap="flat" cmpd="sng" algn="ctr">
+                      <a:solidFill>
+                        <a:srgbClr val="E2E8F0"/>
+                      </a:solidFill>
+                      <a:prstDash val="solid"/>
+                      <a:round/>
+                      <a:headEnd type="none" w="med" len="med"/>
+                      <a:tailEnd type="none" w="med" len="med"/>
+                    </a:lnL>
+                    <a:lnR w="6350" cap="flat" cmpd="sng" algn="ctr">
+                      <a:solidFill>
+                        <a:srgbClr val="E2E8F0"/>
+                      </a:solidFill>
+                      <a:prstDash val="solid"/>
+                      <a:round/>
+                      <a:headEnd type="none" w="med" len="med"/>
+                      <a:tailEnd type="none" w="med" len="med"/>
+                    </a:lnR>
+                    <a:lnT w="6350" cap="flat" cmpd="sng" algn="ctr">
+                      <a:solidFill>
+                        <a:srgbClr val="E2E8F0"/>
+                      </a:solidFill>
+                      <a:prstDash val="solid"/>
+                      <a:round/>
+                      <a:headEnd type="none" w="med" len="med"/>
+                      <a:tailEnd type="none" w="med" len="med"/>
+                    </a:lnT>
+                    <a:lnB w="6350" cap="flat" cmpd="sng" algn="ctr">
+                      <a:solidFill>
+                        <a:srgbClr val="E2E8F0"/>
+                      </a:solidFill>
+                      <a:prstDash val="solid"/>
+                      <a:round/>
+                      <a:headEnd type="none" w="med" len="med"/>
+                      <a:tailEnd type="none" w="med" len="med"/>
+                    </a:lnB>
+                  </a:tcPr>
+                </a:tc>
+                <a:tc>
+                  <a:txBody>
+                    <a:bodyPr/>
+                    <a:lstStyle/>
+                    <a:p>
+                      <a:pPr algn="l" indent="0" marL="0">
+                        <a:buNone/>
+                      </a:pPr>
+                      <a:r>
+                        <a:rPr lang="en-US" sz="1200" dirty="0">
+                          <a:solidFill>
+                            <a:srgbClr val="16202E"/>
+                          </a:solidFill>
+                          <a:latin typeface="Calibri" pitchFamily="34" charset="0"/>
+                          <a:ea typeface="Calibri" pitchFamily="34" charset="-122"/>
+                          <a:cs typeface="Calibri" pitchFamily="34" charset="-120"/>
+                        </a:rPr>
+                        <a:t>Filters by county/depth/spud year/fuel/status; time scrubber; measure/share/print</a:t>
+                      </a:r>
+                      <a:endParaRPr lang="en-US" sz="1200" dirty="0">
+                        <a:latin typeface="Calibri" charset="0"/>
+                        <a:ea typeface="Calibri" charset="0"/>
+                        <a:cs typeface="Calibri" charset="0"/>
+                      </a:endParaRPr>
+                    </a:p>
+                  </a:txBody>
+                  <a:tcPr marL="73152" marR="73152" marT="36576" marB="36576" anchor="ctr">
+                    <a:lnL w="6350" cap="flat" cmpd="sng" algn="ctr">
+                      <a:solidFill>
+                        <a:srgbClr val="E2E8F0"/>
+                      </a:solidFill>
+                      <a:prstDash val="solid"/>
+                      <a:round/>
+                      <a:headEnd type="none" w="med" len="med"/>
+                      <a:tailEnd type="none" w="med" len="med"/>
+                    </a:lnL>
+                    <a:lnR w="6350" cap="flat" cmpd="sng" algn="ctr">
+                      <a:solidFill>
+                        <a:srgbClr val="E2E8F0"/>
+                      </a:solidFill>
+                      <a:prstDash val="solid"/>
+                      <a:round/>
+                      <a:headEnd type="none" w="med" len="med"/>
+                      <a:tailEnd type="none" w="med" len="med"/>
+                    </a:lnR>
+                    <a:lnT w="6350" cap="flat" cmpd="sng" algn="ctr">
+                      <a:solidFill>
+                        <a:srgbClr val="E2E8F0"/>
+                      </a:solidFill>
+                      <a:prstDash val="solid"/>
+                      <a:round/>
+                      <a:headEnd type="none" w="med" len="med"/>
+                      <a:tailEnd type="none" w="med" len="med"/>
+                    </a:lnT>
+                    <a:lnB w="6350" cap="flat" cmpd="sng" algn="ctr">
+                      <a:solidFill>
+                        <a:srgbClr val="E2E8F0"/>
+                      </a:solidFill>
+                      <a:prstDash val="solid"/>
+                      <a:round/>
+                      <a:headEnd type="none" w="med" len="med"/>
+                      <a:tailEnd type="none" w="med" len="med"/>
+                    </a:lnB>
+                  </a:tcPr>
+                </a:tc>
+              </a:tr>
+              <a:tr h="0">
+                <a:tc>
+                  <a:txBody>
+                    <a:bodyPr/>
+                    <a:lstStyle/>
+                    <a:p>
+                      <a:pPr algn="l" indent="0" marL="0">
+                        <a:buNone/>
+                      </a:pPr>
+                      <a:r>
+                        <a:rPr lang="en-US" sz="1200" dirty="0">
+                          <a:solidFill>
+                            <a:srgbClr val="16202E"/>
+                          </a:solidFill>
+                          <a:latin typeface="Calibri" pitchFamily="34" charset="0"/>
+                          <a:ea typeface="Calibri" pitchFamily="34" charset="-122"/>
+                          <a:cs typeface="Calibri" pitchFamily="34" charset="-120"/>
+                        </a:rPr>
+                        <a:t>Reproducibility</a:t>
+                      </a:r>
+                      <a:endParaRPr lang="en-US" sz="1200" dirty="0">
+                        <a:latin typeface="Calibri" charset="0"/>
+                        <a:ea typeface="Calibri" charset="0"/>
+                        <a:cs typeface="Calibri" charset="0"/>
+                      </a:endParaRPr>
+                    </a:p>
+                  </a:txBody>
+                  <a:tcPr marL="73152" marR="73152" marT="36576" marB="36576" anchor="ctr">
+                    <a:lnL w="6350" cap="flat" cmpd="sng" algn="ctr">
+                      <a:solidFill>
+                        <a:srgbClr val="E2E8F0"/>
+                      </a:solidFill>
+                      <a:prstDash val="solid"/>
+                      <a:round/>
+                      <a:headEnd type="none" w="med" len="med"/>
+                      <a:tailEnd type="none" w="med" len="med"/>
+                    </a:lnL>
+                    <a:lnR w="6350" cap="flat" cmpd="sng" algn="ctr">
+                      <a:solidFill>
+                        <a:srgbClr val="E2E8F0"/>
+                      </a:solidFill>
+                      <a:prstDash val="solid"/>
+                      <a:round/>
+                      <a:headEnd type="none" w="med" len="med"/>
+                      <a:tailEnd type="none" w="med" len="med"/>
+                    </a:lnR>
+                    <a:lnT w="6350" cap="flat" cmpd="sng" algn="ctr">
+                      <a:solidFill>
+                        <a:srgbClr val="E2E8F0"/>
+                      </a:solidFill>
+                      <a:prstDash val="solid"/>
+                      <a:round/>
+                      <a:headEnd type="none" w="med" len="med"/>
+                      <a:tailEnd type="none" w="med" len="med"/>
+                    </a:lnT>
+                    <a:lnB w="6350" cap="flat" cmpd="sng" algn="ctr">
+                      <a:solidFill>
+                        <a:srgbClr val="E2E8F0"/>
+                      </a:solidFill>
+                      <a:prstDash val="solid"/>
+                      <a:round/>
+                      <a:headEnd type="none" w="med" len="med"/>
+                      <a:tailEnd type="none" w="med" len="med"/>
+                    </a:lnB>
+                  </a:tcPr>
+                </a:tc>
+                <a:tc>
+                  <a:txBody>
+                    <a:bodyPr/>
+                    <a:lstStyle/>
+                    <a:p>
+                      <a:pPr algn="l" indent="0" marL="0">
+                        <a:buNone/>
+                      </a:pPr>
+                      <a:r>
+                        <a:rPr lang="en-US" sz="1200" dirty="0">
+                          <a:solidFill>
+                            <a:srgbClr val="16202E"/>
+                          </a:solidFill>
+                          <a:latin typeface="Calibri" pitchFamily="34" charset="0"/>
+                          <a:ea typeface="Calibri" pitchFamily="34" charset="-122"/>
+                          <a:cs typeface="Calibri" pitchFamily="34" charset="-120"/>
+                        </a:rPr>
+                        <a:t>Static, versioned build; deployed bundle byte-verified on release; access logged</a:t>
+                      </a:r>
+                      <a:endParaRPr lang="en-US" sz="1200" dirty="0">
+                        <a:latin typeface="Calibri" charset="0"/>
+                        <a:ea typeface="Calibri" charset="0"/>
+                        <a:cs typeface="Calibri" charset="0"/>
+                      </a:endParaRPr>
+                    </a:p>
+                  </a:txBody>
+                  <a:tcPr marL="73152" marR="73152" marT="36576" marB="36576" anchor="ctr">
+                    <a:lnL w="6350" cap="flat" cmpd="sng" algn="ctr">
+                      <a:solidFill>
+                        <a:srgbClr val="E2E8F0"/>
+                      </a:solidFill>
+                      <a:prstDash val="solid"/>
+                      <a:round/>
+                      <a:headEnd type="none" w="med" len="med"/>
+                      <a:tailEnd type="none" w="med" len="med"/>
+                    </a:lnL>
+                    <a:lnR w="6350" cap="flat" cmpd="sng" algn="ctr">
+                      <a:solidFill>
+                        <a:srgbClr val="E2E8F0"/>
+                      </a:solidFill>
+                      <a:prstDash val="solid"/>
+                      <a:round/>
+                      <a:headEnd type="none" w="med" len="med"/>
+                      <a:tailEnd type="none" w="med" len="med"/>
+                    </a:lnR>
+                    <a:lnT w="6350" cap="flat" cmpd="sng" algn="ctr">
+                      <a:solidFill>
+                        <a:srgbClr val="E2E8F0"/>
+                      </a:solidFill>
+                      <a:prstDash val="solid"/>
+                      <a:round/>
+                      <a:headEnd type="none" w="med" len="med"/>
+                      <a:tailEnd type="none" w="med" len="med"/>
+                    </a:lnT>
+                    <a:lnB w="6350" cap="flat" cmpd="sng" algn="ctr">
+                      <a:solidFill>
+                        <a:srgbClr val="E2E8F0"/>
+                      </a:solidFill>
+                      <a:prstDash val="solid"/>
+                      <a:round/>
+                      <a:headEnd type="none" w="med" len="med"/>
+                      <a:tailEnd type="none" w="med" len="med"/>
+                    </a:lnB>
+                  </a:tcPr>
+                </a:tc>
+              </a:tr>
+            </a:tbl>
+          </a:graphicData>
+        </a:graphic>
+      </p:graphicFrame>
+      <p:sp>
+        <p:nvSpPr>
+          <p:cNvPr id="7" name="Text 3"/>
+          <p:cNvSpPr/>
+          <p:nvPr/>
+        </p:nvSpPr>
+        <p:spPr>
+          <a:xfrm>
+            <a:off x="548640" y="4937760"/>
+            <a:ext cx="11064240" cy="457200"/>
+          </a:xfrm>
+          <a:prstGeom prst="rect">
+            <a:avLst/>
+          </a:prstGeom>
+          <a:noFill/>
+          <a:ln/>
+        </p:spPr>
+        <p:txBody>
+          <a:bodyPr wrap="square" rtlCol="0" anchor="ctr"/>
+          <a:lstStyle/>
+          <a:p>
+            <a:pPr indent="0" marL="0">
+              <a:buNone/>
+            </a:pPr>
+            <a:r>
+              <a:rPr lang="en-US" sz="1100" i="1" dirty="0">
+                <a:solidFill>
+                  <a:srgbClr val="64748B"/>
+                </a:solidFill>
+                <a:latin typeface="Calibri" pitchFamily="34" charset="0"/>
+                <a:ea typeface="Calibri" pitchFamily="34" charset="-122"/>
+                <a:cs typeface="Calibri" pitchFamily="34" charset="-120"/>
+              </a:rPr>
+              <a:t>lrp-tx-gis.netlify.app  ·  access credentials issued to the deal team separately (see Appendix)</a:t>
+            </a:r>
+            <a:endParaRPr lang="en-US" sz="1100" dirty="0"/>
+          </a:p>
+        </p:txBody>
+      </p:sp>
+      <p:sp>
+        <p:nvSpPr>
+          <p:cNvPr id="8" name="Text 4"/>
+          <p:cNvSpPr/>
+          <p:nvPr/>
+        </p:nvSpPr>
+        <p:spPr>
+          <a:xfrm>
+            <a:off x="457200" y="6510528"/>
+            <a:ext cx="7315200" cy="274320"/>
+          </a:xfrm>
+          <a:prstGeom prst="rect">
+            <a:avLst/>
+          </a:prstGeom>
+          <a:noFill/>
+          <a:ln/>
+        </p:spPr>
+        <p:txBody>
+          <a:bodyPr wrap="square" rtlCol="0" anchor="ctr"/>
+          <a:lstStyle/>
+          <a:p>
+            <a:pPr indent="0" marL="0">
+              <a:buNone/>
+            </a:pPr>
+            <a:r>
+              <a:rPr lang="en-US" sz="800" dirty="0">
+                <a:solidFill>
+                  <a:srgbClr val="64748B"/>
+                </a:solidFill>
+                <a:latin typeface="Calibri" pitchFamily="34" charset="0"/>
+                <a:ea typeface="Calibri" pitchFamily="34" charset="-122"/>
+                <a:cs typeface="Calibri" pitchFamily="34" charset="-120"/>
+              </a:rPr>
+              <a:t>CARAMBA NORTH — STRICTLY CONFIDENTIAL, POST-NDA</a:t>
+            </a:r>
+            <a:endParaRPr lang="en-US" sz="800" dirty="0"/>
+          </a:p>
+        </p:txBody>
+      </p:sp>
+      <p:sp>
+        <p:nvSpPr>
+          <p:cNvPr id="9" name="Text 5"/>
+          <p:cNvSpPr/>
+          <p:nvPr/>
+        </p:nvSpPr>
+        <p:spPr>
+          <a:xfrm>
+            <a:off x="11368735" y="6510528"/>
+            <a:ext cx="365760" cy="274320"/>
+          </a:xfrm>
+          <a:prstGeom prst="rect">
+            <a:avLst/>
+          </a:prstGeom>
+          <a:noFill/>
+          <a:ln/>
+        </p:spPr>
+        <p:txBody>
+          <a:bodyPr wrap="square" rtlCol="0" anchor="ctr"/>
+          <a:lstStyle/>
+          <a:p>
+            <a:pPr algn="r" indent="0" marL="0">
+              <a:buNone/>
+            </a:pPr>
+            <a:r>
+              <a:rPr lang="en-US" sz="800" dirty="0">
+                <a:solidFill>
+                  <a:srgbClr val="64748B"/>
+                </a:solidFill>
+                <a:latin typeface="Calibri" pitchFamily="34" charset="0"/>
+                <a:ea typeface="Calibri" pitchFamily="34" charset="-122"/>
+                <a:cs typeface="Calibri" pitchFamily="34" charset="-120"/>
+              </a:rPr>
+              <a:t>11</a:t>
+            </a:r>
+            <a:endParaRPr lang="en-US" sz="800" dirty="0"/>
+          </a:p>
+        </p:txBody>
+      </p:sp>
+    </p:spTree>
+  </p:cSld>
+  <p:clrMapOvr>
+    <a:masterClrMapping/>
+  </p:clrMapOvr>
+</p:sld>
+</file>
+
+<file path=ppt/slides/slide12.xml><?xml version="1.0" encoding="utf-8"?>
+<p:sld xmlns:a="http://schemas.openxmlformats.org/drawingml/2006/main" xmlns:r="http://schemas.openxmlformats.org/officeDocument/2006/relationships" xmlns:p="http://schemas.openxmlformats.org/presentationml/2006/main">
+  <p:cSld name="Slide 12">
+    <p:bg>
+      <p:bgPr>
+        <a:solidFill>
+          <a:srgbClr val="FFFFFF"/>
+        </a:solidFill>
+      </p:bgPr>
+    </p:bg>
+    <p:spTree>
+      <p:nvGrpSpPr>
+        <p:cNvPr id="1" name=""/>
+        <p:cNvGrpSpPr/>
+        <p:nvPr/>
+      </p:nvGrpSpPr>
+      <p:grpSpPr>
+        <a:xfrm>
+          <a:off x="0" y="0"/>
+          <a:ext cx="0" cy="0"/>
+          <a:chOff x="0" y="0"/>
+          <a:chExt cx="0" cy="0"/>
+        </a:xfrm>
+      </p:grpSpPr>
+      <p:sp>
+        <p:nvSpPr>
+          <p:cNvPr id="2" name="Shape 0"/>
+          <p:cNvSpPr/>
+          <p:nvPr/>
+        </p:nvSpPr>
+        <p:spPr>
+          <a:xfrm>
+            <a:off x="548640" y="310896"/>
+            <a:ext cx="402336" cy="402336"/>
+          </a:xfrm>
+          <a:prstGeom prst="ellipse">
+            <a:avLst/>
+          </a:prstGeom>
+          <a:solidFill>
+            <a:srgbClr val="B91C1C"/>
+          </a:solidFill>
+          <a:ln/>
+          <a:effectLst>
+            <a:outerShdw sx="100000" sy="100000" kx="0" ky="0" algn="bl" rotWithShape="0" blurRad="88900" dist="25400" dir="5400000">
+              <a:srgbClr val="0F1B2D">
+                <a:alpha val="16000"/>
+              </a:srgbClr>
+            </a:outerShdw>
+          </a:effectLst>
+        </p:spPr>
+      </p:sp>
+      <p:pic>
+        <p:nvPicPr>
+          <p:cNvPr id="3" name="Image 0" descr="preencoded.png">    </p:cNvPr>
+          <p:cNvPicPr>
+            <a:picLocks noChangeAspect="1"/>
+          </p:cNvPicPr>
+          <p:nvPr/>
+        </p:nvPicPr>
+        <p:blipFill>
+          <a:blip r:embed="rId1"/>
+          <a:stretch>
+            <a:fillRect/>
+          </a:stretch>
+        </p:blipFill>
+        <p:spPr>
+          <a:xfrm>
+            <a:off x="653247" y="415503"/>
+            <a:ext cx="193121" cy="193121"/>
+          </a:xfrm>
+          <a:prstGeom prst="rect">
+            <a:avLst/>
+          </a:prstGeom>
+        </p:spPr>
+      </p:pic>
+      <p:sp>
+        <p:nvSpPr>
+          <p:cNvPr id="4" name="Text 1"/>
+          <p:cNvSpPr/>
+          <p:nvPr/>
+        </p:nvSpPr>
+        <p:spPr>
+          <a:xfrm>
+            <a:off x="1097280" y="365760"/>
+            <a:ext cx="9144000" cy="365760"/>
+          </a:xfrm>
+          <a:prstGeom prst="rect">
+            <a:avLst/>
+          </a:prstGeom>
+          <a:noFill/>
+          <a:ln/>
+        </p:spPr>
+        <p:txBody>
+          <a:bodyPr wrap="square" rtlCol="0" anchor="ctr"/>
+          <a:lstStyle/>
+          <a:p>
+            <a:pPr indent="0" marL="0">
+              <a:buNone/>
+            </a:pPr>
+            <a:r>
+              <a:rPr lang="en-US" sz="1200" b="1" spc="200" kern="0" dirty="0">
+                <a:solidFill>
+                  <a:srgbClr val="B91C1C"/>
+                </a:solidFill>
+                <a:latin typeface="Calibri" pitchFamily="34" charset="0"/>
+                <a:ea typeface="Calibri" pitchFamily="34" charset="-122"/>
+                <a:cs typeface="Calibri" pitchFamily="34" charset="-120"/>
+              </a:rPr>
+              <a:t>09 · SUBSURFACE &amp; DRILLING ACTIVITY</a:t>
+            </a:r>
+            <a:endParaRPr lang="en-US" sz="1200" dirty="0"/>
+          </a:p>
+        </p:txBody>
+      </p:sp>
+      <p:sp>
+        <p:nvSpPr>
+          <p:cNvPr id="5" name="Text 2"/>
+          <p:cNvSpPr/>
+          <p:nvPr/>
+        </p:nvSpPr>
+        <p:spPr>
+          <a:xfrm>
+            <a:off x="548640" y="841248"/>
+            <a:ext cx="11064240" cy="822960"/>
+          </a:xfrm>
+          <a:prstGeom prst="rect">
+            <a:avLst/>
+          </a:prstGeom>
+          <a:noFill/>
+          <a:ln/>
+        </p:spPr>
+        <p:txBody>
+          <a:bodyPr wrap="square" rtlCol="0" anchor="t"/>
+          <a:lstStyle/>
+          <a:p>
+            <a:pPr indent="0" marL="0">
+              <a:buNone/>
+            </a:pPr>
+            <a:r>
+              <a:rPr lang="en-US" sz="2500" b="1" dirty="0">
+                <a:solidFill>
+                  <a:srgbClr val="0F1B2D"/>
+                </a:solidFill>
+                <a:latin typeface="Cambria" pitchFamily="34" charset="0"/>
+                <a:ea typeface="Cambria" pitchFamily="34" charset="-122"/>
+                <a:cs typeface="Cambria" pitchFamily="34" charset="-120"/>
+              </a:rPr>
+              <a:t>No new drilling is occurring at or near the site</a:t>
+            </a:r>
+            <a:endParaRPr lang="en-US" sz="2500" dirty="0"/>
+          </a:p>
+        </p:txBody>
+      </p:sp>
+      <p:sp>
+        <p:nvSpPr>
+          <p:cNvPr id="6" name="Shape 3"/>
+          <p:cNvSpPr/>
+          <p:nvPr/>
+        </p:nvSpPr>
+        <p:spPr>
+          <a:xfrm>
+            <a:off x="548640" y="1783080"/>
+            <a:ext cx="2583180" cy="1051560"/>
+          </a:xfrm>
+          <a:prstGeom prst="roundRect">
+            <a:avLst>
+              <a:gd name="adj" fmla="val 5217"/>
+            </a:avLst>
+          </a:prstGeom>
+          <a:solidFill>
+            <a:srgbClr val="F1F5F9"/>
+          </a:solidFill>
+          <a:ln w="9525">
+            <a:solidFill>
+              <a:srgbClr val="E2E8F0"/>
+            </a:solidFill>
+            <a:prstDash val="solid"/>
+          </a:ln>
+          <a:effectLst>
+            <a:outerShdw sx="100000" sy="100000" kx="0" ky="0" algn="bl" rotWithShape="0" blurRad="88900" dist="25400" dir="5400000">
+              <a:srgbClr val="0F1B2D">
+                <a:alpha val="16000"/>
+              </a:srgbClr>
+            </a:outerShdw>
+          </a:effectLst>
+        </p:spPr>
+      </p:sp>
+      <p:sp>
+        <p:nvSpPr>
+          <p:cNvPr id="7" name="Text 4"/>
+          <p:cNvSpPr/>
+          <p:nvPr/>
+        </p:nvSpPr>
+        <p:spPr>
+          <a:xfrm>
+            <a:off x="676656" y="1874520"/>
+            <a:ext cx="2327148" cy="521208"/>
+          </a:xfrm>
+          <a:prstGeom prst="rect">
+            <a:avLst/>
+          </a:prstGeom>
+          <a:noFill/>
+          <a:ln/>
+        </p:spPr>
+        <p:txBody>
+          <a:bodyPr wrap="square" rtlCol="0" anchor="b"/>
+          <a:lstStyle/>
+          <a:p>
+            <a:pPr indent="0" marL="0">
+              <a:buNone/>
+            </a:pPr>
+            <a:r>
+              <a:rPr lang="en-US" sz="2200" b="1" dirty="0">
+                <a:solidFill>
+                  <a:srgbClr val="0F1B2D"/>
+                </a:solidFill>
+                <a:latin typeface="Calibri" pitchFamily="34" charset="0"/>
+                <a:ea typeface="Calibri" pitchFamily="34" charset="-122"/>
+                <a:cs typeface="Calibri" pitchFamily="34" charset="-120"/>
+              </a:rPr>
+              <a:t>0</a:t>
+            </a:r>
+            <a:endParaRPr lang="en-US" sz="2200" dirty="0"/>
+          </a:p>
+        </p:txBody>
+      </p:sp>
+      <p:sp>
+        <p:nvSpPr>
+          <p:cNvPr id="8" name="Text 5"/>
+          <p:cNvSpPr/>
+          <p:nvPr/>
+        </p:nvSpPr>
+        <p:spPr>
+          <a:xfrm>
+            <a:off x="676656" y="2450592"/>
+            <a:ext cx="2327148" cy="329184"/>
+          </a:xfrm>
+          <a:prstGeom prst="rect">
+            <a:avLst/>
+          </a:prstGeom>
+          <a:noFill/>
+          <a:ln/>
+        </p:spPr>
+        <p:txBody>
+          <a:bodyPr wrap="square" rtlCol="0" anchor="t"/>
+          <a:lstStyle/>
+          <a:p>
+            <a:pPr indent="0" marL="0">
+              <a:buNone/>
+            </a:pPr>
+            <a:r>
+              <a:rPr lang="en-US" sz="850" spc="100" kern="0" dirty="0">
+                <a:solidFill>
+                  <a:srgbClr val="64748B"/>
+                </a:solidFill>
+                <a:latin typeface="Calibri" pitchFamily="34" charset="0"/>
+                <a:ea typeface="Calibri" pitchFamily="34" charset="-122"/>
+                <a:cs typeface="Calibri" pitchFamily="34" charset="-120"/>
+              </a:rPr>
+              <a:t>NEW-DRILL WELLS ≤ 2 MI SINCE 2020</a:t>
+            </a:r>
+            <a:endParaRPr lang="en-US" sz="850" dirty="0"/>
+          </a:p>
+        </p:txBody>
+      </p:sp>
+      <p:sp>
+        <p:nvSpPr>
+          <p:cNvPr id="9" name="Shape 6"/>
+          <p:cNvSpPr/>
+          <p:nvPr/>
+        </p:nvSpPr>
+        <p:spPr>
+          <a:xfrm>
+            <a:off x="3268980" y="1783080"/>
+            <a:ext cx="2583180" cy="1051560"/>
+          </a:xfrm>
+          <a:prstGeom prst="roundRect">
+            <a:avLst>
+              <a:gd name="adj" fmla="val 5217"/>
+            </a:avLst>
+          </a:prstGeom>
+          <a:solidFill>
+            <a:srgbClr val="F1F5F9"/>
+          </a:solidFill>
+          <a:ln w="9525">
+            <a:solidFill>
+              <a:srgbClr val="E2E8F0"/>
+            </a:solidFill>
+            <a:prstDash val="solid"/>
+          </a:ln>
+          <a:effectLst>
+            <a:outerShdw sx="100000" sy="100000" kx="0" ky="0" algn="bl" rotWithShape="0" blurRad="88900" dist="25400" dir="5400000">
+              <a:srgbClr val="0F1B2D">
+                <a:alpha val="16000"/>
+              </a:srgbClr>
+            </a:outerShdw>
+          </a:effectLst>
+        </p:spPr>
+      </p:sp>
+      <p:sp>
+        <p:nvSpPr>
+          <p:cNvPr id="10" name="Text 7"/>
+          <p:cNvSpPr/>
+          <p:nvPr/>
+        </p:nvSpPr>
+        <p:spPr>
+          <a:xfrm>
+            <a:off x="3396996" y="1874520"/>
+            <a:ext cx="2327148" cy="521208"/>
+          </a:xfrm>
+          <a:prstGeom prst="rect">
+            <a:avLst/>
+          </a:prstGeom>
+          <a:noFill/>
+          <a:ln/>
+        </p:spPr>
+        <p:txBody>
+          <a:bodyPr wrap="square" rtlCol="0" anchor="b"/>
+          <a:lstStyle/>
+          <a:p>
+            <a:pPr indent="0" marL="0">
+              <a:buNone/>
+            </a:pPr>
+            <a:r>
+              <a:rPr lang="en-US" sz="2200" b="1" dirty="0">
+                <a:solidFill>
+                  <a:srgbClr val="0F1B2D"/>
+                </a:solidFill>
+                <a:latin typeface="Calibri" pitchFamily="34" charset="0"/>
+                <a:ea typeface="Calibri" pitchFamily="34" charset="-122"/>
+                <a:cs typeface="Calibri" pitchFamily="34" charset="-120"/>
+              </a:rPr>
+              <a:t>0</a:t>
+            </a:r>
+            <a:endParaRPr lang="en-US" sz="2200" dirty="0"/>
+          </a:p>
+        </p:txBody>
+      </p:sp>
+      <p:sp>
+        <p:nvSpPr>
+          <p:cNvPr id="11" name="Text 8"/>
+          <p:cNvSpPr/>
+          <p:nvPr/>
+        </p:nvSpPr>
+        <p:spPr>
+          <a:xfrm>
+            <a:off x="3396996" y="2450592"/>
+            <a:ext cx="2327148" cy="329184"/>
+          </a:xfrm>
+          <a:prstGeom prst="rect">
+            <a:avLst/>
+          </a:prstGeom>
+          <a:noFill/>
+          <a:ln/>
+        </p:spPr>
+        <p:txBody>
+          <a:bodyPr wrap="square" rtlCol="0" anchor="t"/>
+          <a:lstStyle/>
+          <a:p>
+            <a:pPr indent="0" marL="0">
+              <a:buNone/>
+            </a:pPr>
+            <a:r>
+              <a:rPr lang="en-US" sz="850" spc="100" kern="0" dirty="0">
+                <a:solidFill>
+                  <a:srgbClr val="64748B"/>
+                </a:solidFill>
+                <a:latin typeface="Calibri" pitchFamily="34" charset="0"/>
+                <a:ea typeface="Calibri" pitchFamily="34" charset="-122"/>
+                <a:cs typeface="Calibri" pitchFamily="34" charset="-120"/>
+              </a:rPr>
+              <a:t>NEW-DRILL WELLS ≤ 5 MI SINCE 2020</a:t>
+            </a:r>
+            <a:endParaRPr lang="en-US" sz="850" dirty="0"/>
+          </a:p>
+        </p:txBody>
+      </p:sp>
+      <p:sp>
+        <p:nvSpPr>
+          <p:cNvPr id="12" name="Shape 9"/>
+          <p:cNvSpPr/>
+          <p:nvPr/>
+        </p:nvSpPr>
+        <p:spPr>
+          <a:xfrm>
+            <a:off x="5989320" y="1783080"/>
+            <a:ext cx="2583180" cy="1051560"/>
+          </a:xfrm>
+          <a:prstGeom prst="roundRect">
+            <a:avLst>
+              <a:gd name="adj" fmla="val 5217"/>
+            </a:avLst>
+          </a:prstGeom>
+          <a:solidFill>
+            <a:srgbClr val="F1F5F9"/>
+          </a:solidFill>
+          <a:ln w="9525">
+            <a:solidFill>
+              <a:srgbClr val="E2E8F0"/>
+            </a:solidFill>
+            <a:prstDash val="solid"/>
+          </a:ln>
+          <a:effectLst>
+            <a:outerShdw sx="100000" sy="100000" kx="0" ky="0" algn="bl" rotWithShape="0" blurRad="88900" dist="25400" dir="5400000">
+              <a:srgbClr val="0F1B2D">
+                <a:alpha val="16000"/>
+              </a:srgbClr>
+            </a:outerShdw>
+          </a:effectLst>
+        </p:spPr>
+      </p:sp>
+      <p:sp>
+        <p:nvSpPr>
+          <p:cNvPr id="13" name="Text 10"/>
+          <p:cNvSpPr/>
+          <p:nvPr/>
+        </p:nvSpPr>
+        <p:spPr>
+          <a:xfrm>
+            <a:off x="6117336" y="1874520"/>
+            <a:ext cx="2327148" cy="521208"/>
+          </a:xfrm>
+          <a:prstGeom prst="rect">
+            <a:avLst/>
+          </a:prstGeom>
+          <a:noFill/>
+          <a:ln/>
+        </p:spPr>
+        <p:txBody>
+          <a:bodyPr wrap="square" rtlCol="0" anchor="b"/>
+          <a:lstStyle/>
+          <a:p>
+            <a:pPr indent="0" marL="0">
+              <a:buNone/>
+            </a:pPr>
+            <a:r>
+              <a:rPr lang="en-US" sz="2200" b="1" dirty="0">
+                <a:solidFill>
+                  <a:srgbClr val="0F1B2D"/>
+                </a:solidFill>
+                <a:latin typeface="Calibri" pitchFamily="34" charset="0"/>
+                <a:ea typeface="Calibri" pitchFamily="34" charset="-122"/>
+                <a:cs typeface="Calibri" pitchFamily="34" charset="-120"/>
+              </a:rPr>
+              <a:t>1</a:t>
+            </a:r>
+            <a:endParaRPr lang="en-US" sz="2200" dirty="0"/>
+          </a:p>
+        </p:txBody>
+      </p:sp>
+      <p:sp>
+        <p:nvSpPr>
+          <p:cNvPr id="14" name="Text 11"/>
+          <p:cNvSpPr/>
+          <p:nvPr/>
+        </p:nvSpPr>
+        <p:spPr>
+          <a:xfrm>
+            <a:off x="6117336" y="2450592"/>
+            <a:ext cx="2327148" cy="329184"/>
+          </a:xfrm>
+          <a:prstGeom prst="rect">
+            <a:avLst/>
+          </a:prstGeom>
+          <a:noFill/>
+          <a:ln/>
+        </p:spPr>
+        <p:txBody>
+          <a:bodyPr wrap="square" rtlCol="0" anchor="t"/>
+          <a:lstStyle/>
+          <a:p>
+            <a:pPr indent="0" marL="0">
+              <a:buNone/>
+            </a:pPr>
+            <a:r>
+              <a:rPr lang="en-US" sz="850" spc="100" kern="0" dirty="0">
+                <a:solidFill>
+                  <a:srgbClr val="64748B"/>
+                </a:solidFill>
+                <a:latin typeface="Calibri" pitchFamily="34" charset="0"/>
+                <a:ea typeface="Calibri" pitchFamily="34" charset="-122"/>
+                <a:cs typeface="Calibri" pitchFamily="34" charset="-120"/>
+              </a:rPr>
+              <a:t>NEW-DRILL WELLS ≤ 10 MI SINCE 2020</a:t>
+            </a:r>
+            <a:endParaRPr lang="en-US" sz="850" dirty="0"/>
+          </a:p>
+        </p:txBody>
+      </p:sp>
+      <p:sp>
+        <p:nvSpPr>
+          <p:cNvPr id="15" name="Shape 12"/>
+          <p:cNvSpPr/>
+          <p:nvPr/>
+        </p:nvSpPr>
+        <p:spPr>
+          <a:xfrm>
+            <a:off x="8709660" y="1783080"/>
+            <a:ext cx="2583180" cy="1051560"/>
+          </a:xfrm>
+          <a:prstGeom prst="roundRect">
+            <a:avLst>
+              <a:gd name="adj" fmla="val 5217"/>
+            </a:avLst>
+          </a:prstGeom>
+          <a:solidFill>
+            <a:srgbClr val="F1F5F9"/>
+          </a:solidFill>
+          <a:ln w="9525">
+            <a:solidFill>
+              <a:srgbClr val="E2E8F0"/>
+            </a:solidFill>
+            <a:prstDash val="solid"/>
+          </a:ln>
+          <a:effectLst>
+            <a:outerShdw sx="100000" sy="100000" kx="0" ky="0" algn="bl" rotWithShape="0" blurRad="88900" dist="25400" dir="5400000">
+              <a:srgbClr val="0F1B2D">
+                <a:alpha val="16000"/>
+              </a:srgbClr>
+            </a:outerShdw>
+          </a:effectLst>
+        </p:spPr>
+      </p:sp>
+      <p:sp>
+        <p:nvSpPr>
+          <p:cNvPr id="16" name="Text 13"/>
+          <p:cNvSpPr/>
+          <p:nvPr/>
+        </p:nvSpPr>
+        <p:spPr>
+          <a:xfrm>
+            <a:off x="8837676" y="1874520"/>
+            <a:ext cx="2327148" cy="521208"/>
+          </a:xfrm>
+          <a:prstGeom prst="rect">
+            <a:avLst/>
+          </a:prstGeom>
+          <a:noFill/>
+          <a:ln/>
+        </p:spPr>
+        <p:txBody>
+          <a:bodyPr wrap="square" rtlCol="0" anchor="b"/>
+          <a:lstStyle/>
+          <a:p>
+            <a:pPr indent="0" marL="0">
+              <a:buNone/>
+            </a:pPr>
+            <a:r>
+              <a:rPr lang="en-US" sz="2200" b="1" dirty="0">
+                <a:solidFill>
+                  <a:srgbClr val="0F1B2D"/>
+                </a:solidFill>
+                <a:latin typeface="Calibri" pitchFamily="34" charset="0"/>
+                <a:ea typeface="Calibri" pitchFamily="34" charset="-122"/>
+                <a:cs typeface="Calibri" pitchFamily="34" charset="-120"/>
+              </a:rPr>
+              <a:t>0</a:t>
+            </a:r>
+            <a:endParaRPr lang="en-US" sz="2200" dirty="0"/>
+          </a:p>
+        </p:txBody>
+      </p:sp>
+      <p:sp>
+        <p:nvSpPr>
+          <p:cNvPr id="17" name="Text 14"/>
+          <p:cNvSpPr/>
+          <p:nvPr/>
+        </p:nvSpPr>
+        <p:spPr>
+          <a:xfrm>
+            <a:off x="8837676" y="2450592"/>
+            <a:ext cx="2327148" cy="329184"/>
+          </a:xfrm>
+          <a:prstGeom prst="rect">
+            <a:avLst/>
+          </a:prstGeom>
+          <a:noFill/>
+          <a:ln/>
+        </p:spPr>
+        <p:txBody>
+          <a:bodyPr wrap="square" rtlCol="0" anchor="t"/>
+          <a:lstStyle/>
+          <a:p>
+            <a:pPr indent="0" marL="0">
+              <a:buNone/>
+            </a:pPr>
+            <a:r>
+              <a:rPr lang="en-US" sz="850" spc="100" kern="0" dirty="0">
+                <a:solidFill>
+                  <a:srgbClr val="64748B"/>
+                </a:solidFill>
+                <a:latin typeface="Calibri" pitchFamily="34" charset="0"/>
+                <a:ea typeface="Calibri" pitchFamily="34" charset="-122"/>
+                <a:cs typeface="Calibri" pitchFamily="34" charset="-120"/>
+              </a:rPr>
+              <a:t>NEW-DRILL FRACKS ≤ 2 MI, EVER</a:t>
+            </a:r>
+            <a:endParaRPr lang="en-US" sz="850" dirty="0"/>
+          </a:p>
+        </p:txBody>
+      </p:sp>
+      <p:graphicFrame>
+        <p:nvGraphicFramePr>
+          <p:cNvPr id="18" name="Chart 0" descr=""/>
+          <p:cNvGraphicFramePr/>
+          <p:nvPr/>
+        </p:nvGraphicFramePr>
+        <p:xfrm>
+          <a:off x="548640" y="3063240"/>
+          <a:ext cx="6675120" cy="3200400"/>
+        </p:xfrm>
+        <a:graphic xmlns:a="http://schemas.openxmlformats.org/drawingml/2006/main">
+          <a:graphicData uri="http://schemas.openxmlformats.org/drawingml/2006/chart">
+            <c:chart xmlns:c="http://schemas.openxmlformats.org/drawingml/2006/chart" r:id="rId2"/>
+          </a:graphicData>
+        </a:graphic>
+      </p:graphicFrame>
+      <p:sp>
+        <p:nvSpPr>
+          <p:cNvPr id="19" name="Shape 15"/>
+          <p:cNvSpPr/>
+          <p:nvPr/>
+        </p:nvSpPr>
+        <p:spPr>
+          <a:xfrm>
+            <a:off x="7452360" y="3063240"/>
+            <a:ext cx="4206240" cy="3200400"/>
+          </a:xfrm>
+          <a:prstGeom prst="roundRect">
+            <a:avLst>
+              <a:gd name="adj" fmla="val 1429"/>
+            </a:avLst>
+          </a:prstGeom>
+          <a:solidFill>
+            <a:srgbClr val="FEF7F7"/>
+          </a:solidFill>
+          <a:ln w="15875">
+            <a:solidFill>
+              <a:srgbClr val="B91C1C"/>
+            </a:solidFill>
+            <a:prstDash val="solid"/>
+          </a:ln>
+          <a:effectLst>
+            <a:outerShdw sx="100000" sy="100000" kx="0" ky="0" algn="bl" rotWithShape="0" blurRad="88900" dist="25400" dir="5400000">
+              <a:srgbClr val="0F1B2D">
+                <a:alpha val="16000"/>
+              </a:srgbClr>
+            </a:outerShdw>
+          </a:effectLst>
+        </p:spPr>
+      </p:sp>
+      <p:sp>
+        <p:nvSpPr>
+          <p:cNvPr id="20" name="Text 16"/>
+          <p:cNvSpPr/>
+          <p:nvPr/>
+        </p:nvSpPr>
+        <p:spPr>
+          <a:xfrm>
+            <a:off x="7680960" y="3246120"/>
+            <a:ext cx="3749040" cy="274320"/>
+          </a:xfrm>
+          <a:prstGeom prst="rect">
+            <a:avLst/>
+          </a:prstGeom>
+          <a:noFill/>
+          <a:ln/>
+        </p:spPr>
+        <p:txBody>
+          <a:bodyPr wrap="square" rtlCol="0" anchor="ctr"/>
+          <a:lstStyle/>
+          <a:p>
+            <a:pPr indent="0" marL="0">
+              <a:buNone/>
+            </a:pPr>
+            <a:r>
+              <a:rPr lang="en-US" sz="1000" b="1" spc="150" kern="0" dirty="0">
+                <a:solidFill>
+                  <a:srgbClr val="B91C1C"/>
+                </a:solidFill>
+                <a:latin typeface="Calibri" pitchFamily="34" charset="0"/>
+                <a:ea typeface="Calibri" pitchFamily="34" charset="-122"/>
+                <a:cs typeface="Calibri" pitchFamily="34" charset="-120"/>
+              </a:rPr>
+              <a:t>BOTTOM LINE</a:t>
+            </a:r>
+            <a:endParaRPr lang="en-US" sz="1000" dirty="0"/>
+          </a:p>
+        </p:txBody>
+      </p:sp>
+      <p:sp>
+        <p:nvSpPr>
+          <p:cNvPr id="21" name="Text 17"/>
+          <p:cNvSpPr/>
+          <p:nvPr/>
+        </p:nvSpPr>
+        <p:spPr>
+          <a:xfrm>
+            <a:off x="7680960" y="3566160"/>
+            <a:ext cx="3749040" cy="1554480"/>
+          </a:xfrm>
+          <a:prstGeom prst="rect">
+            <a:avLst/>
+          </a:prstGeom>
+          <a:noFill/>
+          <a:ln/>
+        </p:spPr>
+        <p:txBody>
+          <a:bodyPr wrap="square" rtlCol="0" anchor="ctr"/>
+          <a:lstStyle/>
+          <a:p>
+            <a:pPr indent="0" marL="0">
+              <a:buNone/>
+            </a:pPr>
+            <a:r>
+              <a:rPr lang="en-US" sz="1300" b="1" dirty="0">
+                <a:solidFill>
+                  <a:srgbClr val="0F1B2D"/>
+                </a:solidFill>
+                <a:latin typeface="Calibri" pitchFamily="34" charset="0"/>
+                <a:ea typeface="Calibri" pitchFamily="34" charset="-122"/>
+                <a:cs typeface="Calibri" pitchFamily="34" charset="-120"/>
+              </a:rPr>
+              <a:t>Shallow drilling, hydraulic fracturing, or new drilling of any kind — three independent public records point the same way: it is not happening at or near this site.</a:t>
+            </a:r>
+            <a:endParaRPr lang="en-US" sz="1300" dirty="0"/>
+          </a:p>
+        </p:txBody>
+      </p:sp>
+      <p:sp>
+        <p:nvSpPr>
+          <p:cNvPr id="22" name="Text 18"/>
+          <p:cNvSpPr/>
+          <p:nvPr/>
+        </p:nvSpPr>
+        <p:spPr>
+          <a:xfrm>
+            <a:off x="7680960" y="5120640"/>
+            <a:ext cx="3749040" cy="1005840"/>
+          </a:xfrm>
+          <a:prstGeom prst="rect">
+            <a:avLst/>
+          </a:prstGeom>
+          <a:noFill/>
+          <a:ln/>
+        </p:spPr>
+        <p:txBody>
+          <a:bodyPr wrap="square" rtlCol="0" anchor="ctr"/>
+          <a:lstStyle/>
+          <a:p>
+            <a:pPr indent="0" marL="0">
+              <a:buNone/>
+            </a:pPr>
+            <a:r>
+              <a:rPr lang="en-US" sz="1000" dirty="0">
+                <a:solidFill>
+                  <a:srgbClr val="475569"/>
+                </a:solidFill>
+                <a:latin typeface="Calibri" pitchFamily="34" charset="0"/>
+                <a:ea typeface="Calibri" pitchFamily="34" charset="-122"/>
+                <a:cs typeface="Calibri" pitchFamily="34" charset="-120"/>
+              </a:rPr>
+              <a:t>Pecos: 115 new wells since 2020 vs. peer average 1,181. 83% of non-plugged wellbores ≤10 mi are marginal/end-of-life.</a:t>
+            </a:r>
+            <a:endParaRPr lang="en-US" sz="1000" dirty="0"/>
+          </a:p>
+        </p:txBody>
+      </p:sp>
+      <p:sp>
+        <p:nvSpPr>
+          <p:cNvPr id="23" name="Text 19"/>
+          <p:cNvSpPr/>
+          <p:nvPr/>
+        </p:nvSpPr>
+        <p:spPr>
+          <a:xfrm>
+            <a:off x="457200" y="6510528"/>
+            <a:ext cx="7315200" cy="274320"/>
+          </a:xfrm>
+          <a:prstGeom prst="rect">
+            <a:avLst/>
+          </a:prstGeom>
+          <a:noFill/>
+          <a:ln/>
+        </p:spPr>
+        <p:txBody>
+          <a:bodyPr wrap="square" rtlCol="0" anchor="ctr"/>
+          <a:lstStyle/>
+          <a:p>
+            <a:pPr indent="0" marL="0">
+              <a:buNone/>
+            </a:pPr>
+            <a:r>
+              <a:rPr lang="en-US" sz="800" dirty="0">
+                <a:solidFill>
+                  <a:srgbClr val="64748B"/>
+                </a:solidFill>
+                <a:latin typeface="Calibri" pitchFamily="34" charset="0"/>
+                <a:ea typeface="Calibri" pitchFamily="34" charset="-122"/>
+                <a:cs typeface="Calibri" pitchFamily="34" charset="-120"/>
+              </a:rPr>
+              <a:t>CARAMBA NORTH — STRICTLY CONFIDENTIAL, POST-NDA</a:t>
+            </a:r>
+            <a:endParaRPr lang="en-US" sz="800" dirty="0"/>
+          </a:p>
+        </p:txBody>
+      </p:sp>
+      <p:sp>
+        <p:nvSpPr>
+          <p:cNvPr id="24" name="Text 20"/>
+          <p:cNvSpPr/>
+          <p:nvPr/>
+        </p:nvSpPr>
+        <p:spPr>
+          <a:xfrm>
+            <a:off x="11368735" y="6510528"/>
+            <a:ext cx="365760" cy="274320"/>
+          </a:xfrm>
+          <a:prstGeom prst="rect">
+            <a:avLst/>
+          </a:prstGeom>
+          <a:noFill/>
+          <a:ln/>
+        </p:spPr>
+        <p:txBody>
+          <a:bodyPr wrap="square" rtlCol="0" anchor="ctr"/>
+          <a:lstStyle/>
+          <a:p>
+            <a:pPr algn="r" indent="0" marL="0">
+              <a:buNone/>
+            </a:pPr>
+            <a:r>
+              <a:rPr lang="en-US" sz="800" dirty="0">
+                <a:solidFill>
+                  <a:srgbClr val="64748B"/>
+                </a:solidFill>
+                <a:latin typeface="Calibri" pitchFamily="34" charset="0"/>
+                <a:ea typeface="Calibri" pitchFamily="34" charset="-122"/>
+                <a:cs typeface="Calibri" pitchFamily="34" charset="-120"/>
+              </a:rPr>
+              <a:t>12</a:t>
+            </a:r>
+            <a:endParaRPr lang="en-US" sz="800" dirty="0"/>
+          </a:p>
+        </p:txBody>
+      </p:sp>
+    </p:spTree>
+  </p:cSld>
+  <p:clrMapOvr>
+    <a:masterClrMapping/>
+  </p:clrMapOvr>
+</p:sld>
+</file>
+
+<file path=ppt/slides/slide13.xml><?xml version="1.0" encoding="utf-8"?>
+<p:sld xmlns:a="http://schemas.openxmlformats.org/drawingml/2006/main" xmlns:r="http://schemas.openxmlformats.org/officeDocument/2006/relationships" xmlns:p="http://schemas.openxmlformats.org/presentationml/2006/main">
+  <p:cSld name="Slide 13">
+    <p:bg>
+      <p:bgPr>
+        <a:solidFill>
+          <a:srgbClr val="FFFFFF"/>
+        </a:solidFill>
+      </p:bgPr>
+    </p:bg>
+    <p:spTree>
+      <p:nvGrpSpPr>
+        <p:cNvPr id="1" name=""/>
+        <p:cNvGrpSpPr/>
+        <p:nvPr/>
+      </p:nvGrpSpPr>
+      <p:grpSpPr>
+        <a:xfrm>
+          <a:off x="0" y="0"/>
+          <a:ext cx="0" cy="0"/>
+          <a:chOff x="0" y="0"/>
+          <a:chExt cx="0" cy="0"/>
+        </a:xfrm>
+      </p:grpSpPr>
+      <p:sp>
+        <p:nvSpPr>
+          <p:cNvPr id="2" name="Shape 0"/>
+          <p:cNvSpPr/>
+          <p:nvPr/>
+        </p:nvSpPr>
+        <p:spPr>
+          <a:xfrm>
+            <a:off x="548640" y="310896"/>
+            <a:ext cx="402336" cy="402336"/>
+          </a:xfrm>
+          <a:prstGeom prst="ellipse">
+            <a:avLst/>
+          </a:prstGeom>
+          <a:solidFill>
+            <a:srgbClr val="B91C1C"/>
+          </a:solidFill>
+          <a:ln/>
+          <a:effectLst>
+            <a:outerShdw sx="100000" sy="100000" kx="0" ky="0" algn="bl" rotWithShape="0" blurRad="88900" dist="25400" dir="5400000">
+              <a:srgbClr val="0F1B2D">
+                <a:alpha val="16000"/>
+              </a:srgbClr>
+            </a:outerShdw>
+          </a:effectLst>
+        </p:spPr>
+      </p:sp>
+      <p:pic>
+        <p:nvPicPr>
+          <p:cNvPr id="3" name="Image 0" descr="preencoded.png">    </p:cNvPr>
+          <p:cNvPicPr>
+            <a:picLocks noChangeAspect="1"/>
+          </p:cNvPicPr>
+          <p:nvPr/>
+        </p:nvPicPr>
+        <p:blipFill>
+          <a:blip r:embed="rId1"/>
+          <a:stretch>
+            <a:fillRect/>
+          </a:stretch>
+        </p:blipFill>
+        <p:spPr>
+          <a:xfrm>
+            <a:off x="653247" y="415503"/>
+            <a:ext cx="193121" cy="193121"/>
+          </a:xfrm>
+          <a:prstGeom prst="rect">
+            <a:avLst/>
+          </a:prstGeom>
+        </p:spPr>
+      </p:pic>
+      <p:sp>
+        <p:nvSpPr>
+          <p:cNvPr id="4" name="Text 1"/>
+          <p:cNvSpPr/>
+          <p:nvPr/>
+        </p:nvSpPr>
+        <p:spPr>
+          <a:xfrm>
+            <a:off x="1097280" y="365760"/>
+            <a:ext cx="9144000" cy="365760"/>
           </a:xfrm>
           <a:prstGeom prst="rect">
             <a:avLst/>
@@ -3726,14 +6081,14 @@
       </p:sp>
       <p:sp>
         <p:nvSpPr>
-          <p:cNvPr id="3" name="Text 1"/>
-          <p:cNvSpPr/>
-          <p:nvPr/>
-        </p:nvSpPr>
-        <p:spPr>
-          <a:xfrm>
-            <a:off x="548640" y="713232"/>
-            <a:ext cx="11064240" cy="914400"/>
+          <p:cNvPr id="5" name="Text 2"/>
+          <p:cNvSpPr/>
+          <p:nvPr/>
+        </p:nvSpPr>
+        <p:spPr>
+          <a:xfrm>
+            <a:off x="548640" y="841248"/>
+            <a:ext cx="11064240" cy="822960"/>
           </a:xfrm>
           <a:prstGeom prst="rect">
             <a:avLst/>
@@ -3749,7 +6104,7 @@
               <a:buNone/>
             </a:pPr>
             <a:r>
-              <a:rPr lang="en-US" sz="2600" b="1" dirty="0">
+              <a:rPr lang="en-US" sz="2500" b="1" dirty="0">
                 <a:solidFill>
                   <a:srgbClr val="0F1B2D"/>
                 </a:solidFill>
@@ -3759,13 +6114,13 @@
               </a:rPr>
               <a:t>GIS platform access &amp; source register</a:t>
             </a:r>
-            <a:endParaRPr lang="en-US" sz="2600" dirty="0"/>
+            <a:endParaRPr lang="en-US" sz="2500" dirty="0"/>
           </a:p>
         </p:txBody>
       </p:sp>
       <p:graphicFrame>
         <p:nvGraphicFramePr>
-          <p:cNvPr id="12" name="Table 0"/>
+          <p:cNvPr id="14" name="Table 0"/>
           <p:cNvGraphicFramePr>
             <a:graphicFrameLocks noGrp="1"/>
           </p:cNvGraphicFramePr>
@@ -4461,7 +6816,7 @@
       </p:graphicFrame>
       <p:sp>
         <p:nvSpPr>
-          <p:cNvPr id="5" name="Text 2"/>
+          <p:cNvPr id="7" name="Text 3"/>
           <p:cNvSpPr/>
           <p:nvPr/>
         </p:nvSpPr>
@@ -4500,7 +6855,7 @@
       </p:sp>
       <p:sp>
         <p:nvSpPr>
-          <p:cNvPr id="6" name="Text 3"/>
+          <p:cNvPr id="8" name="Text 4"/>
           <p:cNvSpPr/>
           <p:nvPr/>
         </p:nvSpPr>
@@ -4539,7 +6894,7 @@
       </p:sp>
       <p:sp>
         <p:nvSpPr>
-          <p:cNvPr id="7" name="Text 4"/>
+          <p:cNvPr id="9" name="Text 5"/>
           <p:cNvSpPr/>
           <p:nvPr/>
         </p:nvSpPr>
@@ -4570,7 +6925,7 @@
                 <a:ea typeface="Calibri" pitchFamily="34" charset="-122"/>
                 <a:cs typeface="Calibri" pitchFamily="34" charset="-120"/>
               </a:rPr>
-              <a:t>11</a:t>
+              <a:t>13</a:t>
             </a:r>
             <a:endParaRPr lang="en-US" sz="800" dirty="0"/>
           </a:p>
@@ -4584,13 +6939,13 @@
 </p:sld>
 </file>
 
-<file path=ppt/slides/slide12.xml><?xml version="1.0" encoding="utf-8"?>
+<file path=ppt/slides/slide14.xml><?xml version="1.0" encoding="utf-8"?>
 <p:sld xmlns:a="http://schemas.openxmlformats.org/drawingml/2006/main" xmlns:r="http://schemas.openxmlformats.org/officeDocument/2006/relationships" xmlns:p="http://schemas.openxmlformats.org/presentationml/2006/main">
-  <p:cSld name="Slide 12">
+  <p:cSld name="Slide 14">
     <p:bg>
       <p:bgPr>
         <a:solidFill>
-          <a:srgbClr val="FFFFFF"/>
+          <a:srgbClr val="0F1B2D"/>
         </a:solidFill>
       </p:bgPr>
     </p:bg>
@@ -4616,8 +6971,8 @@
         </p:nvSpPr>
         <p:spPr>
           <a:xfrm>
-            <a:off x="548640" y="384048"/>
-            <a:ext cx="9144000" cy="320040"/>
+            <a:off x="548640" y="685800"/>
+            <a:ext cx="10058400" cy="457200"/>
           </a:xfrm>
           <a:prstGeom prst="rect">
             <a:avLst/>
@@ -4633,9 +6988,9 @@
               <a:buNone/>
             </a:pPr>
             <a:r>
-              <a:rPr lang="en-US" sz="1200" b="1" spc="200" kern="0" dirty="0">
+              <a:rPr lang="en-US" sz="1500" b="1" spc="200" kern="0" dirty="0">
                 <a:solidFill>
-                  <a:srgbClr val="B91C1C"/>
+                  <a:srgbClr val="F87171"/>
                 </a:solidFill>
                 <a:latin typeface="Calibri" pitchFamily="34" charset="0"/>
                 <a:ea typeface="Calibri" pitchFamily="34" charset="-122"/>
@@ -4643,7 +6998,7 @@
               </a:rPr>
               <a:t>IMPORTANT NOTICES</a:t>
             </a:r>
-            <a:endParaRPr lang="en-US" sz="1200" dirty="0"/>
+            <a:endParaRPr lang="en-US" sz="1500" dirty="0"/>
           </a:p>
         </p:txBody>
       </p:sp>
@@ -4655,8 +7010,8 @@
         </p:nvSpPr>
         <p:spPr>
           <a:xfrm>
-            <a:off x="548640" y="1005840"/>
-            <a:ext cx="11064240" cy="5120640"/>
+            <a:off x="548640" y="1371600"/>
+            <a:ext cx="11064240" cy="4754880"/>
           </a:xfrm>
           <a:prstGeom prst="rect">
             <a:avLst/>
@@ -4677,7 +7032,7 @@
             <a:r>
               <a:rPr lang="en-US" sz="1200" dirty="0">
                 <a:solidFill>
-                  <a:srgbClr val="24354C"/>
+                  <a:srgbClr val="CADCFC"/>
                 </a:solidFill>
                 <a:latin typeface="Calibri" pitchFamily="34" charset="0"/>
                 <a:ea typeface="Calibri" pitchFamily="34" charset="-122"/>
@@ -4706,7 +7061,7 @@
             <a:r>
               <a:rPr lang="en-US" sz="1200" dirty="0">
                 <a:solidFill>
-                  <a:srgbClr val="24354C"/>
+                  <a:srgbClr val="CADCFC"/>
                 </a:solidFill>
                 <a:latin typeface="Calibri" pitchFamily="34" charset="0"/>
                 <a:ea typeface="Calibri" pitchFamily="34" charset="-122"/>
@@ -4735,13 +7090,13 @@
             <a:r>
               <a:rPr lang="en-US" sz="1200" dirty="0">
                 <a:solidFill>
-                  <a:srgbClr val="24354C"/>
+                  <a:srgbClr val="CADCFC"/>
                 </a:solidFill>
                 <a:latin typeface="Calibri" pitchFamily="34" charset="0"/>
                 <a:ea typeface="Calibri" pitchFamily="34" charset="-122"/>
                 <a:cs typeface="Calibri" pitchFamily="34" charset="-120"/>
               </a:rPr>
-              <a:t>Public data is drawn from ERCOT, PUCT, EIA, TCEQ, RRC, FracFocus, Middle Pecos GCD, HIFLD, USGS, BTS, and U.S. Census TIGER, supplemented by project-level GIS analysis and counterparty-supplied indicative terms. Recipients should conduct their own independent investigation, including consultation with their own legal, tax, accounting, and engineering advisors.</a:t>
+              <a:t>Public data is drawn from ERCOT, PUCT, EIA, TCEQ, RRC, FracFocus, Middle Pecos GCD, HIFLD, USGS, BTS, and U.S. Census TIGER, supplemented by project-level GIS analysis and counterparty-supplied indicative terms. News on third-party transactions (e.g. Section "Feature") is drawn from public reporting cited in the companion Word/PDF data model. Recipients should conduct their own independent investigation, including consultation with their own legal, tax, accounting, and engineering advisors.</a:t>
             </a:r>
             <a:endParaRPr lang="en-US" sz="1200" dirty="0"/>
           </a:p>
@@ -4774,7 +7129,7 @@
             <a:r>
               <a:rPr lang="en-US" sz="800" dirty="0">
                 <a:solidFill>
-                  <a:srgbClr val="64748B"/>
+                  <a:srgbClr val="94A3B8"/>
                 </a:solidFill>
                 <a:latin typeface="Calibri" pitchFamily="34" charset="0"/>
                 <a:ea typeface="Calibri" pitchFamily="34" charset="-122"/>
@@ -4813,13 +7168,13 @@
             <a:r>
               <a:rPr lang="en-US" sz="800" dirty="0">
                 <a:solidFill>
-                  <a:srgbClr val="64748B"/>
+                  <a:srgbClr val="94A3B8"/>
                 </a:solidFill>
                 <a:latin typeface="Calibri" pitchFamily="34" charset="0"/>
                 <a:ea typeface="Calibri" pitchFamily="34" charset="-122"/>
                 <a:cs typeface="Calibri" pitchFamily="34" charset="-120"/>
               </a:rPr>
-              <a:t>12</a:t>
+              <a:t>14</a:t>
             </a:r>
             <a:endParaRPr lang="en-US" sz="800" dirty="0"/>
           </a:p>
@@ -4859,14 +7214,65 @@
       </p:grpSpPr>
       <p:sp>
         <p:nvSpPr>
-          <p:cNvPr id="2" name="Text 0"/>
-          <p:cNvSpPr/>
-          <p:nvPr/>
-        </p:nvSpPr>
-        <p:spPr>
-          <a:xfrm>
-            <a:off x="548640" y="384048"/>
-            <a:ext cx="9144000" cy="320040"/>
+          <p:cNvPr id="2" name="Shape 0"/>
+          <p:cNvSpPr/>
+          <p:nvPr/>
+        </p:nvSpPr>
+        <p:spPr>
+          <a:xfrm>
+            <a:off x="548640" y="310896"/>
+            <a:ext cx="402336" cy="402336"/>
+          </a:xfrm>
+          <a:prstGeom prst="ellipse">
+            <a:avLst/>
+          </a:prstGeom>
+          <a:solidFill>
+            <a:srgbClr val="B91C1C"/>
+          </a:solidFill>
+          <a:ln/>
+          <a:effectLst>
+            <a:outerShdw sx="100000" sy="100000" kx="0" ky="0" algn="bl" rotWithShape="0" blurRad="88900" dist="25400" dir="5400000">
+              <a:srgbClr val="0F1B2D">
+                <a:alpha val="16000"/>
+              </a:srgbClr>
+            </a:outerShdw>
+          </a:effectLst>
+        </p:spPr>
+      </p:sp>
+      <p:pic>
+        <p:nvPicPr>
+          <p:cNvPr id="3" name="Image 0" descr="preencoded.png">    </p:cNvPr>
+          <p:cNvPicPr>
+            <a:picLocks noChangeAspect="1"/>
+          </p:cNvPicPr>
+          <p:nvPr/>
+        </p:nvPicPr>
+        <p:blipFill>
+          <a:blip r:embed="rId1"/>
+          <a:stretch>
+            <a:fillRect/>
+          </a:stretch>
+        </p:blipFill>
+        <p:spPr>
+          <a:xfrm>
+            <a:off x="653247" y="415503"/>
+            <a:ext cx="193121" cy="193121"/>
+          </a:xfrm>
+          <a:prstGeom prst="rect">
+            <a:avLst/>
+          </a:prstGeom>
+        </p:spPr>
+      </p:pic>
+      <p:sp>
+        <p:nvSpPr>
+          <p:cNvPr id="4" name="Text 1"/>
+          <p:cNvSpPr/>
+          <p:nvPr/>
+        </p:nvSpPr>
+        <p:spPr>
+          <a:xfrm>
+            <a:off x="1097280" y="365760"/>
+            <a:ext cx="9144000" cy="365760"/>
           </a:xfrm>
           <a:prstGeom prst="rect">
             <a:avLst/>
@@ -4898,14 +7304,14 @@
       </p:sp>
       <p:sp>
         <p:nvSpPr>
-          <p:cNvPr id="3" name="Text 1"/>
-          <p:cNvSpPr/>
-          <p:nvPr/>
-        </p:nvSpPr>
-        <p:spPr>
-          <a:xfrm>
-            <a:off x="548640" y="713232"/>
-            <a:ext cx="11064240" cy="914400"/>
+          <p:cNvPr id="5" name="Text 2"/>
+          <p:cNvSpPr/>
+          <p:nvPr/>
+        </p:nvSpPr>
+        <p:spPr>
+          <a:xfrm>
+            <a:off x="548640" y="841248"/>
+            <a:ext cx="11064240" cy="822960"/>
           </a:xfrm>
           <a:prstGeom prst="rect">
             <a:avLst/>
@@ -4921,7 +7327,7 @@
               <a:buNone/>
             </a:pPr>
             <a:r>
-              <a:rPr lang="en-US" sz="2600" b="1" dirty="0">
+              <a:rPr lang="en-US" sz="2500" b="1" dirty="0">
                 <a:solidFill>
                   <a:srgbClr val="0F1B2D"/>
                 </a:solidFill>
@@ -4931,40 +7337,71 @@
               </a:rPr>
               <a:t>What's in this deck</a:t>
             </a:r>
-            <a:endParaRPr lang="en-US" sz="2600" dirty="0"/>
-          </a:p>
-        </p:txBody>
-      </p:sp>
-      <p:sp>
-        <p:nvSpPr>
-          <p:cNvPr id="4" name="Shape 2"/>
-          <p:cNvSpPr/>
-          <p:nvPr/>
-        </p:nvSpPr>
-        <p:spPr>
-          <a:xfrm>
-            <a:off x="548640" y="1929384"/>
-            <a:ext cx="73152" cy="310896"/>
-          </a:xfrm>
-          <a:prstGeom prst="rect">
+            <a:endParaRPr lang="en-US" sz="2500" dirty="0"/>
+          </a:p>
+        </p:txBody>
+      </p:sp>
+      <p:sp>
+        <p:nvSpPr>
+          <p:cNvPr id="6" name="Shape 3"/>
+          <p:cNvSpPr/>
+          <p:nvPr/>
+        </p:nvSpPr>
+        <p:spPr>
+          <a:xfrm>
+            <a:off x="548640" y="1810512"/>
+            <a:ext cx="365760" cy="365760"/>
+          </a:xfrm>
+          <a:prstGeom prst="ellipse">
             <a:avLst/>
           </a:prstGeom>
           <a:solidFill>
             <a:srgbClr val="B91C1C"/>
           </a:solidFill>
           <a:ln/>
-        </p:spPr>
-      </p:sp>
-      <p:sp>
-        <p:nvSpPr>
-          <p:cNvPr id="5" name="Text 3"/>
-          <p:cNvSpPr/>
-          <p:nvPr/>
-        </p:nvSpPr>
-        <p:spPr>
-          <a:xfrm>
-            <a:off x="777240" y="1874520"/>
-            <a:ext cx="5166360" cy="457200"/>
+          <a:effectLst>
+            <a:outerShdw sx="100000" sy="100000" kx="0" ky="0" algn="bl" rotWithShape="0" blurRad="88900" dist="25400" dir="5400000">
+              <a:srgbClr val="0F1B2D">
+                <a:alpha val="16000"/>
+              </a:srgbClr>
+            </a:outerShdw>
+          </a:effectLst>
+        </p:spPr>
+      </p:sp>
+      <p:pic>
+        <p:nvPicPr>
+          <p:cNvPr id="7" name="Image 1" descr="preencoded.png">    </p:cNvPr>
+          <p:cNvPicPr>
+            <a:picLocks noChangeAspect="1"/>
+          </p:cNvPicPr>
+          <p:nvPr/>
+        </p:nvPicPr>
+        <p:blipFill>
+          <a:blip r:embed="rId2"/>
+          <a:stretch>
+            <a:fillRect/>
+          </a:stretch>
+        </p:blipFill>
+        <p:spPr>
+          <a:xfrm>
+            <a:off x="643738" y="1905610"/>
+            <a:ext cx="175565" cy="175565"/>
+          </a:xfrm>
+          <a:prstGeom prst="rect">
+            <a:avLst/>
+          </a:prstGeom>
+        </p:spPr>
+      </p:pic>
+      <p:sp>
+        <p:nvSpPr>
+          <p:cNvPr id="8" name="Text 4"/>
+          <p:cNvSpPr/>
+          <p:nvPr/>
+        </p:nvSpPr>
+        <p:spPr>
+          <a:xfrm>
+            <a:off x="1051560" y="1783080"/>
+            <a:ext cx="4892040" cy="438912"/>
           </a:xfrm>
           <a:prstGeom prst="rect">
             <a:avLst/>
@@ -4980,7 +7417,7 @@
               <a:buNone/>
             </a:pPr>
             <a:r>
-              <a:rPr lang="en-US" sz="1600" b="1" dirty="0">
+              <a:rPr lang="en-US" sz="1500" b="1" dirty="0">
                 <a:solidFill>
                   <a:srgbClr val="0F1B2D"/>
                 </a:solidFill>
@@ -4990,40 +7427,71 @@
               </a:rPr>
               <a:t>01  Executive Summary</a:t>
             </a:r>
-            <a:endParaRPr lang="en-US" sz="1600" dirty="0"/>
-          </a:p>
-        </p:txBody>
-      </p:sp>
-      <p:sp>
-        <p:nvSpPr>
-          <p:cNvPr id="6" name="Shape 4"/>
-          <p:cNvSpPr/>
-          <p:nvPr/>
-        </p:nvSpPr>
-        <p:spPr>
-          <a:xfrm>
-            <a:off x="548640" y="2496312"/>
-            <a:ext cx="73152" cy="310896"/>
-          </a:xfrm>
-          <a:prstGeom prst="rect">
+            <a:endParaRPr lang="en-US" sz="1500" dirty="0"/>
+          </a:p>
+        </p:txBody>
+      </p:sp>
+      <p:sp>
+        <p:nvSpPr>
+          <p:cNvPr id="9" name="Shape 5"/>
+          <p:cNvSpPr/>
+          <p:nvPr/>
+        </p:nvSpPr>
+        <p:spPr>
+          <a:xfrm>
+            <a:off x="548640" y="2340864"/>
+            <a:ext cx="365760" cy="365760"/>
+          </a:xfrm>
+          <a:prstGeom prst="ellipse">
             <a:avLst/>
           </a:prstGeom>
           <a:solidFill>
             <a:srgbClr val="B91C1C"/>
           </a:solidFill>
           <a:ln/>
-        </p:spPr>
-      </p:sp>
-      <p:sp>
-        <p:nvSpPr>
-          <p:cNvPr id="7" name="Text 5"/>
-          <p:cNvSpPr/>
-          <p:nvPr/>
-        </p:nvSpPr>
-        <p:spPr>
-          <a:xfrm>
-            <a:off x="777240" y="2441448"/>
-            <a:ext cx="5166360" cy="457200"/>
+          <a:effectLst>
+            <a:outerShdw sx="100000" sy="100000" kx="0" ky="0" algn="bl" rotWithShape="0" blurRad="88900" dist="25400" dir="5400000">
+              <a:srgbClr val="0F1B2D">
+                <a:alpha val="16000"/>
+              </a:srgbClr>
+            </a:outerShdw>
+          </a:effectLst>
+        </p:spPr>
+      </p:sp>
+      <p:pic>
+        <p:nvPicPr>
+          <p:cNvPr id="10" name="Image 2" descr="preencoded.png">    </p:cNvPr>
+          <p:cNvPicPr>
+            <a:picLocks noChangeAspect="1"/>
+          </p:cNvPicPr>
+          <p:nvPr/>
+        </p:nvPicPr>
+        <p:blipFill>
+          <a:blip r:embed="rId3"/>
+          <a:stretch>
+            <a:fillRect/>
+          </a:stretch>
+        </p:blipFill>
+        <p:spPr>
+          <a:xfrm>
+            <a:off x="643738" y="2435962"/>
+            <a:ext cx="175565" cy="175565"/>
+          </a:xfrm>
+          <a:prstGeom prst="rect">
+            <a:avLst/>
+          </a:prstGeom>
+        </p:spPr>
+      </p:pic>
+      <p:sp>
+        <p:nvSpPr>
+          <p:cNvPr id="11" name="Text 6"/>
+          <p:cNvSpPr/>
+          <p:nvPr/>
+        </p:nvSpPr>
+        <p:spPr>
+          <a:xfrm>
+            <a:off x="1051560" y="2313432"/>
+            <a:ext cx="4892040" cy="438912"/>
           </a:xfrm>
           <a:prstGeom prst="rect">
             <a:avLst/>
@@ -5039,7 +7507,7 @@
               <a:buNone/>
             </a:pPr>
             <a:r>
-              <a:rPr lang="en-US" sz="1600" b="1" dirty="0">
+              <a:rPr lang="en-US" sz="1500" b="1" dirty="0">
                 <a:solidFill>
                   <a:srgbClr val="0F1B2D"/>
                 </a:solidFill>
@@ -5049,40 +7517,71 @@
               </a:rPr>
               <a:t>02  The Property</a:t>
             </a:r>
-            <a:endParaRPr lang="en-US" sz="1600" dirty="0"/>
-          </a:p>
-        </p:txBody>
-      </p:sp>
-      <p:sp>
-        <p:nvSpPr>
-          <p:cNvPr id="8" name="Shape 6"/>
-          <p:cNvSpPr/>
-          <p:nvPr/>
-        </p:nvSpPr>
-        <p:spPr>
-          <a:xfrm>
-            <a:off x="548640" y="3063240"/>
-            <a:ext cx="73152" cy="310896"/>
-          </a:xfrm>
-          <a:prstGeom prst="rect">
+            <a:endParaRPr lang="en-US" sz="1500" dirty="0"/>
+          </a:p>
+        </p:txBody>
+      </p:sp>
+      <p:sp>
+        <p:nvSpPr>
+          <p:cNvPr id="12" name="Shape 7"/>
+          <p:cNvSpPr/>
+          <p:nvPr/>
+        </p:nvSpPr>
+        <p:spPr>
+          <a:xfrm>
+            <a:off x="548640" y="2871216"/>
+            <a:ext cx="365760" cy="365760"/>
+          </a:xfrm>
+          <a:prstGeom prst="ellipse">
             <a:avLst/>
           </a:prstGeom>
           <a:solidFill>
             <a:srgbClr val="B91C1C"/>
           </a:solidFill>
           <a:ln/>
-        </p:spPr>
-      </p:sp>
-      <p:sp>
-        <p:nvSpPr>
-          <p:cNvPr id="9" name="Text 7"/>
-          <p:cNvSpPr/>
-          <p:nvPr/>
-        </p:nvSpPr>
-        <p:spPr>
-          <a:xfrm>
-            <a:off x="777240" y="3008376"/>
-            <a:ext cx="5166360" cy="457200"/>
+          <a:effectLst>
+            <a:outerShdw sx="100000" sy="100000" kx="0" ky="0" algn="bl" rotWithShape="0" blurRad="88900" dist="25400" dir="5400000">
+              <a:srgbClr val="0F1B2D">
+                <a:alpha val="16000"/>
+              </a:srgbClr>
+            </a:outerShdw>
+          </a:effectLst>
+        </p:spPr>
+      </p:sp>
+      <p:pic>
+        <p:nvPicPr>
+          <p:cNvPr id="13" name="Image 3" descr="preencoded.png">    </p:cNvPr>
+          <p:cNvPicPr>
+            <a:picLocks noChangeAspect="1"/>
+          </p:cNvPicPr>
+          <p:nvPr/>
+        </p:nvPicPr>
+        <p:blipFill>
+          <a:blip r:embed="rId4"/>
+          <a:stretch>
+            <a:fillRect/>
+          </a:stretch>
+        </p:blipFill>
+        <p:spPr>
+          <a:xfrm>
+            <a:off x="643738" y="2966314"/>
+            <a:ext cx="175565" cy="175565"/>
+          </a:xfrm>
+          <a:prstGeom prst="rect">
+            <a:avLst/>
+          </a:prstGeom>
+        </p:spPr>
+      </p:pic>
+      <p:sp>
+        <p:nvSpPr>
+          <p:cNvPr id="14" name="Text 8"/>
+          <p:cNvSpPr/>
+          <p:nvPr/>
+        </p:nvSpPr>
+        <p:spPr>
+          <a:xfrm>
+            <a:off x="1051560" y="2843784"/>
+            <a:ext cx="4892040" cy="438912"/>
           </a:xfrm>
           <a:prstGeom prst="rect">
             <a:avLst/>
@@ -5098,7 +7597,7 @@
               <a:buNone/>
             </a:pPr>
             <a:r>
-              <a:rPr lang="en-US" sz="1600" b="1" dirty="0">
+              <a:rPr lang="en-US" sz="1500" b="1" dirty="0">
                 <a:solidFill>
                   <a:srgbClr val="0F1B2D"/>
                 </a:solidFill>
@@ -5108,40 +7607,71 @@
               </a:rPr>
               <a:t>03  Transmission</a:t>
             </a:r>
-            <a:endParaRPr lang="en-US" sz="1600" dirty="0"/>
-          </a:p>
-        </p:txBody>
-      </p:sp>
-      <p:sp>
-        <p:nvSpPr>
-          <p:cNvPr id="10" name="Shape 8"/>
-          <p:cNvSpPr/>
-          <p:nvPr/>
-        </p:nvSpPr>
-        <p:spPr>
-          <a:xfrm>
-            <a:off x="548640" y="3630168"/>
-            <a:ext cx="73152" cy="310896"/>
-          </a:xfrm>
-          <a:prstGeom prst="rect">
+            <a:endParaRPr lang="en-US" sz="1500" dirty="0"/>
+          </a:p>
+        </p:txBody>
+      </p:sp>
+      <p:sp>
+        <p:nvSpPr>
+          <p:cNvPr id="15" name="Shape 9"/>
+          <p:cNvSpPr/>
+          <p:nvPr/>
+        </p:nvSpPr>
+        <p:spPr>
+          <a:xfrm>
+            <a:off x="548640" y="3401568"/>
+            <a:ext cx="365760" cy="365760"/>
+          </a:xfrm>
+          <a:prstGeom prst="ellipse">
             <a:avLst/>
           </a:prstGeom>
           <a:solidFill>
             <a:srgbClr val="B91C1C"/>
           </a:solidFill>
           <a:ln/>
-        </p:spPr>
-      </p:sp>
-      <p:sp>
-        <p:nvSpPr>
-          <p:cNvPr id="11" name="Text 9"/>
-          <p:cNvSpPr/>
-          <p:nvPr/>
-        </p:nvSpPr>
-        <p:spPr>
-          <a:xfrm>
-            <a:off x="777240" y="3575304"/>
-            <a:ext cx="5166360" cy="457200"/>
+          <a:effectLst>
+            <a:outerShdw sx="100000" sy="100000" kx="0" ky="0" algn="bl" rotWithShape="0" blurRad="88900" dist="25400" dir="5400000">
+              <a:srgbClr val="0F1B2D">
+                <a:alpha val="16000"/>
+              </a:srgbClr>
+            </a:outerShdw>
+          </a:effectLst>
+        </p:spPr>
+      </p:sp>
+      <p:pic>
+        <p:nvPicPr>
+          <p:cNvPr id="16" name="Image 4" descr="preencoded.png">    </p:cNvPr>
+          <p:cNvPicPr>
+            <a:picLocks noChangeAspect="1"/>
+          </p:cNvPicPr>
+          <p:nvPr/>
+        </p:nvPicPr>
+        <p:blipFill>
+          <a:blip r:embed="rId5"/>
+          <a:stretch>
+            <a:fillRect/>
+          </a:stretch>
+        </p:blipFill>
+        <p:spPr>
+          <a:xfrm>
+            <a:off x="643738" y="3496666"/>
+            <a:ext cx="175565" cy="175565"/>
+          </a:xfrm>
+          <a:prstGeom prst="rect">
+            <a:avLst/>
+          </a:prstGeom>
+        </p:spPr>
+      </p:pic>
+      <p:sp>
+        <p:nvSpPr>
+          <p:cNvPr id="17" name="Text 10"/>
+          <p:cNvSpPr/>
+          <p:nvPr/>
+        </p:nvSpPr>
+        <p:spPr>
+          <a:xfrm>
+            <a:off x="1051560" y="3374136"/>
+            <a:ext cx="4892040" cy="438912"/>
           </a:xfrm>
           <a:prstGeom prst="rect">
             <a:avLst/>
@@ -5157,7 +7687,7 @@
               <a:buNone/>
             </a:pPr>
             <a:r>
-              <a:rPr lang="en-US" sz="1600" b="1" dirty="0">
+              <a:rPr lang="en-US" sz="1500" b="1" dirty="0">
                 <a:solidFill>
                   <a:srgbClr val="0F1B2D"/>
                 </a:solidFill>
@@ -5167,40 +7697,71 @@
               </a:rPr>
               <a:t>04  Regional Power Cluster</a:t>
             </a:r>
-            <a:endParaRPr lang="en-US" sz="1600" dirty="0"/>
-          </a:p>
-        </p:txBody>
-      </p:sp>
-      <p:sp>
-        <p:nvSpPr>
-          <p:cNvPr id="12" name="Shape 10"/>
-          <p:cNvSpPr/>
-          <p:nvPr/>
-        </p:nvSpPr>
-        <p:spPr>
-          <a:xfrm>
-            <a:off x="548640" y="4197096"/>
-            <a:ext cx="73152" cy="310896"/>
-          </a:xfrm>
-          <a:prstGeom prst="rect">
+            <a:endParaRPr lang="en-US" sz="1500" dirty="0"/>
+          </a:p>
+        </p:txBody>
+      </p:sp>
+      <p:sp>
+        <p:nvSpPr>
+          <p:cNvPr id="18" name="Shape 11"/>
+          <p:cNvSpPr/>
+          <p:nvPr/>
+        </p:nvSpPr>
+        <p:spPr>
+          <a:xfrm>
+            <a:off x="548640" y="3931920"/>
+            <a:ext cx="365760" cy="365760"/>
+          </a:xfrm>
+          <a:prstGeom prst="ellipse">
             <a:avLst/>
           </a:prstGeom>
           <a:solidFill>
             <a:srgbClr val="B91C1C"/>
           </a:solidFill>
           <a:ln/>
-        </p:spPr>
-      </p:sp>
-      <p:sp>
-        <p:nvSpPr>
-          <p:cNvPr id="13" name="Text 11"/>
-          <p:cNvSpPr/>
-          <p:nvPr/>
-        </p:nvSpPr>
-        <p:spPr>
-          <a:xfrm>
-            <a:off x="777240" y="4142232"/>
-            <a:ext cx="5166360" cy="457200"/>
+          <a:effectLst>
+            <a:outerShdw sx="100000" sy="100000" kx="0" ky="0" algn="bl" rotWithShape="0" blurRad="88900" dist="25400" dir="5400000">
+              <a:srgbClr val="0F1B2D">
+                <a:alpha val="16000"/>
+              </a:srgbClr>
+            </a:outerShdw>
+          </a:effectLst>
+        </p:spPr>
+      </p:sp>
+      <p:pic>
+        <p:nvPicPr>
+          <p:cNvPr id="19" name="Image 5" descr="preencoded.png">    </p:cNvPr>
+          <p:cNvPicPr>
+            <a:picLocks noChangeAspect="1"/>
+          </p:cNvPicPr>
+          <p:nvPr/>
+        </p:nvPicPr>
+        <p:blipFill>
+          <a:blip r:embed="rId6"/>
+          <a:stretch>
+            <a:fillRect/>
+          </a:stretch>
+        </p:blipFill>
+        <p:spPr>
+          <a:xfrm>
+            <a:off x="643738" y="4027018"/>
+            <a:ext cx="175565" cy="175565"/>
+          </a:xfrm>
+          <a:prstGeom prst="rect">
+            <a:avLst/>
+          </a:prstGeom>
+        </p:spPr>
+      </p:pic>
+      <p:sp>
+        <p:nvSpPr>
+          <p:cNvPr id="20" name="Text 12"/>
+          <p:cNvSpPr/>
+          <p:nvPr/>
+        </p:nvSpPr>
+        <p:spPr>
+          <a:xfrm>
+            <a:off x="1051560" y="3904488"/>
+            <a:ext cx="4892040" cy="438912"/>
           </a:xfrm>
           <a:prstGeom prst="rect">
             <a:avLst/>
@@ -5216,7 +7777,7 @@
               <a:buNone/>
             </a:pPr>
             <a:r>
-              <a:rPr lang="en-US" sz="1600" b="1" dirty="0">
+              <a:rPr lang="en-US" sz="1500" b="1" dirty="0">
                 <a:solidFill>
                   <a:srgbClr val="0F1B2D"/>
                 </a:solidFill>
@@ -5226,40 +7787,71 @@
               </a:rPr>
               <a:t>05 / 06  Water &amp; Natural Gas</a:t>
             </a:r>
-            <a:endParaRPr lang="en-US" sz="1600" dirty="0"/>
-          </a:p>
-        </p:txBody>
-      </p:sp>
-      <p:sp>
-        <p:nvSpPr>
-          <p:cNvPr id="14" name="Shape 12"/>
-          <p:cNvSpPr/>
-          <p:nvPr/>
-        </p:nvSpPr>
-        <p:spPr>
-          <a:xfrm>
-            <a:off x="6400800" y="1929384"/>
-            <a:ext cx="73152" cy="310896"/>
-          </a:xfrm>
-          <a:prstGeom prst="rect">
+            <a:endParaRPr lang="en-US" sz="1500" dirty="0"/>
+          </a:p>
+        </p:txBody>
+      </p:sp>
+      <p:sp>
+        <p:nvSpPr>
+          <p:cNvPr id="21" name="Shape 13"/>
+          <p:cNvSpPr/>
+          <p:nvPr/>
+        </p:nvSpPr>
+        <p:spPr>
+          <a:xfrm>
+            <a:off x="548640" y="4462272"/>
+            <a:ext cx="365760" cy="365760"/>
+          </a:xfrm>
+          <a:prstGeom prst="ellipse">
             <a:avLst/>
           </a:prstGeom>
           <a:solidFill>
             <a:srgbClr val="B91C1C"/>
           </a:solidFill>
           <a:ln/>
-        </p:spPr>
-      </p:sp>
-      <p:sp>
-        <p:nvSpPr>
-          <p:cNvPr id="15" name="Text 13"/>
-          <p:cNvSpPr/>
-          <p:nvPr/>
-        </p:nvSpPr>
-        <p:spPr>
-          <a:xfrm>
-            <a:off x="6629400" y="1874520"/>
-            <a:ext cx="5166360" cy="457200"/>
+          <a:effectLst>
+            <a:outerShdw sx="100000" sy="100000" kx="0" ky="0" algn="bl" rotWithShape="0" blurRad="88900" dist="25400" dir="5400000">
+              <a:srgbClr val="0F1B2D">
+                <a:alpha val="16000"/>
+              </a:srgbClr>
+            </a:outerShdw>
+          </a:effectLst>
+        </p:spPr>
+      </p:sp>
+      <p:pic>
+        <p:nvPicPr>
+          <p:cNvPr id="22" name="Image 6" descr="preencoded.png">    </p:cNvPr>
+          <p:cNvPicPr>
+            <a:picLocks noChangeAspect="1"/>
+          </p:cNvPicPr>
+          <p:nvPr/>
+        </p:nvPicPr>
+        <p:blipFill>
+          <a:blip r:embed="rId7"/>
+          <a:stretch>
+            <a:fillRect/>
+          </a:stretch>
+        </p:blipFill>
+        <p:spPr>
+          <a:xfrm>
+            <a:off x="643738" y="4557370"/>
+            <a:ext cx="175565" cy="175565"/>
+          </a:xfrm>
+          <a:prstGeom prst="rect">
+            <a:avLst/>
+          </a:prstGeom>
+        </p:spPr>
+      </p:pic>
+      <p:sp>
+        <p:nvSpPr>
+          <p:cNvPr id="23" name="Text 14"/>
+          <p:cNvSpPr/>
+          <p:nvPr/>
+        </p:nvSpPr>
+        <p:spPr>
+          <a:xfrm>
+            <a:off x="1051560" y="4434840"/>
+            <a:ext cx="4892040" cy="438912"/>
           </a:xfrm>
           <a:prstGeom prst="rect">
             <a:avLst/>
@@ -5275,7 +7867,7 @@
               <a:buNone/>
             </a:pPr>
             <a:r>
-              <a:rPr lang="en-US" sz="1600" b="1" dirty="0">
+              <a:rPr lang="en-US" sz="1500" b="1" dirty="0">
                 <a:solidFill>
                   <a:srgbClr val="0F1B2D"/>
                 </a:solidFill>
@@ -5285,40 +7877,71 @@
               </a:rPr>
               <a:t>07  Regional Data Center Pipeline</a:t>
             </a:r>
-            <a:endParaRPr lang="en-US" sz="1600" dirty="0"/>
-          </a:p>
-        </p:txBody>
-      </p:sp>
-      <p:sp>
-        <p:nvSpPr>
-          <p:cNvPr id="16" name="Shape 14"/>
-          <p:cNvSpPr/>
-          <p:nvPr/>
-        </p:nvSpPr>
-        <p:spPr>
-          <a:xfrm>
-            <a:off x="6400800" y="2496312"/>
-            <a:ext cx="73152" cy="310896"/>
-          </a:xfrm>
-          <a:prstGeom prst="rect">
+            <a:endParaRPr lang="en-US" sz="1500" dirty="0"/>
+          </a:p>
+        </p:txBody>
+      </p:sp>
+      <p:sp>
+        <p:nvSpPr>
+          <p:cNvPr id="24" name="Shape 15"/>
+          <p:cNvSpPr/>
+          <p:nvPr/>
+        </p:nvSpPr>
+        <p:spPr>
+          <a:xfrm>
+            <a:off x="6400800" y="1810512"/>
+            <a:ext cx="365760" cy="365760"/>
+          </a:xfrm>
+          <a:prstGeom prst="ellipse">
             <a:avLst/>
           </a:prstGeom>
           <a:solidFill>
             <a:srgbClr val="B91C1C"/>
           </a:solidFill>
           <a:ln/>
-        </p:spPr>
-      </p:sp>
-      <p:sp>
-        <p:nvSpPr>
-          <p:cNvPr id="17" name="Text 15"/>
-          <p:cNvSpPr/>
-          <p:nvPr/>
-        </p:nvSpPr>
-        <p:spPr>
-          <a:xfrm>
-            <a:off x="6629400" y="2441448"/>
-            <a:ext cx="5166360" cy="457200"/>
+          <a:effectLst>
+            <a:outerShdw sx="100000" sy="100000" kx="0" ky="0" algn="bl" rotWithShape="0" blurRad="88900" dist="25400" dir="5400000">
+              <a:srgbClr val="0F1B2D">
+                <a:alpha val="16000"/>
+              </a:srgbClr>
+            </a:outerShdw>
+          </a:effectLst>
+        </p:spPr>
+      </p:sp>
+      <p:pic>
+        <p:nvPicPr>
+          <p:cNvPr id="25" name="Image 7" descr="preencoded.png">    </p:cNvPr>
+          <p:cNvPicPr>
+            <a:picLocks noChangeAspect="1"/>
+          </p:cNvPicPr>
+          <p:nvPr/>
+        </p:nvPicPr>
+        <p:blipFill>
+          <a:blip r:embed="rId8"/>
+          <a:stretch>
+            <a:fillRect/>
+          </a:stretch>
+        </p:blipFill>
+        <p:spPr>
+          <a:xfrm>
+            <a:off x="6495898" y="1905610"/>
+            <a:ext cx="175565" cy="175565"/>
+          </a:xfrm>
+          <a:prstGeom prst="rect">
+            <a:avLst/>
+          </a:prstGeom>
+        </p:spPr>
+      </p:pic>
+      <p:sp>
+        <p:nvSpPr>
+          <p:cNvPr id="26" name="Text 16"/>
+          <p:cNvSpPr/>
+          <p:nvPr/>
+        </p:nvSpPr>
+        <p:spPr>
+          <a:xfrm>
+            <a:off x="6903720" y="1783080"/>
+            <a:ext cx="4892040" cy="438912"/>
           </a:xfrm>
           <a:prstGeom prst="rect">
             <a:avLst/>
@@ -5334,7 +7957,187 @@
               <a:buNone/>
             </a:pPr>
             <a:r>
-              <a:rPr lang="en-US" sz="1600" b="1" dirty="0">
+              <a:rPr lang="en-US" sz="1500" b="1" dirty="0">
+                <a:solidFill>
+                  <a:srgbClr val="0F1B2D"/>
+                </a:solidFill>
+                <a:latin typeface="Calibri" pitchFamily="34" charset="0"/>
+                <a:ea typeface="Calibri" pitchFamily="34" charset="-122"/>
+                <a:cs typeface="Calibri" pitchFamily="34" charset="-120"/>
+              </a:rPr>
+              <a:t>Feature  Amazon / GW Ranch</a:t>
+            </a:r>
+            <a:endParaRPr lang="en-US" sz="1500" dirty="0"/>
+          </a:p>
+        </p:txBody>
+      </p:sp>
+      <p:sp>
+        <p:nvSpPr>
+          <p:cNvPr id="27" name="Shape 17"/>
+          <p:cNvSpPr/>
+          <p:nvPr/>
+        </p:nvSpPr>
+        <p:spPr>
+          <a:xfrm>
+            <a:off x="6400800" y="2340864"/>
+            <a:ext cx="365760" cy="365760"/>
+          </a:xfrm>
+          <a:prstGeom prst="ellipse">
+            <a:avLst/>
+          </a:prstGeom>
+          <a:solidFill>
+            <a:srgbClr val="B91C1C"/>
+          </a:solidFill>
+          <a:ln/>
+          <a:effectLst>
+            <a:outerShdw sx="100000" sy="100000" kx="0" ky="0" algn="bl" rotWithShape="0" blurRad="88900" dist="25400" dir="5400000">
+              <a:srgbClr val="0F1B2D">
+                <a:alpha val="16000"/>
+              </a:srgbClr>
+            </a:outerShdw>
+          </a:effectLst>
+        </p:spPr>
+      </p:sp>
+      <p:pic>
+        <p:nvPicPr>
+          <p:cNvPr id="28" name="Image 8" descr="preencoded.png">    </p:cNvPr>
+          <p:cNvPicPr>
+            <a:picLocks noChangeAspect="1"/>
+          </p:cNvPicPr>
+          <p:nvPr/>
+        </p:nvPicPr>
+        <p:blipFill>
+          <a:blip r:embed="rId9"/>
+          <a:stretch>
+            <a:fillRect/>
+          </a:stretch>
+        </p:blipFill>
+        <p:spPr>
+          <a:xfrm>
+            <a:off x="6495898" y="2435962"/>
+            <a:ext cx="175565" cy="175565"/>
+          </a:xfrm>
+          <a:prstGeom prst="rect">
+            <a:avLst/>
+          </a:prstGeom>
+        </p:spPr>
+      </p:pic>
+      <p:sp>
+        <p:nvSpPr>
+          <p:cNvPr id="29" name="Text 18"/>
+          <p:cNvSpPr/>
+          <p:nvPr/>
+        </p:nvSpPr>
+        <p:spPr>
+          <a:xfrm>
+            <a:off x="6903720" y="2313432"/>
+            <a:ext cx="4892040" cy="438912"/>
+          </a:xfrm>
+          <a:prstGeom prst="rect">
+            <a:avLst/>
+          </a:prstGeom>
+          <a:noFill/>
+          <a:ln/>
+        </p:spPr>
+        <p:txBody>
+          <a:bodyPr wrap="square" rtlCol="0" anchor="ctr"/>
+          <a:lstStyle/>
+          <a:p>
+            <a:pPr indent="0" marL="0">
+              <a:buNone/>
+            </a:pPr>
+            <a:r>
+              <a:rPr lang="en-US" sz="1500" b="1" dirty="0">
+                <a:solidFill>
+                  <a:srgbClr val="0F1B2D"/>
+                </a:solidFill>
+                <a:latin typeface="Calibri" pitchFamily="34" charset="0"/>
+                <a:ea typeface="Calibri" pitchFamily="34" charset="-122"/>
+                <a:cs typeface="Calibri" pitchFamily="34" charset="-120"/>
+              </a:rPr>
+              <a:t>Feature  Longfellow / Project Horizon</a:t>
+            </a:r>
+            <a:endParaRPr lang="en-US" sz="1500" dirty="0"/>
+          </a:p>
+        </p:txBody>
+      </p:sp>
+      <p:sp>
+        <p:nvSpPr>
+          <p:cNvPr id="30" name="Shape 19"/>
+          <p:cNvSpPr/>
+          <p:nvPr/>
+        </p:nvSpPr>
+        <p:spPr>
+          <a:xfrm>
+            <a:off x="6400800" y="2871216"/>
+            <a:ext cx="365760" cy="365760"/>
+          </a:xfrm>
+          <a:prstGeom prst="ellipse">
+            <a:avLst/>
+          </a:prstGeom>
+          <a:solidFill>
+            <a:srgbClr val="B91C1C"/>
+          </a:solidFill>
+          <a:ln/>
+          <a:effectLst>
+            <a:outerShdw sx="100000" sy="100000" kx="0" ky="0" algn="bl" rotWithShape="0" blurRad="88900" dist="25400" dir="5400000">
+              <a:srgbClr val="0F1B2D">
+                <a:alpha val="16000"/>
+              </a:srgbClr>
+            </a:outerShdw>
+          </a:effectLst>
+        </p:spPr>
+      </p:sp>
+      <p:pic>
+        <p:nvPicPr>
+          <p:cNvPr id="31" name="Image 9" descr="preencoded.png">    </p:cNvPr>
+          <p:cNvPicPr>
+            <a:picLocks noChangeAspect="1"/>
+          </p:cNvPicPr>
+          <p:nvPr/>
+        </p:nvPicPr>
+        <p:blipFill>
+          <a:blip r:embed="rId10"/>
+          <a:stretch>
+            <a:fillRect/>
+          </a:stretch>
+        </p:blipFill>
+        <p:spPr>
+          <a:xfrm>
+            <a:off x="6495898" y="2966314"/>
+            <a:ext cx="175565" cy="175565"/>
+          </a:xfrm>
+          <a:prstGeom prst="rect">
+            <a:avLst/>
+          </a:prstGeom>
+        </p:spPr>
+      </p:pic>
+      <p:sp>
+        <p:nvSpPr>
+          <p:cNvPr id="32" name="Text 20"/>
+          <p:cNvSpPr/>
+          <p:nvPr/>
+        </p:nvSpPr>
+        <p:spPr>
+          <a:xfrm>
+            <a:off x="6903720" y="2843784"/>
+            <a:ext cx="4892040" cy="438912"/>
+          </a:xfrm>
+          <a:prstGeom prst="rect">
+            <a:avLst/>
+          </a:prstGeom>
+          <a:noFill/>
+          <a:ln/>
+        </p:spPr>
+        <p:txBody>
+          <a:bodyPr wrap="square" rtlCol="0" anchor="ctr"/>
+          <a:lstStyle/>
+          <a:p>
+            <a:pPr indent="0" marL="0">
+              <a:buNone/>
+            </a:pPr>
+            <a:r>
+              <a:rPr lang="en-US" sz="1500" b="1" dirty="0">
                 <a:solidFill>
                   <a:srgbClr val="0F1B2D"/>
                 </a:solidFill>
@@ -5344,40 +8147,71 @@
               </a:rPr>
               <a:t>08  The Diligence Platform</a:t>
             </a:r>
-            <a:endParaRPr lang="en-US" sz="1600" dirty="0"/>
-          </a:p>
-        </p:txBody>
-      </p:sp>
-      <p:sp>
-        <p:nvSpPr>
-          <p:cNvPr id="18" name="Shape 16"/>
-          <p:cNvSpPr/>
-          <p:nvPr/>
-        </p:nvSpPr>
-        <p:spPr>
-          <a:xfrm>
-            <a:off x="6400800" y="3063240"/>
-            <a:ext cx="73152" cy="310896"/>
-          </a:xfrm>
-          <a:prstGeom prst="rect">
+            <a:endParaRPr lang="en-US" sz="1500" dirty="0"/>
+          </a:p>
+        </p:txBody>
+      </p:sp>
+      <p:sp>
+        <p:nvSpPr>
+          <p:cNvPr id="33" name="Shape 21"/>
+          <p:cNvSpPr/>
+          <p:nvPr/>
+        </p:nvSpPr>
+        <p:spPr>
+          <a:xfrm>
+            <a:off x="6400800" y="3401568"/>
+            <a:ext cx="365760" cy="365760"/>
+          </a:xfrm>
+          <a:prstGeom prst="ellipse">
             <a:avLst/>
           </a:prstGeom>
           <a:solidFill>
             <a:srgbClr val="B91C1C"/>
           </a:solidFill>
           <a:ln/>
-        </p:spPr>
-      </p:sp>
-      <p:sp>
-        <p:nvSpPr>
-          <p:cNvPr id="19" name="Text 17"/>
-          <p:cNvSpPr/>
-          <p:nvPr/>
-        </p:nvSpPr>
-        <p:spPr>
-          <a:xfrm>
-            <a:off x="6629400" y="3008376"/>
-            <a:ext cx="5166360" cy="457200"/>
+          <a:effectLst>
+            <a:outerShdw sx="100000" sy="100000" kx="0" ky="0" algn="bl" rotWithShape="0" blurRad="88900" dist="25400" dir="5400000">
+              <a:srgbClr val="0F1B2D">
+                <a:alpha val="16000"/>
+              </a:srgbClr>
+            </a:outerShdw>
+          </a:effectLst>
+        </p:spPr>
+      </p:sp>
+      <p:pic>
+        <p:nvPicPr>
+          <p:cNvPr id="34" name="Image 10" descr="preencoded.png">    </p:cNvPr>
+          <p:cNvPicPr>
+            <a:picLocks noChangeAspect="1"/>
+          </p:cNvPicPr>
+          <p:nvPr/>
+        </p:nvPicPr>
+        <p:blipFill>
+          <a:blip r:embed="rId11"/>
+          <a:stretch>
+            <a:fillRect/>
+          </a:stretch>
+        </p:blipFill>
+        <p:spPr>
+          <a:xfrm>
+            <a:off x="6495898" y="3496666"/>
+            <a:ext cx="175565" cy="175565"/>
+          </a:xfrm>
+          <a:prstGeom prst="rect">
+            <a:avLst/>
+          </a:prstGeom>
+        </p:spPr>
+      </p:pic>
+      <p:sp>
+        <p:nvSpPr>
+          <p:cNvPr id="35" name="Text 22"/>
+          <p:cNvSpPr/>
+          <p:nvPr/>
+        </p:nvSpPr>
+        <p:spPr>
+          <a:xfrm>
+            <a:off x="6903720" y="3374136"/>
+            <a:ext cx="4892040" cy="438912"/>
           </a:xfrm>
           <a:prstGeom prst="rect">
             <a:avLst/>
@@ -5393,7 +8227,7 @@
               <a:buNone/>
             </a:pPr>
             <a:r>
-              <a:rPr lang="en-US" sz="1600" b="1" dirty="0">
+              <a:rPr lang="en-US" sz="1500" b="1" dirty="0">
                 <a:solidFill>
                   <a:srgbClr val="0F1B2D"/>
                 </a:solidFill>
@@ -5403,40 +8237,71 @@
               </a:rPr>
               <a:t>09  Subsurface &amp; Drilling Activity</a:t>
             </a:r>
-            <a:endParaRPr lang="en-US" sz="1600" dirty="0"/>
-          </a:p>
-        </p:txBody>
-      </p:sp>
-      <p:sp>
-        <p:nvSpPr>
-          <p:cNvPr id="20" name="Shape 18"/>
-          <p:cNvSpPr/>
-          <p:nvPr/>
-        </p:nvSpPr>
-        <p:spPr>
-          <a:xfrm>
-            <a:off x="6400800" y="3630168"/>
-            <a:ext cx="73152" cy="310896"/>
-          </a:xfrm>
-          <a:prstGeom prst="rect">
+            <a:endParaRPr lang="en-US" sz="1500" dirty="0"/>
+          </a:p>
+        </p:txBody>
+      </p:sp>
+      <p:sp>
+        <p:nvSpPr>
+          <p:cNvPr id="36" name="Shape 23"/>
+          <p:cNvSpPr/>
+          <p:nvPr/>
+        </p:nvSpPr>
+        <p:spPr>
+          <a:xfrm>
+            <a:off x="6400800" y="3931920"/>
+            <a:ext cx="365760" cy="365760"/>
+          </a:xfrm>
+          <a:prstGeom prst="ellipse">
             <a:avLst/>
           </a:prstGeom>
           <a:solidFill>
             <a:srgbClr val="B91C1C"/>
           </a:solidFill>
           <a:ln/>
-        </p:spPr>
-      </p:sp>
-      <p:sp>
-        <p:nvSpPr>
-          <p:cNvPr id="21" name="Text 19"/>
-          <p:cNvSpPr/>
-          <p:nvPr/>
-        </p:nvSpPr>
-        <p:spPr>
-          <a:xfrm>
-            <a:off x="6629400" y="3575304"/>
-            <a:ext cx="5166360" cy="457200"/>
+          <a:effectLst>
+            <a:outerShdw sx="100000" sy="100000" kx="0" ky="0" algn="bl" rotWithShape="0" blurRad="88900" dist="25400" dir="5400000">
+              <a:srgbClr val="0F1B2D">
+                <a:alpha val="16000"/>
+              </a:srgbClr>
+            </a:outerShdw>
+          </a:effectLst>
+        </p:spPr>
+      </p:sp>
+      <p:pic>
+        <p:nvPicPr>
+          <p:cNvPr id="37" name="Image 11" descr="preencoded.png">    </p:cNvPr>
+          <p:cNvPicPr>
+            <a:picLocks noChangeAspect="1"/>
+          </p:cNvPicPr>
+          <p:nvPr/>
+        </p:nvPicPr>
+        <p:blipFill>
+          <a:blip r:embed="rId12"/>
+          <a:stretch>
+            <a:fillRect/>
+          </a:stretch>
+        </p:blipFill>
+        <p:spPr>
+          <a:xfrm>
+            <a:off x="6495898" y="4027018"/>
+            <a:ext cx="175565" cy="175565"/>
+          </a:xfrm>
+          <a:prstGeom prst="rect">
+            <a:avLst/>
+          </a:prstGeom>
+        </p:spPr>
+      </p:pic>
+      <p:sp>
+        <p:nvSpPr>
+          <p:cNvPr id="38" name="Text 24"/>
+          <p:cNvSpPr/>
+          <p:nvPr/>
+        </p:nvSpPr>
+        <p:spPr>
+          <a:xfrm>
+            <a:off x="6903720" y="3904488"/>
+            <a:ext cx="4892040" cy="438912"/>
           </a:xfrm>
           <a:prstGeom prst="rect">
             <a:avLst/>
@@ -5452,7 +8317,7 @@
               <a:buNone/>
             </a:pPr>
             <a:r>
-              <a:rPr lang="en-US" sz="1600" b="1" dirty="0">
+              <a:rPr lang="en-US" sz="1500" b="1" dirty="0">
                 <a:solidFill>
                   <a:srgbClr val="0F1B2D"/>
                 </a:solidFill>
@@ -5462,13 +8327,13 @@
               </a:rPr>
               <a:t>Appendix  Access, Sources &amp; Notices</a:t>
             </a:r>
-            <a:endParaRPr lang="en-US" sz="1600" dirty="0"/>
-          </a:p>
-        </p:txBody>
-      </p:sp>
-      <p:sp>
-        <p:nvSpPr>
-          <p:cNvPr id="22" name="Text 20"/>
+            <a:endParaRPr lang="en-US" sz="1500" dirty="0"/>
+          </a:p>
+        </p:txBody>
+      </p:sp>
+      <p:sp>
+        <p:nvSpPr>
+          <p:cNvPr id="39" name="Text 25"/>
           <p:cNvSpPr/>
           <p:nvPr/>
         </p:nvSpPr>
@@ -5507,7 +8372,7 @@
       </p:sp>
       <p:sp>
         <p:nvSpPr>
-          <p:cNvPr id="23" name="Text 21"/>
+          <p:cNvPr id="40" name="Text 26"/>
           <p:cNvSpPr/>
           <p:nvPr/>
         </p:nvSpPr>
@@ -5546,7 +8411,7 @@
       </p:sp>
       <p:sp>
         <p:nvSpPr>
-          <p:cNvPr id="24" name="Text 22"/>
+          <p:cNvPr id="41" name="Text 27"/>
           <p:cNvSpPr/>
           <p:nvPr/>
         </p:nvSpPr>
@@ -5617,14 +8482,65 @@
       </p:grpSpPr>
       <p:sp>
         <p:nvSpPr>
-          <p:cNvPr id="2" name="Text 0"/>
-          <p:cNvSpPr/>
-          <p:nvPr/>
-        </p:nvSpPr>
-        <p:spPr>
-          <a:xfrm>
-            <a:off x="548640" y="384048"/>
-            <a:ext cx="9144000" cy="320040"/>
+          <p:cNvPr id="2" name="Shape 0"/>
+          <p:cNvSpPr/>
+          <p:nvPr/>
+        </p:nvSpPr>
+        <p:spPr>
+          <a:xfrm>
+            <a:off x="548640" y="310896"/>
+            <a:ext cx="402336" cy="402336"/>
+          </a:xfrm>
+          <a:prstGeom prst="ellipse">
+            <a:avLst/>
+          </a:prstGeom>
+          <a:solidFill>
+            <a:srgbClr val="B91C1C"/>
+          </a:solidFill>
+          <a:ln/>
+          <a:effectLst>
+            <a:outerShdw sx="100000" sy="100000" kx="0" ky="0" algn="bl" rotWithShape="0" blurRad="88900" dist="25400" dir="5400000">
+              <a:srgbClr val="0F1B2D">
+                <a:alpha val="16000"/>
+              </a:srgbClr>
+            </a:outerShdw>
+          </a:effectLst>
+        </p:spPr>
+      </p:sp>
+      <p:pic>
+        <p:nvPicPr>
+          <p:cNvPr id="3" name="Image 0" descr="preencoded.png">    </p:cNvPr>
+          <p:cNvPicPr>
+            <a:picLocks noChangeAspect="1"/>
+          </p:cNvPicPr>
+          <p:nvPr/>
+        </p:nvPicPr>
+        <p:blipFill>
+          <a:blip r:embed="rId1"/>
+          <a:stretch>
+            <a:fillRect/>
+          </a:stretch>
+        </p:blipFill>
+        <p:spPr>
+          <a:xfrm>
+            <a:off x="653247" y="415503"/>
+            <a:ext cx="193121" cy="193121"/>
+          </a:xfrm>
+          <a:prstGeom prst="rect">
+            <a:avLst/>
+          </a:prstGeom>
+        </p:spPr>
+      </p:pic>
+      <p:sp>
+        <p:nvSpPr>
+          <p:cNvPr id="4" name="Text 1"/>
+          <p:cNvSpPr/>
+          <p:nvPr/>
+        </p:nvSpPr>
+        <p:spPr>
+          <a:xfrm>
+            <a:off x="1097280" y="365760"/>
+            <a:ext cx="9144000" cy="365760"/>
           </a:xfrm>
           <a:prstGeom prst="rect">
             <a:avLst/>
@@ -5656,14 +8572,14 @@
       </p:sp>
       <p:sp>
         <p:nvSpPr>
-          <p:cNvPr id="3" name="Text 1"/>
-          <p:cNvSpPr/>
-          <p:nvPr/>
-        </p:nvSpPr>
-        <p:spPr>
-          <a:xfrm>
-            <a:off x="548640" y="713232"/>
-            <a:ext cx="11064240" cy="914400"/>
+          <p:cNvPr id="5" name="Text 2"/>
+          <p:cNvSpPr/>
+          <p:nvPr/>
+        </p:nvSpPr>
+        <p:spPr>
+          <a:xfrm>
+            <a:off x="548640" y="841248"/>
+            <a:ext cx="11064240" cy="822960"/>
           </a:xfrm>
           <a:prstGeom prst="rect">
             <a:avLst/>
@@ -5679,7 +8595,7 @@
               <a:buNone/>
             </a:pPr>
             <a:r>
-              <a:rPr lang="en-US" sz="2600" b="1" dirty="0">
+              <a:rPr lang="en-US" sz="2500" b="1" dirty="0">
                 <a:solidFill>
                   <a:srgbClr val="0F1B2D"/>
                 </a:solidFill>
@@ -5689,20 +8605,20 @@
               </a:rPr>
               <a:t>Transmission, water, gas, and proven hyperscale demand</a:t>
             </a:r>
-            <a:endParaRPr lang="en-US" sz="2600" dirty="0"/>
-          </a:p>
-        </p:txBody>
-      </p:sp>
-      <p:sp>
-        <p:nvSpPr>
-          <p:cNvPr id="4" name="Shape 2"/>
-          <p:cNvSpPr/>
-          <p:nvPr/>
-        </p:nvSpPr>
-        <p:spPr>
-          <a:xfrm>
-            <a:off x="548640" y="1856232"/>
-            <a:ext cx="384048" cy="384048"/>
+            <a:endParaRPr lang="en-US" sz="2500" dirty="0"/>
+          </a:p>
+        </p:txBody>
+      </p:sp>
+      <p:sp>
+        <p:nvSpPr>
+          <p:cNvPr id="6" name="Shape 3"/>
+          <p:cNvSpPr/>
+          <p:nvPr/>
+        </p:nvSpPr>
+        <p:spPr>
+          <a:xfrm>
+            <a:off x="548640" y="1911096"/>
+            <a:ext cx="475488" cy="475488"/>
           </a:xfrm>
           <a:prstGeom prst="ellipse">
             <a:avLst/>
@@ -5711,56 +8627,48 @@
             <a:srgbClr val="B91C1C"/>
           </a:solidFill>
           <a:ln/>
-        </p:spPr>
-      </p:sp>
-      <p:sp>
-        <p:nvSpPr>
-          <p:cNvPr id="5" name="Text 3"/>
-          <p:cNvSpPr/>
-          <p:nvPr/>
-        </p:nvSpPr>
-        <p:spPr>
-          <a:xfrm>
-            <a:off x="548640" y="1856232"/>
-            <a:ext cx="384048" cy="384048"/>
-          </a:xfrm>
-          <a:prstGeom prst="rect">
-            <a:avLst/>
-          </a:prstGeom>
-          <a:noFill/>
-          <a:ln/>
-        </p:spPr>
-        <p:txBody>
-          <a:bodyPr wrap="square" rtlCol="0" anchor="ctr"/>
-          <a:lstStyle/>
-          <a:p>
-            <a:pPr algn="ctr" indent="0" marL="0">
-              <a:buNone/>
-            </a:pPr>
-            <a:r>
-              <a:rPr lang="en-US" sz="1600" b="1" dirty="0">
-                <a:solidFill>
-                  <a:srgbClr val="FFFFFF"/>
-                </a:solidFill>
-                <a:latin typeface="Calibri" pitchFamily="34" charset="0"/>
-                <a:ea typeface="Calibri" pitchFamily="34" charset="-122"/>
-                <a:cs typeface="Calibri" pitchFamily="34" charset="-120"/>
-              </a:rPr>
-              <a:t>1</a:t>
-            </a:r>
-            <a:endParaRPr lang="en-US" sz="1600" dirty="0"/>
-          </a:p>
-        </p:txBody>
-      </p:sp>
-      <p:sp>
-        <p:nvSpPr>
-          <p:cNvPr id="6" name="Text 4"/>
-          <p:cNvSpPr/>
-          <p:nvPr/>
-        </p:nvSpPr>
-        <p:spPr>
-          <a:xfrm>
-            <a:off x="1097280" y="1783080"/>
+          <a:effectLst>
+            <a:outerShdw sx="100000" sy="100000" kx="0" ky="0" algn="bl" rotWithShape="0" blurRad="88900" dist="25400" dir="5400000">
+              <a:srgbClr val="0F1B2D">
+                <a:alpha val="16000"/>
+              </a:srgbClr>
+            </a:outerShdw>
+          </a:effectLst>
+        </p:spPr>
+      </p:sp>
+      <p:pic>
+        <p:nvPicPr>
+          <p:cNvPr id="7" name="Image 1" descr="preencoded.png">    </p:cNvPr>
+          <p:cNvPicPr>
+            <a:picLocks noChangeAspect="1"/>
+          </p:cNvPicPr>
+          <p:nvPr/>
+        </p:nvPicPr>
+        <p:blipFill>
+          <a:blip r:embed="rId2"/>
+          <a:stretch>
+            <a:fillRect/>
+          </a:stretch>
+        </p:blipFill>
+        <p:spPr>
+          <a:xfrm>
+            <a:off x="672267" y="2034723"/>
+            <a:ext cx="228234" cy="228234"/>
+          </a:xfrm>
+          <a:prstGeom prst="rect">
+            <a:avLst/>
+          </a:prstGeom>
+        </p:spPr>
+      </p:pic>
+      <p:sp>
+        <p:nvSpPr>
+          <p:cNvPr id="8" name="Text 4"/>
+          <p:cNvSpPr/>
+          <p:nvPr/>
+        </p:nvSpPr>
+        <p:spPr>
+          <a:xfrm>
+            <a:off x="1234440" y="1783080"/>
             <a:ext cx="3200400" cy="749808"/>
           </a:xfrm>
           <a:prstGeom prst="rect">
@@ -5793,14 +8701,14 @@
       </p:sp>
       <p:sp>
         <p:nvSpPr>
-          <p:cNvPr id="7" name="Text 5"/>
-          <p:cNvSpPr/>
-          <p:nvPr/>
-        </p:nvSpPr>
-        <p:spPr>
-          <a:xfrm>
-            <a:off x="4434840" y="1783080"/>
-            <a:ext cx="7178040" cy="749808"/>
+          <p:cNvPr id="9" name="Text 5"/>
+          <p:cNvSpPr/>
+          <p:nvPr/>
+        </p:nvSpPr>
+        <p:spPr>
+          <a:xfrm>
+            <a:off x="4526280" y="1783080"/>
+            <a:ext cx="7086600" cy="749808"/>
           </a:xfrm>
           <a:prstGeom prst="rect">
             <a:avLst/>
@@ -5832,14 +8740,14 @@
       </p:sp>
       <p:sp>
         <p:nvSpPr>
-          <p:cNvPr id="8" name="Shape 6"/>
-          <p:cNvSpPr/>
-          <p:nvPr/>
-        </p:nvSpPr>
-        <p:spPr>
-          <a:xfrm>
-            <a:off x="548640" y="2697480"/>
-            <a:ext cx="384048" cy="384048"/>
+          <p:cNvPr id="10" name="Shape 6"/>
+          <p:cNvSpPr/>
+          <p:nvPr/>
+        </p:nvSpPr>
+        <p:spPr>
+          <a:xfrm>
+            <a:off x="548640" y="2752344"/>
+            <a:ext cx="475488" cy="475488"/>
           </a:xfrm>
           <a:prstGeom prst="ellipse">
             <a:avLst/>
@@ -5848,56 +8756,48 @@
             <a:srgbClr val="B91C1C"/>
           </a:solidFill>
           <a:ln/>
-        </p:spPr>
-      </p:sp>
-      <p:sp>
-        <p:nvSpPr>
-          <p:cNvPr id="9" name="Text 7"/>
-          <p:cNvSpPr/>
-          <p:nvPr/>
-        </p:nvSpPr>
-        <p:spPr>
-          <a:xfrm>
-            <a:off x="548640" y="2697480"/>
-            <a:ext cx="384048" cy="384048"/>
-          </a:xfrm>
-          <a:prstGeom prst="rect">
-            <a:avLst/>
-          </a:prstGeom>
-          <a:noFill/>
-          <a:ln/>
-        </p:spPr>
-        <p:txBody>
-          <a:bodyPr wrap="square" rtlCol="0" anchor="ctr"/>
-          <a:lstStyle/>
-          <a:p>
-            <a:pPr algn="ctr" indent="0" marL="0">
-              <a:buNone/>
-            </a:pPr>
-            <a:r>
-              <a:rPr lang="en-US" sz="1600" b="1" dirty="0">
-                <a:solidFill>
-                  <a:srgbClr val="FFFFFF"/>
-                </a:solidFill>
-                <a:latin typeface="Calibri" pitchFamily="34" charset="0"/>
-                <a:ea typeface="Calibri" pitchFamily="34" charset="-122"/>
-                <a:cs typeface="Calibri" pitchFamily="34" charset="-120"/>
-              </a:rPr>
-              <a:t>2</a:t>
-            </a:r>
-            <a:endParaRPr lang="en-US" sz="1600" dirty="0"/>
-          </a:p>
-        </p:txBody>
-      </p:sp>
-      <p:sp>
-        <p:nvSpPr>
-          <p:cNvPr id="10" name="Text 8"/>
-          <p:cNvSpPr/>
-          <p:nvPr/>
-        </p:nvSpPr>
-        <p:spPr>
-          <a:xfrm>
-            <a:off x="1097280" y="2624328"/>
+          <a:effectLst>
+            <a:outerShdw sx="100000" sy="100000" kx="0" ky="0" algn="bl" rotWithShape="0" blurRad="88900" dist="25400" dir="5400000">
+              <a:srgbClr val="0F1B2D">
+                <a:alpha val="16000"/>
+              </a:srgbClr>
+            </a:outerShdw>
+          </a:effectLst>
+        </p:spPr>
+      </p:sp>
+      <p:pic>
+        <p:nvPicPr>
+          <p:cNvPr id="11" name="Image 2" descr="preencoded.png">    </p:cNvPr>
+          <p:cNvPicPr>
+            <a:picLocks noChangeAspect="1"/>
+          </p:cNvPicPr>
+          <p:nvPr/>
+        </p:nvPicPr>
+        <p:blipFill>
+          <a:blip r:embed="rId3"/>
+          <a:stretch>
+            <a:fillRect/>
+          </a:stretch>
+        </p:blipFill>
+        <p:spPr>
+          <a:xfrm>
+            <a:off x="672267" y="2875971"/>
+            <a:ext cx="228234" cy="228234"/>
+          </a:xfrm>
+          <a:prstGeom prst="rect">
+            <a:avLst/>
+          </a:prstGeom>
+        </p:spPr>
+      </p:pic>
+      <p:sp>
+        <p:nvSpPr>
+          <p:cNvPr id="12" name="Text 7"/>
+          <p:cNvSpPr/>
+          <p:nvPr/>
+        </p:nvSpPr>
+        <p:spPr>
+          <a:xfrm>
+            <a:off x="1234440" y="2624328"/>
             <a:ext cx="3200400" cy="749808"/>
           </a:xfrm>
           <a:prstGeom prst="rect">
@@ -5930,14 +8830,14 @@
       </p:sp>
       <p:sp>
         <p:nvSpPr>
-          <p:cNvPr id="11" name="Text 9"/>
-          <p:cNvSpPr/>
-          <p:nvPr/>
-        </p:nvSpPr>
-        <p:spPr>
-          <a:xfrm>
-            <a:off x="4434840" y="2624328"/>
-            <a:ext cx="7178040" cy="749808"/>
+          <p:cNvPr id="13" name="Text 8"/>
+          <p:cNvSpPr/>
+          <p:nvPr/>
+        </p:nvSpPr>
+        <p:spPr>
+          <a:xfrm>
+            <a:off x="4526280" y="2624328"/>
+            <a:ext cx="7086600" cy="749808"/>
           </a:xfrm>
           <a:prstGeom prst="rect">
             <a:avLst/>
@@ -5969,14 +8869,14 @@
       </p:sp>
       <p:sp>
         <p:nvSpPr>
-          <p:cNvPr id="12" name="Shape 10"/>
-          <p:cNvSpPr/>
-          <p:nvPr/>
-        </p:nvSpPr>
-        <p:spPr>
-          <a:xfrm>
-            <a:off x="548640" y="3538728"/>
-            <a:ext cx="384048" cy="384048"/>
+          <p:cNvPr id="14" name="Shape 9"/>
+          <p:cNvSpPr/>
+          <p:nvPr/>
+        </p:nvSpPr>
+        <p:spPr>
+          <a:xfrm>
+            <a:off x="548640" y="3593592"/>
+            <a:ext cx="475488" cy="475488"/>
           </a:xfrm>
           <a:prstGeom prst="ellipse">
             <a:avLst/>
@@ -5985,56 +8885,48 @@
             <a:srgbClr val="B91C1C"/>
           </a:solidFill>
           <a:ln/>
-        </p:spPr>
-      </p:sp>
-      <p:sp>
-        <p:nvSpPr>
-          <p:cNvPr id="13" name="Text 11"/>
-          <p:cNvSpPr/>
-          <p:nvPr/>
-        </p:nvSpPr>
-        <p:spPr>
-          <a:xfrm>
-            <a:off x="548640" y="3538728"/>
-            <a:ext cx="384048" cy="384048"/>
-          </a:xfrm>
-          <a:prstGeom prst="rect">
-            <a:avLst/>
-          </a:prstGeom>
-          <a:noFill/>
-          <a:ln/>
-        </p:spPr>
-        <p:txBody>
-          <a:bodyPr wrap="square" rtlCol="0" anchor="ctr"/>
-          <a:lstStyle/>
-          <a:p>
-            <a:pPr algn="ctr" indent="0" marL="0">
-              <a:buNone/>
-            </a:pPr>
-            <a:r>
-              <a:rPr lang="en-US" sz="1600" b="1" dirty="0">
-                <a:solidFill>
-                  <a:srgbClr val="FFFFFF"/>
-                </a:solidFill>
-                <a:latin typeface="Calibri" pitchFamily="34" charset="0"/>
-                <a:ea typeface="Calibri" pitchFamily="34" charset="-122"/>
-                <a:cs typeface="Calibri" pitchFamily="34" charset="-120"/>
-              </a:rPr>
-              <a:t>3</a:t>
-            </a:r>
-            <a:endParaRPr lang="en-US" sz="1600" dirty="0"/>
-          </a:p>
-        </p:txBody>
-      </p:sp>
-      <p:sp>
-        <p:nvSpPr>
-          <p:cNvPr id="14" name="Text 12"/>
-          <p:cNvSpPr/>
-          <p:nvPr/>
-        </p:nvSpPr>
-        <p:spPr>
-          <a:xfrm>
-            <a:off x="1097280" y="3465576"/>
+          <a:effectLst>
+            <a:outerShdw sx="100000" sy="100000" kx="0" ky="0" algn="bl" rotWithShape="0" blurRad="88900" dist="25400" dir="5400000">
+              <a:srgbClr val="0F1B2D">
+                <a:alpha val="16000"/>
+              </a:srgbClr>
+            </a:outerShdw>
+          </a:effectLst>
+        </p:spPr>
+      </p:sp>
+      <p:pic>
+        <p:nvPicPr>
+          <p:cNvPr id="15" name="Image 3" descr="preencoded.png">    </p:cNvPr>
+          <p:cNvPicPr>
+            <a:picLocks noChangeAspect="1"/>
+          </p:cNvPicPr>
+          <p:nvPr/>
+        </p:nvPicPr>
+        <p:blipFill>
+          <a:blip r:embed="rId4"/>
+          <a:stretch>
+            <a:fillRect/>
+          </a:stretch>
+        </p:blipFill>
+        <p:spPr>
+          <a:xfrm>
+            <a:off x="672267" y="3717219"/>
+            <a:ext cx="228234" cy="228234"/>
+          </a:xfrm>
+          <a:prstGeom prst="rect">
+            <a:avLst/>
+          </a:prstGeom>
+        </p:spPr>
+      </p:pic>
+      <p:sp>
+        <p:nvSpPr>
+          <p:cNvPr id="16" name="Text 10"/>
+          <p:cNvSpPr/>
+          <p:nvPr/>
+        </p:nvSpPr>
+        <p:spPr>
+          <a:xfrm>
+            <a:off x="1234440" y="3465576"/>
             <a:ext cx="3200400" cy="749808"/>
           </a:xfrm>
           <a:prstGeom prst="rect">
@@ -6067,14 +8959,14 @@
       </p:sp>
       <p:sp>
         <p:nvSpPr>
-          <p:cNvPr id="15" name="Text 13"/>
-          <p:cNvSpPr/>
-          <p:nvPr/>
-        </p:nvSpPr>
-        <p:spPr>
-          <a:xfrm>
-            <a:off x="4434840" y="3465576"/>
-            <a:ext cx="7178040" cy="749808"/>
+          <p:cNvPr id="17" name="Text 11"/>
+          <p:cNvSpPr/>
+          <p:nvPr/>
+        </p:nvSpPr>
+        <p:spPr>
+          <a:xfrm>
+            <a:off x="4526280" y="3465576"/>
+            <a:ext cx="7086600" cy="749808"/>
           </a:xfrm>
           <a:prstGeom prst="rect">
             <a:avLst/>
@@ -6106,14 +8998,14 @@
       </p:sp>
       <p:sp>
         <p:nvSpPr>
-          <p:cNvPr id="16" name="Shape 14"/>
-          <p:cNvSpPr/>
-          <p:nvPr/>
-        </p:nvSpPr>
-        <p:spPr>
-          <a:xfrm>
-            <a:off x="548640" y="4379976"/>
-            <a:ext cx="384048" cy="384048"/>
+          <p:cNvPr id="18" name="Shape 12"/>
+          <p:cNvSpPr/>
+          <p:nvPr/>
+        </p:nvSpPr>
+        <p:spPr>
+          <a:xfrm>
+            <a:off x="548640" y="4434840"/>
+            <a:ext cx="475488" cy="475488"/>
           </a:xfrm>
           <a:prstGeom prst="ellipse">
             <a:avLst/>
@@ -6122,56 +9014,48 @@
             <a:srgbClr val="B91C1C"/>
           </a:solidFill>
           <a:ln/>
-        </p:spPr>
-      </p:sp>
-      <p:sp>
-        <p:nvSpPr>
-          <p:cNvPr id="17" name="Text 15"/>
-          <p:cNvSpPr/>
-          <p:nvPr/>
-        </p:nvSpPr>
-        <p:spPr>
-          <a:xfrm>
-            <a:off x="548640" y="4379976"/>
-            <a:ext cx="384048" cy="384048"/>
-          </a:xfrm>
-          <a:prstGeom prst="rect">
-            <a:avLst/>
-          </a:prstGeom>
-          <a:noFill/>
-          <a:ln/>
-        </p:spPr>
-        <p:txBody>
-          <a:bodyPr wrap="square" rtlCol="0" anchor="ctr"/>
-          <a:lstStyle/>
-          <a:p>
-            <a:pPr algn="ctr" indent="0" marL="0">
-              <a:buNone/>
-            </a:pPr>
-            <a:r>
-              <a:rPr lang="en-US" sz="1600" b="1" dirty="0">
-                <a:solidFill>
-                  <a:srgbClr val="FFFFFF"/>
-                </a:solidFill>
-                <a:latin typeface="Calibri" pitchFamily="34" charset="0"/>
-                <a:ea typeface="Calibri" pitchFamily="34" charset="-122"/>
-                <a:cs typeface="Calibri" pitchFamily="34" charset="-120"/>
-              </a:rPr>
-              <a:t>4</a:t>
-            </a:r>
-            <a:endParaRPr lang="en-US" sz="1600" dirty="0"/>
-          </a:p>
-        </p:txBody>
-      </p:sp>
-      <p:sp>
-        <p:nvSpPr>
-          <p:cNvPr id="18" name="Text 16"/>
-          <p:cNvSpPr/>
-          <p:nvPr/>
-        </p:nvSpPr>
-        <p:spPr>
-          <a:xfrm>
-            <a:off x="1097280" y="4306824"/>
+          <a:effectLst>
+            <a:outerShdw sx="100000" sy="100000" kx="0" ky="0" algn="bl" rotWithShape="0" blurRad="88900" dist="25400" dir="5400000">
+              <a:srgbClr val="0F1B2D">
+                <a:alpha val="16000"/>
+              </a:srgbClr>
+            </a:outerShdw>
+          </a:effectLst>
+        </p:spPr>
+      </p:sp>
+      <p:pic>
+        <p:nvPicPr>
+          <p:cNvPr id="19" name="Image 4" descr="preencoded.png">    </p:cNvPr>
+          <p:cNvPicPr>
+            <a:picLocks noChangeAspect="1"/>
+          </p:cNvPicPr>
+          <p:nvPr/>
+        </p:nvPicPr>
+        <p:blipFill>
+          <a:blip r:embed="rId5"/>
+          <a:stretch>
+            <a:fillRect/>
+          </a:stretch>
+        </p:blipFill>
+        <p:spPr>
+          <a:xfrm>
+            <a:off x="672267" y="4558467"/>
+            <a:ext cx="228234" cy="228234"/>
+          </a:xfrm>
+          <a:prstGeom prst="rect">
+            <a:avLst/>
+          </a:prstGeom>
+        </p:spPr>
+      </p:pic>
+      <p:sp>
+        <p:nvSpPr>
+          <p:cNvPr id="20" name="Text 13"/>
+          <p:cNvSpPr/>
+          <p:nvPr/>
+        </p:nvSpPr>
+        <p:spPr>
+          <a:xfrm>
+            <a:off x="1234440" y="4306824"/>
             <a:ext cx="3200400" cy="749808"/>
           </a:xfrm>
           <a:prstGeom prst="rect">
@@ -6204,14 +9088,14 @@
       </p:sp>
       <p:sp>
         <p:nvSpPr>
-          <p:cNvPr id="19" name="Text 17"/>
-          <p:cNvSpPr/>
-          <p:nvPr/>
-        </p:nvSpPr>
-        <p:spPr>
-          <a:xfrm>
-            <a:off x="4434840" y="4306824"/>
-            <a:ext cx="7178040" cy="749808"/>
+          <p:cNvPr id="21" name="Text 14"/>
+          <p:cNvSpPr/>
+          <p:nvPr/>
+        </p:nvSpPr>
+        <p:spPr>
+          <a:xfrm>
+            <a:off x="4526280" y="4306824"/>
+            <a:ext cx="7086600" cy="749808"/>
           </a:xfrm>
           <a:prstGeom prst="rect">
             <a:avLst/>
@@ -6243,14 +9127,14 @@
       </p:sp>
       <p:sp>
         <p:nvSpPr>
-          <p:cNvPr id="20" name="Shape 18"/>
-          <p:cNvSpPr/>
-          <p:nvPr/>
-        </p:nvSpPr>
-        <p:spPr>
-          <a:xfrm>
-            <a:off x="548640" y="5221224"/>
-            <a:ext cx="384048" cy="384048"/>
+          <p:cNvPr id="22" name="Shape 15"/>
+          <p:cNvSpPr/>
+          <p:nvPr/>
+        </p:nvSpPr>
+        <p:spPr>
+          <a:xfrm>
+            <a:off x="548640" y="5276088"/>
+            <a:ext cx="475488" cy="475488"/>
           </a:xfrm>
           <a:prstGeom prst="ellipse">
             <a:avLst/>
@@ -6259,56 +9143,48 @@
             <a:srgbClr val="B91C1C"/>
           </a:solidFill>
           <a:ln/>
-        </p:spPr>
-      </p:sp>
-      <p:sp>
-        <p:nvSpPr>
-          <p:cNvPr id="21" name="Text 19"/>
-          <p:cNvSpPr/>
-          <p:nvPr/>
-        </p:nvSpPr>
-        <p:spPr>
-          <a:xfrm>
-            <a:off x="548640" y="5221224"/>
-            <a:ext cx="384048" cy="384048"/>
-          </a:xfrm>
-          <a:prstGeom prst="rect">
-            <a:avLst/>
-          </a:prstGeom>
-          <a:noFill/>
-          <a:ln/>
-        </p:spPr>
-        <p:txBody>
-          <a:bodyPr wrap="square" rtlCol="0" anchor="ctr"/>
-          <a:lstStyle/>
-          <a:p>
-            <a:pPr algn="ctr" indent="0" marL="0">
-              <a:buNone/>
-            </a:pPr>
-            <a:r>
-              <a:rPr lang="en-US" sz="1600" b="1" dirty="0">
-                <a:solidFill>
-                  <a:srgbClr val="FFFFFF"/>
-                </a:solidFill>
-                <a:latin typeface="Calibri" pitchFamily="34" charset="0"/>
-                <a:ea typeface="Calibri" pitchFamily="34" charset="-122"/>
-                <a:cs typeface="Calibri" pitchFamily="34" charset="-120"/>
-              </a:rPr>
-              <a:t>5</a:t>
-            </a:r>
-            <a:endParaRPr lang="en-US" sz="1600" dirty="0"/>
-          </a:p>
-        </p:txBody>
-      </p:sp>
-      <p:sp>
-        <p:nvSpPr>
-          <p:cNvPr id="22" name="Text 20"/>
-          <p:cNvSpPr/>
-          <p:nvPr/>
-        </p:nvSpPr>
-        <p:spPr>
-          <a:xfrm>
-            <a:off x="1097280" y="5148072"/>
+          <a:effectLst>
+            <a:outerShdw sx="100000" sy="100000" kx="0" ky="0" algn="bl" rotWithShape="0" blurRad="88900" dist="25400" dir="5400000">
+              <a:srgbClr val="0F1B2D">
+                <a:alpha val="16000"/>
+              </a:srgbClr>
+            </a:outerShdw>
+          </a:effectLst>
+        </p:spPr>
+      </p:sp>
+      <p:pic>
+        <p:nvPicPr>
+          <p:cNvPr id="23" name="Image 5" descr="preencoded.png">    </p:cNvPr>
+          <p:cNvPicPr>
+            <a:picLocks noChangeAspect="1"/>
+          </p:cNvPicPr>
+          <p:nvPr/>
+        </p:nvPicPr>
+        <p:blipFill>
+          <a:blip r:embed="rId6"/>
+          <a:stretch>
+            <a:fillRect/>
+          </a:stretch>
+        </p:blipFill>
+        <p:spPr>
+          <a:xfrm>
+            <a:off x="672267" y="5399715"/>
+            <a:ext cx="228234" cy="228234"/>
+          </a:xfrm>
+          <a:prstGeom prst="rect">
+            <a:avLst/>
+          </a:prstGeom>
+        </p:spPr>
+      </p:pic>
+      <p:sp>
+        <p:nvSpPr>
+          <p:cNvPr id="24" name="Text 16"/>
+          <p:cNvSpPr/>
+          <p:nvPr/>
+        </p:nvSpPr>
+        <p:spPr>
+          <a:xfrm>
+            <a:off x="1234440" y="5148072"/>
             <a:ext cx="3200400" cy="749808"/>
           </a:xfrm>
           <a:prstGeom prst="rect">
@@ -6341,14 +9217,14 @@
       </p:sp>
       <p:sp>
         <p:nvSpPr>
-          <p:cNvPr id="23" name="Text 21"/>
-          <p:cNvSpPr/>
-          <p:nvPr/>
-        </p:nvSpPr>
-        <p:spPr>
-          <a:xfrm>
-            <a:off x="4434840" y="5148072"/>
-            <a:ext cx="7178040" cy="749808"/>
+          <p:cNvPr id="25" name="Text 17"/>
+          <p:cNvSpPr/>
+          <p:nvPr/>
+        </p:nvSpPr>
+        <p:spPr>
+          <a:xfrm>
+            <a:off x="4526280" y="5148072"/>
+            <a:ext cx="7086600" cy="749808"/>
           </a:xfrm>
           <a:prstGeom prst="rect">
             <a:avLst/>
@@ -6380,7 +9256,7 @@
       </p:sp>
       <p:sp>
         <p:nvSpPr>
-          <p:cNvPr id="24" name="Text 22"/>
+          <p:cNvPr id="26" name="Text 18"/>
           <p:cNvSpPr/>
           <p:nvPr/>
         </p:nvSpPr>
@@ -6419,7 +9295,7 @@
       </p:sp>
       <p:sp>
         <p:nvSpPr>
-          <p:cNvPr id="25" name="Text 23"/>
+          <p:cNvPr id="27" name="Text 19"/>
           <p:cNvSpPr/>
           <p:nvPr/>
         </p:nvSpPr>
@@ -6490,14 +9366,65 @@
       </p:grpSpPr>
       <p:sp>
         <p:nvSpPr>
-          <p:cNvPr id="2" name="Text 0"/>
-          <p:cNvSpPr/>
-          <p:nvPr/>
-        </p:nvSpPr>
-        <p:spPr>
-          <a:xfrm>
-            <a:off x="548640" y="384048"/>
-            <a:ext cx="9144000" cy="320040"/>
+          <p:cNvPr id="2" name="Shape 0"/>
+          <p:cNvSpPr/>
+          <p:nvPr/>
+        </p:nvSpPr>
+        <p:spPr>
+          <a:xfrm>
+            <a:off x="548640" y="310896"/>
+            <a:ext cx="402336" cy="402336"/>
+          </a:xfrm>
+          <a:prstGeom prst="ellipse">
+            <a:avLst/>
+          </a:prstGeom>
+          <a:solidFill>
+            <a:srgbClr val="B91C1C"/>
+          </a:solidFill>
+          <a:ln/>
+          <a:effectLst>
+            <a:outerShdw sx="100000" sy="100000" kx="0" ky="0" algn="bl" rotWithShape="0" blurRad="88900" dist="25400" dir="5400000">
+              <a:srgbClr val="0F1B2D">
+                <a:alpha val="16000"/>
+              </a:srgbClr>
+            </a:outerShdw>
+          </a:effectLst>
+        </p:spPr>
+      </p:sp>
+      <p:pic>
+        <p:nvPicPr>
+          <p:cNvPr id="3" name="Image 0" descr="preencoded.png">    </p:cNvPr>
+          <p:cNvPicPr>
+            <a:picLocks noChangeAspect="1"/>
+          </p:cNvPicPr>
+          <p:nvPr/>
+        </p:nvPicPr>
+        <p:blipFill>
+          <a:blip r:embed="rId1"/>
+          <a:stretch>
+            <a:fillRect/>
+          </a:stretch>
+        </p:blipFill>
+        <p:spPr>
+          <a:xfrm>
+            <a:off x="653247" y="415503"/>
+            <a:ext cx="193121" cy="193121"/>
+          </a:xfrm>
+          <a:prstGeom prst="rect">
+            <a:avLst/>
+          </a:prstGeom>
+        </p:spPr>
+      </p:pic>
+      <p:sp>
+        <p:nvSpPr>
+          <p:cNvPr id="4" name="Text 1"/>
+          <p:cNvSpPr/>
+          <p:nvPr/>
+        </p:nvSpPr>
+        <p:spPr>
+          <a:xfrm>
+            <a:off x="1097280" y="365760"/>
+            <a:ext cx="9144000" cy="365760"/>
           </a:xfrm>
           <a:prstGeom prst="rect">
             <a:avLst/>
@@ -6529,14 +9456,14 @@
       </p:sp>
       <p:sp>
         <p:nvSpPr>
-          <p:cNvPr id="3" name="Text 1"/>
-          <p:cNvSpPr/>
-          <p:nvPr/>
-        </p:nvSpPr>
-        <p:spPr>
-          <a:xfrm>
-            <a:off x="548640" y="713232"/>
-            <a:ext cx="11064240" cy="914400"/>
+          <p:cNvPr id="5" name="Text 2"/>
+          <p:cNvSpPr/>
+          <p:nvPr/>
+        </p:nvSpPr>
+        <p:spPr>
+          <a:xfrm>
+            <a:off x="548640" y="841248"/>
+            <a:ext cx="11064240" cy="822960"/>
           </a:xfrm>
           <a:prstGeom prst="rect">
             <a:avLst/>
@@ -6552,7 +9479,7 @@
               <a:buNone/>
             </a:pPr>
             <a:r>
-              <a:rPr lang="en-US" sz="2600" b="1" dirty="0">
+              <a:rPr lang="en-US" sz="2500" b="1" dirty="0">
                 <a:solidFill>
                   <a:srgbClr val="0F1B2D"/>
                 </a:solidFill>
@@ -6562,7 +9489,7 @@
               </a:rPr>
               <a:t>Contiguous, interstate-front acreage, five miles from Fort Stockton</a:t>
             </a:r>
-            <a:endParaRPr lang="en-US" sz="2600" dirty="0"/>
+            <a:endParaRPr lang="en-US" sz="2500" dirty="0"/>
           </a:p>
         </p:txBody>
       </p:sp>
@@ -7396,14 +10323,14 @@
       </p:graphicFrame>
       <p:pic>
         <p:nvPicPr>
-          <p:cNvPr id="5" name="Image 0" descr="/home/claude/repo/outputs/reports/om_exhibits/exhibit_2_1_site-setting.jpg">    </p:cNvPr>
+          <p:cNvPr id="7" name="Image 1" descr="/home/claude/repo/outputs/reports/om_exhibits/exhibit_2_1_site-setting.jpg">    </p:cNvPr>
           <p:cNvPicPr>
             <a:picLocks noChangeAspect="1"/>
           </p:cNvPicPr>
           <p:nvPr/>
         </p:nvPicPr>
         <p:blipFill>
-          <a:blip r:embed="rId1"/>
+          <a:blip r:embed="rId2"/>
           <a:stretch>
             <a:fillRect/>
           </a:stretch>
@@ -7416,11 +10343,18 @@
           <a:prstGeom prst="rect">
             <a:avLst/>
           </a:prstGeom>
+          <a:effectLst>
+            <a:outerShdw sx="100000" sy="100000" kx="0" ky="0" algn="bl" rotWithShape="0" blurRad="88900" dist="25400" dir="5400000">
+              <a:srgbClr val="0F1B2D">
+                <a:alpha val="16000"/>
+              </a:srgbClr>
+            </a:outerShdw>
+          </a:effectLst>
         </p:spPr>
       </p:pic>
       <p:sp>
         <p:nvSpPr>
-          <p:cNvPr id="6" name="Shape 2"/>
+          <p:cNvPr id="8" name="Shape 3"/>
           <p:cNvSpPr/>
           <p:nvPr/>
         </p:nvSpPr>
@@ -7442,13 +10376,13 @@
       </p:sp>
       <p:sp>
         <p:nvSpPr>
-          <p:cNvPr id="7" name="Text 3"/>
-          <p:cNvSpPr/>
-          <p:nvPr/>
-        </p:nvSpPr>
-        <p:spPr>
-          <a:xfrm>
-            <a:off x="6263640" y="5228082"/>
+          <p:cNvPr id="9" name="Text 4"/>
+          <p:cNvSpPr/>
+          <p:nvPr/>
+        </p:nvSpPr>
+        <p:spPr>
+          <a:xfrm>
+            <a:off x="6263640" y="5246370"/>
             <a:ext cx="5394960" cy="457200"/>
           </a:xfrm>
           <a:prstGeom prst="rect">
@@ -7481,7 +10415,7 @@
       </p:sp>
       <p:sp>
         <p:nvSpPr>
-          <p:cNvPr id="8" name="Text 4"/>
+          <p:cNvPr id="10" name="Text 5"/>
           <p:cNvSpPr/>
           <p:nvPr/>
         </p:nvSpPr>
@@ -7520,7 +10454,7 @@
       </p:sp>
       <p:sp>
         <p:nvSpPr>
-          <p:cNvPr id="9" name="Text 5"/>
+          <p:cNvPr id="11" name="Text 6"/>
           <p:cNvSpPr/>
           <p:nvPr/>
         </p:nvSpPr>
@@ -7591,14 +10525,65 @@
       </p:grpSpPr>
       <p:sp>
         <p:nvSpPr>
-          <p:cNvPr id="2" name="Text 0"/>
-          <p:cNvSpPr/>
-          <p:nvPr/>
-        </p:nvSpPr>
-        <p:spPr>
-          <a:xfrm>
-            <a:off x="548640" y="384048"/>
-            <a:ext cx="9144000" cy="320040"/>
+          <p:cNvPr id="2" name="Shape 0"/>
+          <p:cNvSpPr/>
+          <p:nvPr/>
+        </p:nvSpPr>
+        <p:spPr>
+          <a:xfrm>
+            <a:off x="548640" y="310896"/>
+            <a:ext cx="402336" cy="402336"/>
+          </a:xfrm>
+          <a:prstGeom prst="ellipse">
+            <a:avLst/>
+          </a:prstGeom>
+          <a:solidFill>
+            <a:srgbClr val="B91C1C"/>
+          </a:solidFill>
+          <a:ln/>
+          <a:effectLst>
+            <a:outerShdw sx="100000" sy="100000" kx="0" ky="0" algn="bl" rotWithShape="0" blurRad="88900" dist="25400" dir="5400000">
+              <a:srgbClr val="0F1B2D">
+                <a:alpha val="16000"/>
+              </a:srgbClr>
+            </a:outerShdw>
+          </a:effectLst>
+        </p:spPr>
+      </p:sp>
+      <p:pic>
+        <p:nvPicPr>
+          <p:cNvPr id="3" name="Image 0" descr="preencoded.png">    </p:cNvPr>
+          <p:cNvPicPr>
+            <a:picLocks noChangeAspect="1"/>
+          </p:cNvPicPr>
+          <p:nvPr/>
+        </p:nvPicPr>
+        <p:blipFill>
+          <a:blip r:embed="rId1"/>
+          <a:stretch>
+            <a:fillRect/>
+          </a:stretch>
+        </p:blipFill>
+        <p:spPr>
+          <a:xfrm>
+            <a:off x="653247" y="415503"/>
+            <a:ext cx="193121" cy="193121"/>
+          </a:xfrm>
+          <a:prstGeom prst="rect">
+            <a:avLst/>
+          </a:prstGeom>
+        </p:spPr>
+      </p:pic>
+      <p:sp>
+        <p:nvSpPr>
+          <p:cNvPr id="4" name="Text 1"/>
+          <p:cNvSpPr/>
+          <p:nvPr/>
+        </p:nvSpPr>
+        <p:spPr>
+          <a:xfrm>
+            <a:off x="1097280" y="365760"/>
+            <a:ext cx="9144000" cy="365760"/>
           </a:xfrm>
           <a:prstGeom prst="rect">
             <a:avLst/>
@@ -7630,14 +10615,14 @@
       </p:sp>
       <p:sp>
         <p:nvSpPr>
-          <p:cNvPr id="3" name="Text 1"/>
-          <p:cNvSpPr/>
-          <p:nvPr/>
-        </p:nvSpPr>
-        <p:spPr>
-          <a:xfrm>
-            <a:off x="548640" y="713232"/>
-            <a:ext cx="11064240" cy="914400"/>
+          <p:cNvPr id="5" name="Text 2"/>
+          <p:cNvSpPr/>
+          <p:nvPr/>
+        </p:nvSpPr>
+        <p:spPr>
+          <a:xfrm>
+            <a:off x="548640" y="841248"/>
+            <a:ext cx="11064240" cy="822960"/>
           </a:xfrm>
           <a:prstGeom prst="rect">
             <a:avLst/>
@@ -7653,7 +10638,7 @@
               <a:buNone/>
             </a:pPr>
             <a:r>
-              <a:rPr lang="en-US" sz="2600" b="1" dirty="0">
+              <a:rPr lang="en-US" sz="2500" b="1" dirty="0">
                 <a:solidFill>
                   <a:srgbClr val="0F1B2D"/>
                 </a:solidFill>
@@ -7663,7 +10648,7 @@
               </a:rPr>
               <a:t>15 miles from the western terminus of ERCOT's 765 kV backbone</a:t>
             </a:r>
-            <a:endParaRPr lang="en-US" sz="2600" dirty="0"/>
+            <a:endParaRPr lang="en-US" sz="2500" dirty="0"/>
           </a:p>
         </p:txBody>
       </p:sp>
@@ -8365,14 +11350,14 @@
       </p:graphicFrame>
       <p:pic>
         <p:nvPicPr>
-          <p:cNvPr id="5" name="Image 0" descr="/home/claude/repo/outputs/reports/om_exhibits/exhibit_3_1_planned-grid-upgrades.jpg">    </p:cNvPr>
+          <p:cNvPr id="7" name="Image 1" descr="/home/claude/repo/outputs/reports/om_exhibits/exhibit_3_1_planned-grid-upgrades.jpg">    </p:cNvPr>
           <p:cNvPicPr>
             <a:picLocks noChangeAspect="1"/>
           </p:cNvPicPr>
           <p:nvPr/>
         </p:nvPicPr>
         <p:blipFill>
-          <a:blip r:embed="rId1"/>
+          <a:blip r:embed="rId2"/>
           <a:stretch>
             <a:fillRect/>
           </a:stretch>
@@ -8385,11 +11370,18 @@
           <a:prstGeom prst="rect">
             <a:avLst/>
           </a:prstGeom>
+          <a:effectLst>
+            <a:outerShdw sx="100000" sy="100000" kx="0" ky="0" algn="bl" rotWithShape="0" blurRad="88900" dist="25400" dir="5400000">
+              <a:srgbClr val="0F1B2D">
+                <a:alpha val="16000"/>
+              </a:srgbClr>
+            </a:outerShdw>
+          </a:effectLst>
         </p:spPr>
       </p:pic>
       <p:sp>
         <p:nvSpPr>
-          <p:cNvPr id="6" name="Shape 2"/>
+          <p:cNvPr id="8" name="Shape 3"/>
           <p:cNvSpPr/>
           <p:nvPr/>
         </p:nvSpPr>
@@ -8411,13 +11403,13 @@
       </p:sp>
       <p:sp>
         <p:nvSpPr>
-          <p:cNvPr id="7" name="Text 3"/>
-          <p:cNvSpPr/>
-          <p:nvPr/>
-        </p:nvSpPr>
-        <p:spPr>
-          <a:xfrm>
-            <a:off x="6263640" y="4944847"/>
+          <p:cNvPr id="9" name="Text 4"/>
+          <p:cNvSpPr/>
+          <p:nvPr/>
+        </p:nvSpPr>
+        <p:spPr>
+          <a:xfrm>
+            <a:off x="6263640" y="4963135"/>
             <a:ext cx="5394960" cy="457200"/>
           </a:xfrm>
           <a:prstGeom prst="rect">
@@ -8450,7 +11442,7 @@
       </p:sp>
       <p:sp>
         <p:nvSpPr>
-          <p:cNvPr id="8" name="Text 4"/>
+          <p:cNvPr id="10" name="Text 5"/>
           <p:cNvSpPr/>
           <p:nvPr/>
         </p:nvSpPr>
@@ -8489,7 +11481,7 @@
       </p:sp>
       <p:sp>
         <p:nvSpPr>
-          <p:cNvPr id="9" name="Text 5"/>
+          <p:cNvPr id="11" name="Text 6"/>
           <p:cNvSpPr/>
           <p:nvPr/>
         </p:nvSpPr>
@@ -8560,14 +11552,65 @@
       </p:grpSpPr>
       <p:sp>
         <p:nvSpPr>
-          <p:cNvPr id="2" name="Text 0"/>
-          <p:cNvSpPr/>
-          <p:nvPr/>
-        </p:nvSpPr>
-        <p:spPr>
-          <a:xfrm>
-            <a:off x="548640" y="384048"/>
-            <a:ext cx="9144000" cy="320040"/>
+          <p:cNvPr id="2" name="Shape 0"/>
+          <p:cNvSpPr/>
+          <p:nvPr/>
+        </p:nvSpPr>
+        <p:spPr>
+          <a:xfrm>
+            <a:off x="548640" y="310896"/>
+            <a:ext cx="402336" cy="402336"/>
+          </a:xfrm>
+          <a:prstGeom prst="ellipse">
+            <a:avLst/>
+          </a:prstGeom>
+          <a:solidFill>
+            <a:srgbClr val="B91C1C"/>
+          </a:solidFill>
+          <a:ln/>
+          <a:effectLst>
+            <a:outerShdw sx="100000" sy="100000" kx="0" ky="0" algn="bl" rotWithShape="0" blurRad="88900" dist="25400" dir="5400000">
+              <a:srgbClr val="0F1B2D">
+                <a:alpha val="16000"/>
+              </a:srgbClr>
+            </a:outerShdw>
+          </a:effectLst>
+        </p:spPr>
+      </p:sp>
+      <p:pic>
+        <p:nvPicPr>
+          <p:cNvPr id="3" name="Image 0" descr="preencoded.png">    </p:cNvPr>
+          <p:cNvPicPr>
+            <a:picLocks noChangeAspect="1"/>
+          </p:cNvPicPr>
+          <p:nvPr/>
+        </p:nvPicPr>
+        <p:blipFill>
+          <a:blip r:embed="rId1"/>
+          <a:stretch>
+            <a:fillRect/>
+          </a:stretch>
+        </p:blipFill>
+        <p:spPr>
+          <a:xfrm>
+            <a:off x="653247" y="415503"/>
+            <a:ext cx="193121" cy="193121"/>
+          </a:xfrm>
+          <a:prstGeom prst="rect">
+            <a:avLst/>
+          </a:prstGeom>
+        </p:spPr>
+      </p:pic>
+      <p:sp>
+        <p:nvSpPr>
+          <p:cNvPr id="4" name="Text 1"/>
+          <p:cNvSpPr/>
+          <p:nvPr/>
+        </p:nvSpPr>
+        <p:spPr>
+          <a:xfrm>
+            <a:off x="1097280" y="365760"/>
+            <a:ext cx="9144000" cy="365760"/>
           </a:xfrm>
           <a:prstGeom prst="rect">
             <a:avLst/>
@@ -8599,14 +11642,14 @@
       </p:sp>
       <p:sp>
         <p:nvSpPr>
-          <p:cNvPr id="3" name="Text 1"/>
-          <p:cNvSpPr/>
-          <p:nvPr/>
-        </p:nvSpPr>
-        <p:spPr>
-          <a:xfrm>
-            <a:off x="548640" y="713232"/>
-            <a:ext cx="11064240" cy="914400"/>
+          <p:cNvPr id="5" name="Text 2"/>
+          <p:cNvSpPr/>
+          <p:nvPr/>
+        </p:nvSpPr>
+        <p:spPr>
+          <a:xfrm>
+            <a:off x="548640" y="841248"/>
+            <a:ext cx="11064240" cy="822960"/>
           </a:xfrm>
           <a:prstGeom prst="rect">
             <a:avLst/>
@@ -8622,7 +11665,7 @@
               <a:buNone/>
             </a:pPr>
             <a:r>
-              <a:rPr lang="en-US" sz="2600" b="1" dirty="0">
+              <a:rPr lang="en-US" sz="2500" b="1" dirty="0">
                 <a:solidFill>
                   <a:srgbClr val="0F1B2D"/>
                 </a:solidFill>
@@ -8632,7 +11675,7 @@
               </a:rPr>
               <a:t>12.0 GW queued in Pecos County — densest renewable cluster in ERCOT</a:t>
             </a:r>
-            <a:endParaRPr lang="en-US" sz="2600" dirty="0"/>
+            <a:endParaRPr lang="en-US" sz="2500" dirty="0"/>
           </a:p>
         </p:txBody>
       </p:sp>
@@ -9869,14 +12912,14 @@
       </p:graphicFrame>
       <p:pic>
         <p:nvPicPr>
-          <p:cNvPr id="5" name="Image 0" descr="/home/claude/repo/outputs/reports/om_exhibits/exhibit_4_1_generation-cluster.jpg">    </p:cNvPr>
+          <p:cNvPr id="7" name="Image 1" descr="/home/claude/repo/outputs/reports/om_exhibits/exhibit_4_1_generation-cluster.jpg">    </p:cNvPr>
           <p:cNvPicPr>
             <a:picLocks noChangeAspect="1"/>
           </p:cNvPicPr>
           <p:nvPr/>
         </p:nvPicPr>
         <p:blipFill>
-          <a:blip r:embed="rId1"/>
+          <a:blip r:embed="rId2"/>
           <a:stretch>
             <a:fillRect/>
           </a:stretch>
@@ -9889,11 +12932,18 @@
           <a:prstGeom prst="rect">
             <a:avLst/>
           </a:prstGeom>
+          <a:effectLst>
+            <a:outerShdw sx="100000" sy="100000" kx="0" ky="0" algn="bl" rotWithShape="0" blurRad="88900" dist="25400" dir="5400000">
+              <a:srgbClr val="0F1B2D">
+                <a:alpha val="16000"/>
+              </a:srgbClr>
+            </a:outerShdw>
+          </a:effectLst>
         </p:spPr>
       </p:pic>
       <p:sp>
         <p:nvSpPr>
-          <p:cNvPr id="6" name="Shape 2"/>
+          <p:cNvPr id="8" name="Shape 3"/>
           <p:cNvSpPr/>
           <p:nvPr/>
         </p:nvSpPr>
@@ -9915,13 +12965,13 @@
       </p:sp>
       <p:sp>
         <p:nvSpPr>
-          <p:cNvPr id="7" name="Text 3"/>
-          <p:cNvSpPr/>
-          <p:nvPr/>
-        </p:nvSpPr>
-        <p:spPr>
-          <a:xfrm>
-            <a:off x="6263640" y="4944847"/>
+          <p:cNvPr id="9" name="Text 4"/>
+          <p:cNvSpPr/>
+          <p:nvPr/>
+        </p:nvSpPr>
+        <p:spPr>
+          <a:xfrm>
+            <a:off x="6263640" y="4963135"/>
             <a:ext cx="5394960" cy="457200"/>
           </a:xfrm>
           <a:prstGeom prst="rect">
@@ -9954,7 +13004,7 @@
       </p:sp>
       <p:sp>
         <p:nvSpPr>
-          <p:cNvPr id="8" name="Text 4"/>
+          <p:cNvPr id="10" name="Text 5"/>
           <p:cNvSpPr/>
           <p:nvPr/>
         </p:nvSpPr>
@@ -9993,7 +13043,7 @@
       </p:sp>
       <p:sp>
         <p:nvSpPr>
-          <p:cNvPr id="9" name="Text 5"/>
+          <p:cNvPr id="11" name="Text 6"/>
           <p:cNvSpPr/>
           <p:nvPr/>
         </p:nvSpPr>
@@ -10032,7 +13082,7 @@
       </p:sp>
       <p:sp>
         <p:nvSpPr>
-          <p:cNvPr id="10" name="Text 6"/>
+          <p:cNvPr id="12" name="Text 7"/>
           <p:cNvSpPr/>
           <p:nvPr/>
         </p:nvSpPr>
@@ -10103,14 +13153,65 @@
       </p:grpSpPr>
       <p:sp>
         <p:nvSpPr>
-          <p:cNvPr id="2" name="Text 0"/>
-          <p:cNvSpPr/>
-          <p:nvPr/>
-        </p:nvSpPr>
-        <p:spPr>
-          <a:xfrm>
-            <a:off x="548640" y="384048"/>
-            <a:ext cx="9144000" cy="320040"/>
+          <p:cNvPr id="2" name="Shape 0"/>
+          <p:cNvSpPr/>
+          <p:nvPr/>
+        </p:nvSpPr>
+        <p:spPr>
+          <a:xfrm>
+            <a:off x="548640" y="310896"/>
+            <a:ext cx="402336" cy="402336"/>
+          </a:xfrm>
+          <a:prstGeom prst="ellipse">
+            <a:avLst/>
+          </a:prstGeom>
+          <a:solidFill>
+            <a:srgbClr val="B91C1C"/>
+          </a:solidFill>
+          <a:ln/>
+          <a:effectLst>
+            <a:outerShdw sx="100000" sy="100000" kx="0" ky="0" algn="bl" rotWithShape="0" blurRad="88900" dist="25400" dir="5400000">
+              <a:srgbClr val="0F1B2D">
+                <a:alpha val="16000"/>
+              </a:srgbClr>
+            </a:outerShdw>
+          </a:effectLst>
+        </p:spPr>
+      </p:sp>
+      <p:pic>
+        <p:nvPicPr>
+          <p:cNvPr id="3" name="Image 0" descr="preencoded.png">    </p:cNvPr>
+          <p:cNvPicPr>
+            <a:picLocks noChangeAspect="1"/>
+          </p:cNvPicPr>
+          <p:nvPr/>
+        </p:nvPicPr>
+        <p:blipFill>
+          <a:blip r:embed="rId1"/>
+          <a:stretch>
+            <a:fillRect/>
+          </a:stretch>
+        </p:blipFill>
+        <p:spPr>
+          <a:xfrm>
+            <a:off x="653247" y="415503"/>
+            <a:ext cx="193121" cy="193121"/>
+          </a:xfrm>
+          <a:prstGeom prst="rect">
+            <a:avLst/>
+          </a:prstGeom>
+        </p:spPr>
+      </p:pic>
+      <p:sp>
+        <p:nvSpPr>
+          <p:cNvPr id="4" name="Text 1"/>
+          <p:cNvSpPr/>
+          <p:nvPr/>
+        </p:nvSpPr>
+        <p:spPr>
+          <a:xfrm>
+            <a:off x="1097280" y="365760"/>
+            <a:ext cx="9144000" cy="365760"/>
           </a:xfrm>
           <a:prstGeom prst="rect">
             <a:avLst/>
@@ -10142,14 +13243,14 @@
       </p:sp>
       <p:sp>
         <p:nvSpPr>
-          <p:cNvPr id="3" name="Text 1"/>
-          <p:cNvSpPr/>
-          <p:nvPr/>
-        </p:nvSpPr>
-        <p:spPr>
-          <a:xfrm>
-            <a:off x="548640" y="713232"/>
-            <a:ext cx="11064240" cy="914400"/>
+          <p:cNvPr id="5" name="Text 2"/>
+          <p:cNvSpPr/>
+          <p:nvPr/>
+        </p:nvSpPr>
+        <p:spPr>
+          <a:xfrm>
+            <a:off x="548640" y="841248"/>
+            <a:ext cx="11064240" cy="822960"/>
           </a:xfrm>
           <a:prstGeom prst="rect">
             <a:avLst/>
@@ -10165,7 +13266,7 @@
               <a:buNone/>
             </a:pPr>
             <a:r>
-              <a:rPr lang="en-US" sz="2600" b="1" dirty="0">
+              <a:rPr lang="en-US" sz="2500" b="1" dirty="0">
                 <a:solidFill>
                   <a:srgbClr val="0F1B2D"/>
                 </a:solidFill>
@@ -10175,13 +13276,13 @@
               </a:rPr>
               <a:t>Permitted water at scale, and a Waha-basis gas quote in hand</a:t>
             </a:r>
-            <a:endParaRPr lang="en-US" sz="2600" dirty="0"/>
-          </a:p>
-        </p:txBody>
-      </p:sp>
-      <p:sp>
-        <p:nvSpPr>
-          <p:cNvPr id="4" name="Shape 2"/>
+            <a:endParaRPr lang="en-US" sz="2500" dirty="0"/>
+          </a:p>
+        </p:txBody>
+      </p:sp>
+      <p:sp>
+        <p:nvSpPr>
+          <p:cNvPr id="6" name="Shape 3"/>
           <p:cNvSpPr/>
           <p:nvPr/>
         </p:nvSpPr>
@@ -10190,8 +13291,10 @@
             <a:off x="548640" y="1783080"/>
             <a:ext cx="5394960" cy="4206240"/>
           </a:xfrm>
-          <a:prstGeom prst="rect">
-            <a:avLst/>
+          <a:prstGeom prst="roundRect">
+            <a:avLst>
+              <a:gd name="adj" fmla="val 1087"/>
+            </a:avLst>
           </a:prstGeom>
           <a:solidFill>
             <a:srgbClr val="F1F5F9"/>
@@ -10202,18 +13305,76 @@
             </a:solidFill>
             <a:prstDash val="solid"/>
           </a:ln>
-        </p:spPr>
-      </p:sp>
-      <p:sp>
-        <p:nvSpPr>
-          <p:cNvPr id="5" name="Text 3"/>
-          <p:cNvSpPr/>
-          <p:nvPr/>
-        </p:nvSpPr>
-        <p:spPr>
-          <a:xfrm>
-            <a:off x="777240" y="1965960"/>
-            <a:ext cx="4937760" cy="320040"/>
+          <a:effectLst>
+            <a:outerShdw sx="100000" sy="100000" kx="0" ky="0" algn="bl" rotWithShape="0" blurRad="88900" dist="25400" dir="5400000">
+              <a:srgbClr val="0F1B2D">
+                <a:alpha val="16000"/>
+              </a:srgbClr>
+            </a:outerShdw>
+          </a:effectLst>
+        </p:spPr>
+      </p:sp>
+      <p:sp>
+        <p:nvSpPr>
+          <p:cNvPr id="7" name="Shape 4"/>
+          <p:cNvSpPr/>
+          <p:nvPr/>
+        </p:nvSpPr>
+        <p:spPr>
+          <a:xfrm>
+            <a:off x="777240" y="1938528"/>
+            <a:ext cx="457200" cy="457200"/>
+          </a:xfrm>
+          <a:prstGeom prst="ellipse">
+            <a:avLst/>
+          </a:prstGeom>
+          <a:solidFill>
+            <a:srgbClr val="B91C1C"/>
+          </a:solidFill>
+          <a:ln/>
+          <a:effectLst>
+            <a:outerShdw sx="100000" sy="100000" kx="0" ky="0" algn="bl" rotWithShape="0" blurRad="88900" dist="25400" dir="5400000">
+              <a:srgbClr val="0F1B2D">
+                <a:alpha val="16000"/>
+              </a:srgbClr>
+            </a:outerShdw>
+          </a:effectLst>
+        </p:spPr>
+      </p:sp>
+      <p:pic>
+        <p:nvPicPr>
+          <p:cNvPr id="8" name="Image 1" descr="preencoded.png">    </p:cNvPr>
+          <p:cNvPicPr>
+            <a:picLocks noChangeAspect="1"/>
+          </p:cNvPicPr>
+          <p:nvPr/>
+        </p:nvPicPr>
+        <p:blipFill>
+          <a:blip r:embed="rId2"/>
+          <a:stretch>
+            <a:fillRect/>
+          </a:stretch>
+        </p:blipFill>
+        <p:spPr>
+          <a:xfrm>
+            <a:off x="896112" y="2057400"/>
+            <a:ext cx="219456" cy="219456"/>
+          </a:xfrm>
+          <a:prstGeom prst="rect">
+            <a:avLst/>
+          </a:prstGeom>
+        </p:spPr>
+      </p:pic>
+      <p:sp>
+        <p:nvSpPr>
+          <p:cNvPr id="9" name="Text 5"/>
+          <p:cNvSpPr/>
+          <p:nvPr/>
+        </p:nvSpPr>
+        <p:spPr>
+          <a:xfrm>
+            <a:off x="1353312" y="1965960"/>
+            <a:ext cx="4389120" cy="411480"/>
           </a:xfrm>
           <a:prstGeom prst="rect">
             <a:avLst/>
@@ -10229,7 +13390,7 @@
               <a:buNone/>
             </a:pPr>
             <a:r>
-              <a:rPr lang="en-US" sz="1200" b="1" spc="150" kern="0" dirty="0">
+              <a:rPr lang="en-US" sz="1300" b="1" spc="150" kern="0" dirty="0">
                 <a:solidFill>
                   <a:srgbClr val="B91C1C"/>
                 </a:solidFill>
@@ -10239,19 +13400,19 @@
               </a:rPr>
               <a:t>WATER</a:t>
             </a:r>
-            <a:endParaRPr lang="en-US" sz="1200" dirty="0"/>
-          </a:p>
-        </p:txBody>
-      </p:sp>
-      <p:sp>
-        <p:nvSpPr>
-          <p:cNvPr id="6" name="Text 4"/>
-          <p:cNvSpPr/>
-          <p:nvPr/>
-        </p:nvSpPr>
-        <p:spPr>
-          <a:xfrm>
-            <a:off x="777240" y="2286000"/>
+            <a:endParaRPr lang="en-US" sz="1300" dirty="0"/>
+          </a:p>
+        </p:txBody>
+      </p:sp>
+      <p:sp>
+        <p:nvSpPr>
+          <p:cNvPr id="10" name="Text 6"/>
+          <p:cNvSpPr/>
+          <p:nvPr/>
+        </p:nvSpPr>
+        <p:spPr>
+          <a:xfrm>
+            <a:off x="777240" y="2514600"/>
             <a:ext cx="4937760" cy="548640"/>
           </a:xfrm>
           <a:prstGeom prst="rect">
@@ -10284,13 +13445,13 @@
       </p:sp>
       <p:sp>
         <p:nvSpPr>
-          <p:cNvPr id="7" name="Text 5"/>
-          <p:cNvSpPr/>
-          <p:nvPr/>
-        </p:nvSpPr>
-        <p:spPr>
-          <a:xfrm>
-            <a:off x="777240" y="2880360"/>
+          <p:cNvPr id="11" name="Text 7"/>
+          <p:cNvSpPr/>
+          <p:nvPr/>
+        </p:nvSpPr>
+        <p:spPr>
+          <a:xfrm>
+            <a:off x="777240" y="3108960"/>
             <a:ext cx="4937760" cy="1737360"/>
           </a:xfrm>
           <a:prstGeom prst="rect">
@@ -10323,7 +13484,7 @@
       </p:sp>
       <p:sp>
         <p:nvSpPr>
-          <p:cNvPr id="8" name="Text 6"/>
+          <p:cNvPr id="12" name="Text 8"/>
           <p:cNvSpPr/>
           <p:nvPr/>
         </p:nvSpPr>
@@ -10362,7 +13523,7 @@
       </p:sp>
       <p:sp>
         <p:nvSpPr>
-          <p:cNvPr id="9" name="Shape 7"/>
+          <p:cNvPr id="13" name="Shape 9"/>
           <p:cNvSpPr/>
           <p:nvPr/>
         </p:nvSpPr>
@@ -10371,8 +13532,10 @@
             <a:off x="6263640" y="1783080"/>
             <a:ext cx="5394960" cy="4206240"/>
           </a:xfrm>
-          <a:prstGeom prst="rect">
-            <a:avLst/>
+          <a:prstGeom prst="roundRect">
+            <a:avLst>
+              <a:gd name="adj" fmla="val 1087"/>
+            </a:avLst>
           </a:prstGeom>
           <a:solidFill>
             <a:srgbClr val="F1F5F9"/>
@@ -10383,18 +13546,76 @@
             </a:solidFill>
             <a:prstDash val="solid"/>
           </a:ln>
-        </p:spPr>
-      </p:sp>
-      <p:sp>
-        <p:nvSpPr>
-          <p:cNvPr id="10" name="Text 8"/>
-          <p:cNvSpPr/>
-          <p:nvPr/>
-        </p:nvSpPr>
-        <p:spPr>
-          <a:xfrm>
-            <a:off x="6492240" y="1965960"/>
-            <a:ext cx="4937760" cy="320040"/>
+          <a:effectLst>
+            <a:outerShdw sx="100000" sy="100000" kx="0" ky="0" algn="bl" rotWithShape="0" blurRad="88900" dist="25400" dir="5400000">
+              <a:srgbClr val="0F1B2D">
+                <a:alpha val="16000"/>
+              </a:srgbClr>
+            </a:outerShdw>
+          </a:effectLst>
+        </p:spPr>
+      </p:sp>
+      <p:sp>
+        <p:nvSpPr>
+          <p:cNvPr id="14" name="Shape 10"/>
+          <p:cNvSpPr/>
+          <p:nvPr/>
+        </p:nvSpPr>
+        <p:spPr>
+          <a:xfrm>
+            <a:off x="6492240" y="1938528"/>
+            <a:ext cx="457200" cy="457200"/>
+          </a:xfrm>
+          <a:prstGeom prst="ellipse">
+            <a:avLst/>
+          </a:prstGeom>
+          <a:solidFill>
+            <a:srgbClr val="B91C1C"/>
+          </a:solidFill>
+          <a:ln/>
+          <a:effectLst>
+            <a:outerShdw sx="100000" sy="100000" kx="0" ky="0" algn="bl" rotWithShape="0" blurRad="88900" dist="25400" dir="5400000">
+              <a:srgbClr val="0F1B2D">
+                <a:alpha val="16000"/>
+              </a:srgbClr>
+            </a:outerShdw>
+          </a:effectLst>
+        </p:spPr>
+      </p:sp>
+      <p:pic>
+        <p:nvPicPr>
+          <p:cNvPr id="15" name="Image 2" descr="preencoded.png">    </p:cNvPr>
+          <p:cNvPicPr>
+            <a:picLocks noChangeAspect="1"/>
+          </p:cNvPicPr>
+          <p:nvPr/>
+        </p:nvPicPr>
+        <p:blipFill>
+          <a:blip r:embed="rId3"/>
+          <a:stretch>
+            <a:fillRect/>
+          </a:stretch>
+        </p:blipFill>
+        <p:spPr>
+          <a:xfrm>
+            <a:off x="6611112" y="2057400"/>
+            <a:ext cx="219456" cy="219456"/>
+          </a:xfrm>
+          <a:prstGeom prst="rect">
+            <a:avLst/>
+          </a:prstGeom>
+        </p:spPr>
+      </p:pic>
+      <p:sp>
+        <p:nvSpPr>
+          <p:cNvPr id="16" name="Text 11"/>
+          <p:cNvSpPr/>
+          <p:nvPr/>
+        </p:nvSpPr>
+        <p:spPr>
+          <a:xfrm>
+            <a:off x="7068312" y="1965960"/>
+            <a:ext cx="4389120" cy="411480"/>
           </a:xfrm>
           <a:prstGeom prst="rect">
             <a:avLst/>
@@ -10410,7 +13631,7 @@
               <a:buNone/>
             </a:pPr>
             <a:r>
-              <a:rPr lang="en-US" sz="1200" b="1" spc="150" kern="0" dirty="0">
+              <a:rPr lang="en-US" sz="1300" b="1" spc="150" kern="0" dirty="0">
                 <a:solidFill>
                   <a:srgbClr val="B91C1C"/>
                 </a:solidFill>
@@ -10420,19 +13641,19 @@
               </a:rPr>
               <a:t>NATURAL GAS</a:t>
             </a:r>
-            <a:endParaRPr lang="en-US" sz="1200" dirty="0"/>
-          </a:p>
-        </p:txBody>
-      </p:sp>
-      <p:sp>
-        <p:nvSpPr>
-          <p:cNvPr id="11" name="Text 9"/>
-          <p:cNvSpPr/>
-          <p:nvPr/>
-        </p:nvSpPr>
-        <p:spPr>
-          <a:xfrm>
-            <a:off x="6492240" y="2286000"/>
+            <a:endParaRPr lang="en-US" sz="1300" dirty="0"/>
+          </a:p>
+        </p:txBody>
+      </p:sp>
+      <p:sp>
+        <p:nvSpPr>
+          <p:cNvPr id="17" name="Text 12"/>
+          <p:cNvSpPr/>
+          <p:nvPr/>
+        </p:nvSpPr>
+        <p:spPr>
+          <a:xfrm>
+            <a:off x="6492240" y="2514600"/>
             <a:ext cx="4937760" cy="548640"/>
           </a:xfrm>
           <a:prstGeom prst="rect">
@@ -10465,13 +13686,13 @@
       </p:sp>
       <p:sp>
         <p:nvSpPr>
-          <p:cNvPr id="12" name="Text 10"/>
-          <p:cNvSpPr/>
-          <p:nvPr/>
-        </p:nvSpPr>
-        <p:spPr>
-          <a:xfrm>
-            <a:off x="6492240" y="2880360"/>
+          <p:cNvPr id="18" name="Text 13"/>
+          <p:cNvSpPr/>
+          <p:nvPr/>
+        </p:nvSpPr>
+        <p:spPr>
+          <a:xfrm>
+            <a:off x="6492240" y="3108960"/>
             <a:ext cx="4937760" cy="1737360"/>
           </a:xfrm>
           <a:prstGeom prst="rect">
@@ -10504,7 +13725,7 @@
       </p:sp>
       <p:sp>
         <p:nvSpPr>
-          <p:cNvPr id="13" name="Text 11"/>
+          <p:cNvPr id="19" name="Text 14"/>
           <p:cNvSpPr/>
           <p:nvPr/>
         </p:nvSpPr>
@@ -10543,7 +13764,7 @@
       </p:sp>
       <p:sp>
         <p:nvSpPr>
-          <p:cNvPr id="14" name="Text 12"/>
+          <p:cNvPr id="20" name="Text 15"/>
           <p:cNvSpPr/>
           <p:nvPr/>
         </p:nvSpPr>
@@ -10582,7 +13803,7 @@
       </p:sp>
       <p:sp>
         <p:nvSpPr>
-          <p:cNvPr id="15" name="Text 13"/>
+          <p:cNvPr id="21" name="Text 16"/>
           <p:cNvSpPr/>
           <p:nvPr/>
         </p:nvSpPr>
@@ -10653,14 +13874,65 @@
       </p:grpSpPr>
       <p:sp>
         <p:nvSpPr>
-          <p:cNvPr id="2" name="Text 0"/>
-          <p:cNvSpPr/>
-          <p:nvPr/>
-        </p:nvSpPr>
-        <p:spPr>
-          <a:xfrm>
-            <a:off x="548640" y="384048"/>
-            <a:ext cx="9144000" cy="320040"/>
+          <p:cNvPr id="2" name="Shape 0"/>
+          <p:cNvSpPr/>
+          <p:nvPr/>
+        </p:nvSpPr>
+        <p:spPr>
+          <a:xfrm>
+            <a:off x="548640" y="310896"/>
+            <a:ext cx="402336" cy="402336"/>
+          </a:xfrm>
+          <a:prstGeom prst="ellipse">
+            <a:avLst/>
+          </a:prstGeom>
+          <a:solidFill>
+            <a:srgbClr val="B91C1C"/>
+          </a:solidFill>
+          <a:ln/>
+          <a:effectLst>
+            <a:outerShdw sx="100000" sy="100000" kx="0" ky="0" algn="bl" rotWithShape="0" blurRad="88900" dist="25400" dir="5400000">
+              <a:srgbClr val="0F1B2D">
+                <a:alpha val="16000"/>
+              </a:srgbClr>
+            </a:outerShdw>
+          </a:effectLst>
+        </p:spPr>
+      </p:sp>
+      <p:pic>
+        <p:nvPicPr>
+          <p:cNvPr id="3" name="Image 0" descr="preencoded.png">    </p:cNvPr>
+          <p:cNvPicPr>
+            <a:picLocks noChangeAspect="1"/>
+          </p:cNvPicPr>
+          <p:nvPr/>
+        </p:nvPicPr>
+        <p:blipFill>
+          <a:blip r:embed="rId1"/>
+          <a:stretch>
+            <a:fillRect/>
+          </a:stretch>
+        </p:blipFill>
+        <p:spPr>
+          <a:xfrm>
+            <a:off x="653247" y="415503"/>
+            <a:ext cx="193121" cy="193121"/>
+          </a:xfrm>
+          <a:prstGeom prst="rect">
+            <a:avLst/>
+          </a:prstGeom>
+        </p:spPr>
+      </p:pic>
+      <p:sp>
+        <p:nvSpPr>
+          <p:cNvPr id="4" name="Text 1"/>
+          <p:cNvSpPr/>
+          <p:nvPr/>
+        </p:nvSpPr>
+        <p:spPr>
+          <a:xfrm>
+            <a:off x="1097280" y="365760"/>
+            <a:ext cx="9144000" cy="365760"/>
           </a:xfrm>
           <a:prstGeom prst="rect">
             <a:avLst/>
@@ -10692,14 +13964,14 @@
       </p:sp>
       <p:sp>
         <p:nvSpPr>
-          <p:cNvPr id="3" name="Text 1"/>
-          <p:cNvSpPr/>
-          <p:nvPr/>
-        </p:nvSpPr>
-        <p:spPr>
-          <a:xfrm>
-            <a:off x="548640" y="713232"/>
-            <a:ext cx="11064240" cy="914400"/>
+          <p:cNvPr id="5" name="Text 2"/>
+          <p:cNvSpPr/>
+          <p:nvPr/>
+        </p:nvSpPr>
+        <p:spPr>
+          <a:xfrm>
+            <a:off x="548640" y="841248"/>
+            <a:ext cx="11064240" cy="822960"/>
           </a:xfrm>
           <a:prstGeom prst="rect">
             <a:avLst/>
@@ -10715,7 +13987,7 @@
               <a:buNone/>
             </a:pPr>
             <a:r>
-              <a:rPr lang="en-US" sz="2600" b="1" dirty="0">
+              <a:rPr lang="en-US" sz="2500" b="1" dirty="0">
                 <a:solidFill>
                   <a:srgbClr val="0F1B2D"/>
                 </a:solidFill>
@@ -10725,7 +13997,7 @@
               </a:rPr>
               <a:t>9.7 GW of announced hyperscale capacity within 60 miles</a:t>
             </a:r>
-            <a:endParaRPr lang="en-US" sz="2600" dirty="0"/>
+            <a:endParaRPr lang="en-US" sz="2500" dirty="0"/>
           </a:p>
         </p:txBody>
       </p:sp>
@@ -11114,7 +14386,7 @@
                           <a:ea typeface="Calibri" pitchFamily="34" charset="-122"/>
                           <a:cs typeface="Calibri" pitchFamily="34" charset="-120"/>
                         </a:rPr>
-                        <a:t>Pacifico Energy Group</a:t>
+                        <a:t>Amazon</a:t>
                       </a:r>
                       <a:endParaRPr lang="en-US" sz="1000" dirty="0">
                         <a:latin typeface="Calibri" charset="0"/>
@@ -11376,7 +14648,7 @@
                           <a:ea typeface="Calibri" pitchFamily="34" charset="-122"/>
                           <a:cs typeface="Calibri" pitchFamily="34" charset="-120"/>
                         </a:rPr>
-                        <a:t>Poolside</a:t>
+                        <a:t>Poolside Infrastructure Company</a:t>
                       </a:r>
                       <a:endParaRPr lang="en-US" sz="1000" dirty="0">
                         <a:latin typeface="Calibri" charset="0"/>
@@ -11561,7 +14833,7 @@
       </p:graphicFrame>
       <p:sp>
         <p:nvSpPr>
-          <p:cNvPr id="5" name="Text 2"/>
+          <p:cNvPr id="7" name="Text 3"/>
           <p:cNvSpPr/>
           <p:nvPr/>
         </p:nvSpPr>
@@ -11598,16 +14870,55 @@
           </a:p>
         </p:txBody>
       </p:sp>
+      <p:sp>
+        <p:nvSpPr>
+          <p:cNvPr id="8" name="Text 4"/>
+          <p:cNvSpPr/>
+          <p:nvPr/>
+        </p:nvSpPr>
+        <p:spPr>
+          <a:xfrm>
+            <a:off x="548640" y="4251960"/>
+            <a:ext cx="5394960" cy="822960"/>
+          </a:xfrm>
+          <a:prstGeom prst="rect">
+            <a:avLst/>
+          </a:prstGeom>
+          <a:noFill/>
+          <a:ln/>
+        </p:spPr>
+        <p:txBody>
+          <a:bodyPr wrap="square" rtlCol="0" anchor="ctr"/>
+          <a:lstStyle/>
+          <a:p>
+            <a:pPr indent="0" marL="0">
+              <a:buNone/>
+            </a:pPr>
+            <a:r>
+              <a:rPr lang="en-US" sz="1000" b="1" dirty="0">
+                <a:solidFill>
+                  <a:srgbClr val="B91C1C"/>
+                </a:solidFill>
+                <a:latin typeface="Calibri" pitchFamily="34" charset="0"/>
+                <a:ea typeface="Calibri" pitchFamily="34" charset="-122"/>
+                <a:cs typeface="Calibri" pitchFamily="34" charset="-120"/>
+              </a:rPr>
+              <a:t>GW Ranch's ownership changed in Aug 2026, and Longfellow's anchor tenant exited in Apr 2026 — see the following feature slides.</a:t>
+            </a:r>
+            <a:endParaRPr lang="en-US" sz="1000" dirty="0"/>
+          </a:p>
+        </p:txBody>
+      </p:sp>
       <p:pic>
         <p:nvPicPr>
-          <p:cNvPr id="6" name="Image 0" descr="/home/claude/repo/outputs/reports/om_exhibits/exhibit_7_1_datacenter-pipeline.jpg">    </p:cNvPr>
+          <p:cNvPr id="9" name="Image 1" descr="/home/claude/repo/outputs/reports/om_exhibits/exhibit_7_1_datacenter-pipeline.jpg">    </p:cNvPr>
           <p:cNvPicPr>
             <a:picLocks noChangeAspect="1"/>
           </p:cNvPicPr>
           <p:nvPr/>
         </p:nvPicPr>
         <p:blipFill>
-          <a:blip r:embed="rId1"/>
+          <a:blip r:embed="rId2"/>
           <a:stretch>
             <a:fillRect/>
           </a:stretch>
@@ -11620,11 +14931,18 @@
           <a:prstGeom prst="rect">
             <a:avLst/>
           </a:prstGeom>
+          <a:effectLst>
+            <a:outerShdw sx="100000" sy="100000" kx="0" ky="0" algn="bl" rotWithShape="0" blurRad="88900" dist="25400" dir="5400000">
+              <a:srgbClr val="0F1B2D">
+                <a:alpha val="16000"/>
+              </a:srgbClr>
+            </a:outerShdw>
+          </a:effectLst>
         </p:spPr>
       </p:pic>
       <p:sp>
         <p:nvSpPr>
-          <p:cNvPr id="7" name="Shape 3"/>
+          <p:cNvPr id="10" name="Shape 5"/>
           <p:cNvSpPr/>
           <p:nvPr/>
         </p:nvSpPr>
@@ -11646,13 +14964,13 @@
       </p:sp>
       <p:sp>
         <p:nvSpPr>
-          <p:cNvPr id="8" name="Text 4"/>
-          <p:cNvSpPr/>
-          <p:nvPr/>
-        </p:nvSpPr>
-        <p:spPr>
-          <a:xfrm>
-            <a:off x="6263640" y="4944847"/>
+          <p:cNvPr id="11" name="Text 6"/>
+          <p:cNvSpPr/>
+          <p:nvPr/>
+        </p:nvSpPr>
+        <p:spPr>
+          <a:xfrm>
+            <a:off x="6263640" y="4963135"/>
             <a:ext cx="5394960" cy="457200"/>
           </a:xfrm>
           <a:prstGeom prst="rect">
@@ -11685,7 +15003,7 @@
       </p:sp>
       <p:sp>
         <p:nvSpPr>
-          <p:cNvPr id="9" name="Text 5"/>
+          <p:cNvPr id="12" name="Text 7"/>
           <p:cNvSpPr/>
           <p:nvPr/>
         </p:nvSpPr>
@@ -11724,7 +15042,7 @@
       </p:sp>
       <p:sp>
         <p:nvSpPr>
-          <p:cNvPr id="10" name="Text 6"/>
+          <p:cNvPr id="13" name="Text 8"/>
           <p:cNvSpPr/>
           <p:nvPr/>
         </p:nvSpPr>
@@ -11795,14 +15113,65 @@
       </p:grpSpPr>
       <p:sp>
         <p:nvSpPr>
-          <p:cNvPr id="2" name="Text 0"/>
-          <p:cNvSpPr/>
-          <p:nvPr/>
-        </p:nvSpPr>
-        <p:spPr>
-          <a:xfrm>
-            <a:off x="548640" y="384048"/>
-            <a:ext cx="9144000" cy="320040"/>
+          <p:cNvPr id="2" name="Shape 0"/>
+          <p:cNvSpPr/>
+          <p:nvPr/>
+        </p:nvSpPr>
+        <p:spPr>
+          <a:xfrm>
+            <a:off x="548640" y="310896"/>
+            <a:ext cx="402336" cy="402336"/>
+          </a:xfrm>
+          <a:prstGeom prst="ellipse">
+            <a:avLst/>
+          </a:prstGeom>
+          <a:solidFill>
+            <a:srgbClr val="0F1B2D"/>
+          </a:solidFill>
+          <a:ln/>
+          <a:effectLst>
+            <a:outerShdw sx="100000" sy="100000" kx="0" ky="0" algn="bl" rotWithShape="0" blurRad="88900" dist="25400" dir="5400000">
+              <a:srgbClr val="0F1B2D">
+                <a:alpha val="16000"/>
+              </a:srgbClr>
+            </a:outerShdw>
+          </a:effectLst>
+        </p:spPr>
+      </p:sp>
+      <p:pic>
+        <p:nvPicPr>
+          <p:cNvPr id="3" name="Image 0" descr="preencoded.png">    </p:cNvPr>
+          <p:cNvPicPr>
+            <a:picLocks noChangeAspect="1"/>
+          </p:cNvPicPr>
+          <p:nvPr/>
+        </p:nvPicPr>
+        <p:blipFill>
+          <a:blip r:embed="rId1"/>
+          <a:stretch>
+            <a:fillRect/>
+          </a:stretch>
+        </p:blipFill>
+        <p:spPr>
+          <a:xfrm>
+            <a:off x="653247" y="415503"/>
+            <a:ext cx="193121" cy="193121"/>
+          </a:xfrm>
+          <a:prstGeom prst="rect">
+            <a:avLst/>
+          </a:prstGeom>
+        </p:spPr>
+      </p:pic>
+      <p:sp>
+        <p:nvSpPr>
+          <p:cNvPr id="4" name="Text 1"/>
+          <p:cNvSpPr/>
+          <p:nvPr/>
+        </p:nvSpPr>
+        <p:spPr>
+          <a:xfrm>
+            <a:off x="1097280" y="365760"/>
+            <a:ext cx="9144000" cy="365760"/>
           </a:xfrm>
           <a:prstGeom prst="rect">
             <a:avLst/>
@@ -11820,13 +15189,13 @@
             <a:r>
               <a:rPr lang="en-US" sz="1200" b="1" spc="200" kern="0" dirty="0">
                 <a:solidFill>
-                  <a:srgbClr val="B91C1C"/>
+                  <a:srgbClr val="0F1B2D"/>
                 </a:solidFill>
                 <a:latin typeface="Calibri" pitchFamily="34" charset="0"/>
                 <a:ea typeface="Calibri" pitchFamily="34" charset="-122"/>
                 <a:cs typeface="Calibri" pitchFamily="34" charset="-120"/>
               </a:rPr>
-              <a:t>08 · THE DILIGENCE PLATFORM</a:t>
+              <a:t>FEATURE · AMAZON / GW RANCH</a:t>
             </a:r>
             <a:endParaRPr lang="en-US" sz="1200" dirty="0"/>
           </a:p>
@@ -11834,14 +15203,14 @@
       </p:sp>
       <p:sp>
         <p:nvSpPr>
-          <p:cNvPr id="3" name="Text 1"/>
-          <p:cNvSpPr/>
-          <p:nvPr/>
-        </p:nvSpPr>
-        <p:spPr>
-          <a:xfrm>
-            <a:off x="548640" y="713232"/>
-            <a:ext cx="11064240" cy="914400"/>
+          <p:cNvPr id="5" name="Text 2"/>
+          <p:cNvSpPr/>
+          <p:nvPr/>
+        </p:nvSpPr>
+        <p:spPr>
+          <a:xfrm>
+            <a:off x="548640" y="841248"/>
+            <a:ext cx="11064240" cy="822960"/>
           </a:xfrm>
           <a:prstGeom prst="rect">
             <a:avLst/>
@@ -11857,7 +15226,7 @@
               <a:buNone/>
             </a:pPr>
             <a:r>
-              <a:rPr lang="en-US" sz="2600" b="1" dirty="0">
+              <a:rPr lang="en-US" sz="2500" b="1" dirty="0">
                 <a:solidFill>
                   <a:srgbClr val="0F1B2D"/>
                 </a:solidFill>
@@ -11865,718 +15234,75 @@
                 <a:ea typeface="Cambria" pitchFamily="34" charset="-122"/>
                 <a:cs typeface="Cambria" pitchFamily="34" charset="-120"/>
               </a:rPr>
-              <a:t>Every figure is independently verifiable, feature by feature</a:t>
-            </a:r>
-            <a:endParaRPr lang="en-US" sz="2600" dirty="0"/>
-          </a:p>
-        </p:txBody>
-      </p:sp>
-      <p:graphicFrame>
-        <p:nvGraphicFramePr>
-          <p:cNvPr id="10" name="Table 0"/>
-          <p:cNvGraphicFramePr>
-            <a:graphicFrameLocks noGrp="1"/>
-          </p:cNvGraphicFramePr>
-          <p:nvPr>
-            <p:extLst>
-              <p:ext uri="{D42A27DB-BD31-4B8C-83A1-F6EECF244321}">
-                <p14:modId xmlns:p14="http://schemas.microsoft.com/office/powerpoint/2010/main" val="1579011935"/>
-              </p:ext>
-            </p:extLst>
-          </p:nvPr>
-        </p:nvGraphicFramePr>
-        <p:xfrm>
-          <a:off x="548640" y="1828800"/>
-          <a:ext cx="11064240" cy="914400"/>
-        </p:xfrm>
-        <a:graphic>
-          <a:graphicData uri="http://schemas.openxmlformats.org/drawingml/2006/table">
-            <a:tbl>
-              <a:tblPr/>
-              <a:tblGrid>
-                <a:gridCol w="3108960"/>
-                <a:gridCol w="7955280"/>
-              </a:tblGrid>
-              <a:tr h="0">
-                <a:tc>
-                  <a:txBody>
-                    <a:bodyPr/>
-                    <a:lstStyle/>
-                    <a:p>
-                      <a:pPr algn="l" indent="0" marL="0">
-                        <a:buNone/>
-                      </a:pPr>
-                      <a:r>
-                        <a:rPr lang="en-US" sz="1200" b="1" dirty="0">
-                          <a:solidFill>
-                            <a:srgbClr val="475569"/>
-                          </a:solidFill>
-                          <a:latin typeface="Calibri" pitchFamily="34" charset="0"/>
-                          <a:ea typeface="Calibri" pitchFamily="34" charset="-122"/>
-                          <a:cs typeface="Calibri" pitchFamily="34" charset="-120"/>
-                        </a:rPr>
-                        <a:t>PLATFORM PROPERTY</a:t>
-                      </a:r>
-                      <a:endParaRPr lang="en-US" sz="1200" dirty="0">
-                        <a:latin typeface="Calibri" charset="0"/>
-                        <a:ea typeface="Calibri" charset="0"/>
-                        <a:cs typeface="Calibri" charset="0"/>
-                      </a:endParaRPr>
-                    </a:p>
-                  </a:txBody>
-                  <a:tcPr marL="73152" marR="73152" marT="36576" marB="36576" anchor="ctr">
-                    <a:lnL w="6350" cap="flat" cmpd="sng" algn="ctr">
-                      <a:solidFill>
-                        <a:srgbClr val="E2E8F0"/>
-                      </a:solidFill>
-                      <a:prstDash val="solid"/>
-                      <a:round/>
-                      <a:headEnd type="none" w="med" len="med"/>
-                      <a:tailEnd type="none" w="med" len="med"/>
-                    </a:lnL>
-                    <a:lnR w="6350" cap="flat" cmpd="sng" algn="ctr">
-                      <a:solidFill>
-                        <a:srgbClr val="E2E8F0"/>
-                      </a:solidFill>
-                      <a:prstDash val="solid"/>
-                      <a:round/>
-                      <a:headEnd type="none" w="med" len="med"/>
-                      <a:tailEnd type="none" w="med" len="med"/>
-                    </a:lnR>
-                    <a:lnT w="6350" cap="flat" cmpd="sng" algn="ctr">
-                      <a:solidFill>
-                        <a:srgbClr val="E2E8F0"/>
-                      </a:solidFill>
-                      <a:prstDash val="solid"/>
-                      <a:round/>
-                      <a:headEnd type="none" w="med" len="med"/>
-                      <a:tailEnd type="none" w="med" len="med"/>
-                    </a:lnT>
-                    <a:lnB w="6350" cap="flat" cmpd="sng" algn="ctr">
-                      <a:solidFill>
-                        <a:srgbClr val="E2E8F0"/>
-                      </a:solidFill>
-                      <a:prstDash val="solid"/>
-                      <a:round/>
-                      <a:headEnd type="none" w="med" len="med"/>
-                      <a:tailEnd type="none" w="med" len="med"/>
-                    </a:lnB>
-                    <a:solidFill>
-                      <a:srgbClr val="F1F5F9"/>
-                    </a:solidFill>
-                  </a:tcPr>
-                </a:tc>
-                <a:tc>
-                  <a:txBody>
-                    <a:bodyPr/>
-                    <a:lstStyle/>
-                    <a:p>
-                      <a:pPr algn="l" indent="0" marL="0">
-                        <a:buNone/>
-                      </a:pPr>
-                      <a:r>
-                        <a:rPr lang="en-US" sz="1200" b="1" dirty="0">
-                          <a:solidFill>
-                            <a:srgbClr val="475569"/>
-                          </a:solidFill>
-                          <a:latin typeface="Calibri" pitchFamily="34" charset="0"/>
-                          <a:ea typeface="Calibri" pitchFamily="34" charset="-122"/>
-                          <a:cs typeface="Calibri" pitchFamily="34" charset="-120"/>
-                        </a:rPr>
-                        <a:t>WHY IT MATTERS FOR DILIGENCE</a:t>
-                      </a:r>
-                      <a:endParaRPr lang="en-US" sz="1200" dirty="0">
-                        <a:latin typeface="Calibri" charset="0"/>
-                        <a:ea typeface="Calibri" charset="0"/>
-                        <a:cs typeface="Calibri" charset="0"/>
-                      </a:endParaRPr>
-                    </a:p>
-                  </a:txBody>
-                  <a:tcPr marL="73152" marR="73152" marT="36576" marB="36576" anchor="ctr">
-                    <a:lnL w="6350" cap="flat" cmpd="sng" algn="ctr">
-                      <a:solidFill>
-                        <a:srgbClr val="E2E8F0"/>
-                      </a:solidFill>
-                      <a:prstDash val="solid"/>
-                      <a:round/>
-                      <a:headEnd type="none" w="med" len="med"/>
-                      <a:tailEnd type="none" w="med" len="med"/>
-                    </a:lnL>
-                    <a:lnR w="6350" cap="flat" cmpd="sng" algn="ctr">
-                      <a:solidFill>
-                        <a:srgbClr val="E2E8F0"/>
-                      </a:solidFill>
-                      <a:prstDash val="solid"/>
-                      <a:round/>
-                      <a:headEnd type="none" w="med" len="med"/>
-                      <a:tailEnd type="none" w="med" len="med"/>
-                    </a:lnR>
-                    <a:lnT w="6350" cap="flat" cmpd="sng" algn="ctr">
-                      <a:solidFill>
-                        <a:srgbClr val="E2E8F0"/>
-                      </a:solidFill>
-                      <a:prstDash val="solid"/>
-                      <a:round/>
-                      <a:headEnd type="none" w="med" len="med"/>
-                      <a:tailEnd type="none" w="med" len="med"/>
-                    </a:lnT>
-                    <a:lnB w="6350" cap="flat" cmpd="sng" algn="ctr">
-                      <a:solidFill>
-                        <a:srgbClr val="E2E8F0"/>
-                      </a:solidFill>
-                      <a:prstDash val="solid"/>
-                      <a:round/>
-                      <a:headEnd type="none" w="med" len="med"/>
-                      <a:tailEnd type="none" w="med" len="med"/>
-                    </a:lnB>
-                    <a:solidFill>
-                      <a:srgbClr val="F1F5F9"/>
-                    </a:solidFill>
-                  </a:tcPr>
-                </a:tc>
-              </a:tr>
-              <a:tr h="0">
-                <a:tc>
-                  <a:txBody>
-                    <a:bodyPr/>
-                    <a:lstStyle/>
-                    <a:p>
-                      <a:pPr algn="l" indent="0" marL="0">
-                        <a:buNone/>
-                      </a:pPr>
-                      <a:r>
-                        <a:rPr lang="en-US" sz="1200" dirty="0">
-                          <a:solidFill>
-                            <a:srgbClr val="16202E"/>
-                          </a:solidFill>
-                          <a:latin typeface="Calibri" pitchFamily="34" charset="0"/>
-                          <a:ea typeface="Calibri" pitchFamily="34" charset="-122"/>
-                          <a:cs typeface="Calibri" pitchFamily="34" charset="-120"/>
-                        </a:rPr>
-                        <a:t>Source-cited features</a:t>
-                      </a:r>
-                      <a:endParaRPr lang="en-US" sz="1200" dirty="0">
-                        <a:latin typeface="Calibri" charset="0"/>
-                        <a:ea typeface="Calibri" charset="0"/>
-                        <a:cs typeface="Calibri" charset="0"/>
-                      </a:endParaRPr>
-                    </a:p>
-                  </a:txBody>
-                  <a:tcPr marL="73152" marR="73152" marT="36576" marB="36576" anchor="ctr">
-                    <a:lnL w="6350" cap="flat" cmpd="sng" algn="ctr">
-                      <a:solidFill>
-                        <a:srgbClr val="E2E8F0"/>
-                      </a:solidFill>
-                      <a:prstDash val="solid"/>
-                      <a:round/>
-                      <a:headEnd type="none" w="med" len="med"/>
-                      <a:tailEnd type="none" w="med" len="med"/>
-                    </a:lnL>
-                    <a:lnR w="6350" cap="flat" cmpd="sng" algn="ctr">
-                      <a:solidFill>
-                        <a:srgbClr val="E2E8F0"/>
-                      </a:solidFill>
-                      <a:prstDash val="solid"/>
-                      <a:round/>
-                      <a:headEnd type="none" w="med" len="med"/>
-                      <a:tailEnd type="none" w="med" len="med"/>
-                    </a:lnR>
-                    <a:lnT w="6350" cap="flat" cmpd="sng" algn="ctr">
-                      <a:solidFill>
-                        <a:srgbClr val="E2E8F0"/>
-                      </a:solidFill>
-                      <a:prstDash val="solid"/>
-                      <a:round/>
-                      <a:headEnd type="none" w="med" len="med"/>
-                      <a:tailEnd type="none" w="med" len="med"/>
-                    </a:lnT>
-                    <a:lnB w="6350" cap="flat" cmpd="sng" algn="ctr">
-                      <a:solidFill>
-                        <a:srgbClr val="E2E8F0"/>
-                      </a:solidFill>
-                      <a:prstDash val="solid"/>
-                      <a:round/>
-                      <a:headEnd type="none" w="med" len="med"/>
-                      <a:tailEnd type="none" w="med" len="med"/>
-                    </a:lnB>
-                  </a:tcPr>
-                </a:tc>
-                <a:tc>
-                  <a:txBody>
-                    <a:bodyPr/>
-                    <a:lstStyle/>
-                    <a:p>
-                      <a:pPr algn="l" indent="0" marL="0">
-                        <a:buNone/>
-                      </a:pPr>
-                      <a:r>
-                        <a:rPr lang="en-US" sz="1200" dirty="0">
-                          <a:solidFill>
-                            <a:srgbClr val="16202E"/>
-                          </a:solidFill>
-                          <a:latin typeface="Calibri" pitchFamily="34" charset="0"/>
-                          <a:ea typeface="Calibri" pitchFamily="34" charset="-122"/>
-                          <a:cs typeface="Calibri" pitchFamily="34" charset="-120"/>
-                        </a:rPr>
-                        <a:t>Every point/line/boundary traces to a cited public dataset; per-feature popups</a:t>
-                      </a:r>
-                      <a:endParaRPr lang="en-US" sz="1200" dirty="0">
-                        <a:latin typeface="Calibri" charset="0"/>
-                        <a:ea typeface="Calibri" charset="0"/>
-                        <a:cs typeface="Calibri" charset="0"/>
-                      </a:endParaRPr>
-                    </a:p>
-                  </a:txBody>
-                  <a:tcPr marL="73152" marR="73152" marT="36576" marB="36576" anchor="ctr">
-                    <a:lnL w="6350" cap="flat" cmpd="sng" algn="ctr">
-                      <a:solidFill>
-                        <a:srgbClr val="E2E8F0"/>
-                      </a:solidFill>
-                      <a:prstDash val="solid"/>
-                      <a:round/>
-                      <a:headEnd type="none" w="med" len="med"/>
-                      <a:tailEnd type="none" w="med" len="med"/>
-                    </a:lnL>
-                    <a:lnR w="6350" cap="flat" cmpd="sng" algn="ctr">
-                      <a:solidFill>
-                        <a:srgbClr val="E2E8F0"/>
-                      </a:solidFill>
-                      <a:prstDash val="solid"/>
-                      <a:round/>
-                      <a:headEnd type="none" w="med" len="med"/>
-                      <a:tailEnd type="none" w="med" len="med"/>
-                    </a:lnR>
-                    <a:lnT w="6350" cap="flat" cmpd="sng" algn="ctr">
-                      <a:solidFill>
-                        <a:srgbClr val="E2E8F0"/>
-                      </a:solidFill>
-                      <a:prstDash val="solid"/>
-                      <a:round/>
-                      <a:headEnd type="none" w="med" len="med"/>
-                      <a:tailEnd type="none" w="med" len="med"/>
-                    </a:lnT>
-                    <a:lnB w="6350" cap="flat" cmpd="sng" algn="ctr">
-                      <a:solidFill>
-                        <a:srgbClr val="E2E8F0"/>
-                      </a:solidFill>
-                      <a:prstDash val="solid"/>
-                      <a:round/>
-                      <a:headEnd type="none" w="med" len="med"/>
-                      <a:tailEnd type="none" w="med" len="med"/>
-                    </a:lnB>
-                  </a:tcPr>
-                </a:tc>
-              </a:tr>
-              <a:tr h="0">
-                <a:tc>
-                  <a:txBody>
-                    <a:bodyPr/>
-                    <a:lstStyle/>
-                    <a:p>
-                      <a:pPr algn="l" indent="0" marL="0">
-                        <a:buNone/>
-                      </a:pPr>
-                      <a:r>
-                        <a:rPr lang="en-US" sz="1200" dirty="0">
-                          <a:solidFill>
-                            <a:srgbClr val="16202E"/>
-                          </a:solidFill>
-                          <a:latin typeface="Calibri" pitchFamily="34" charset="0"/>
-                          <a:ea typeface="Calibri" pitchFamily="34" charset="-122"/>
-                          <a:cs typeface="Calibri" pitchFamily="34" charset="-120"/>
-                        </a:rPr>
-                        <a:t>Refresh discipline</a:t>
-                      </a:r>
-                      <a:endParaRPr lang="en-US" sz="1200" dirty="0">
-                        <a:latin typeface="Calibri" charset="0"/>
-                        <a:ea typeface="Calibri" charset="0"/>
-                        <a:cs typeface="Calibri" charset="0"/>
-                      </a:endParaRPr>
-                    </a:p>
-                  </a:txBody>
-                  <a:tcPr marL="73152" marR="73152" marT="36576" marB="36576" anchor="ctr">
-                    <a:lnL w="6350" cap="flat" cmpd="sng" algn="ctr">
-                      <a:solidFill>
-                        <a:srgbClr val="E2E8F0"/>
-                      </a:solidFill>
-                      <a:prstDash val="solid"/>
-                      <a:round/>
-                      <a:headEnd type="none" w="med" len="med"/>
-                      <a:tailEnd type="none" w="med" len="med"/>
-                    </a:lnL>
-                    <a:lnR w="6350" cap="flat" cmpd="sng" algn="ctr">
-                      <a:solidFill>
-                        <a:srgbClr val="E2E8F0"/>
-                      </a:solidFill>
-                      <a:prstDash val="solid"/>
-                      <a:round/>
-                      <a:headEnd type="none" w="med" len="med"/>
-                      <a:tailEnd type="none" w="med" len="med"/>
-                    </a:lnR>
-                    <a:lnT w="6350" cap="flat" cmpd="sng" algn="ctr">
-                      <a:solidFill>
-                        <a:srgbClr val="E2E8F0"/>
-                      </a:solidFill>
-                      <a:prstDash val="solid"/>
-                      <a:round/>
-                      <a:headEnd type="none" w="med" len="med"/>
-                      <a:tailEnd type="none" w="med" len="med"/>
-                    </a:lnT>
-                    <a:lnB w="6350" cap="flat" cmpd="sng" algn="ctr">
-                      <a:solidFill>
-                        <a:srgbClr val="E2E8F0"/>
-                      </a:solidFill>
-                      <a:prstDash val="solid"/>
-                      <a:round/>
-                      <a:headEnd type="none" w="med" len="med"/>
-                      <a:tailEnd type="none" w="med" len="med"/>
-                    </a:lnB>
-                  </a:tcPr>
-                </a:tc>
-                <a:tc>
-                  <a:txBody>
-                    <a:bodyPr/>
-                    <a:lstStyle/>
-                    <a:p>
-                      <a:pPr algn="l" indent="0" marL="0">
-                        <a:buNone/>
-                      </a:pPr>
-                      <a:r>
-                        <a:rPr lang="en-US" sz="1200" dirty="0">
-                          <a:solidFill>
-                            <a:srgbClr val="16202E"/>
-                          </a:solidFill>
-                          <a:latin typeface="Calibri" pitchFamily="34" charset="0"/>
-                          <a:ea typeface="Calibri" pitchFamily="34" charset="-122"/>
-                          <a:cs typeface="Calibri" pitchFamily="34" charset="-120"/>
-                        </a:rPr>
-                        <a:t>RRC weekly; ERCOT queue/TPIT monthly; EIA/USGS/OSM annually</a:t>
-                      </a:r>
-                      <a:endParaRPr lang="en-US" sz="1200" dirty="0">
-                        <a:latin typeface="Calibri" charset="0"/>
-                        <a:ea typeface="Calibri" charset="0"/>
-                        <a:cs typeface="Calibri" charset="0"/>
-                      </a:endParaRPr>
-                    </a:p>
-                  </a:txBody>
-                  <a:tcPr marL="73152" marR="73152" marT="36576" marB="36576" anchor="ctr">
-                    <a:lnL w="6350" cap="flat" cmpd="sng" algn="ctr">
-                      <a:solidFill>
-                        <a:srgbClr val="E2E8F0"/>
-                      </a:solidFill>
-                      <a:prstDash val="solid"/>
-                      <a:round/>
-                      <a:headEnd type="none" w="med" len="med"/>
-                      <a:tailEnd type="none" w="med" len="med"/>
-                    </a:lnL>
-                    <a:lnR w="6350" cap="flat" cmpd="sng" algn="ctr">
-                      <a:solidFill>
-                        <a:srgbClr val="E2E8F0"/>
-                      </a:solidFill>
-                      <a:prstDash val="solid"/>
-                      <a:round/>
-                      <a:headEnd type="none" w="med" len="med"/>
-                      <a:tailEnd type="none" w="med" len="med"/>
-                    </a:lnR>
-                    <a:lnT w="6350" cap="flat" cmpd="sng" algn="ctr">
-                      <a:solidFill>
-                        <a:srgbClr val="E2E8F0"/>
-                      </a:solidFill>
-                      <a:prstDash val="solid"/>
-                      <a:round/>
-                      <a:headEnd type="none" w="med" len="med"/>
-                      <a:tailEnd type="none" w="med" len="med"/>
-                    </a:lnT>
-                    <a:lnB w="6350" cap="flat" cmpd="sng" algn="ctr">
-                      <a:solidFill>
-                        <a:srgbClr val="E2E8F0"/>
-                      </a:solidFill>
-                      <a:prstDash val="solid"/>
-                      <a:round/>
-                      <a:headEnd type="none" w="med" len="med"/>
-                      <a:tailEnd type="none" w="med" len="med"/>
-                    </a:lnB>
-                  </a:tcPr>
-                </a:tc>
-              </a:tr>
-              <a:tr h="0">
-                <a:tc>
-                  <a:txBody>
-                    <a:bodyPr/>
-                    <a:lstStyle/>
-                    <a:p>
-                      <a:pPr algn="l" indent="0" marL="0">
-                        <a:buNone/>
-                      </a:pPr>
-                      <a:r>
-                        <a:rPr lang="en-US" sz="1200" dirty="0">
-                          <a:solidFill>
-                            <a:srgbClr val="16202E"/>
-                          </a:solidFill>
-                          <a:latin typeface="Calibri" pitchFamily="34" charset="0"/>
-                          <a:ea typeface="Calibri" pitchFamily="34" charset="-122"/>
-                          <a:cs typeface="Calibri" pitchFamily="34" charset="-120"/>
-                        </a:rPr>
-                        <a:t>Analytical tooling</a:t>
-                      </a:r>
-                      <a:endParaRPr lang="en-US" sz="1200" dirty="0">
-                        <a:latin typeface="Calibri" charset="0"/>
-                        <a:ea typeface="Calibri" charset="0"/>
-                        <a:cs typeface="Calibri" charset="0"/>
-                      </a:endParaRPr>
-                    </a:p>
-                  </a:txBody>
-                  <a:tcPr marL="73152" marR="73152" marT="36576" marB="36576" anchor="ctr">
-                    <a:lnL w="6350" cap="flat" cmpd="sng" algn="ctr">
-                      <a:solidFill>
-                        <a:srgbClr val="E2E8F0"/>
-                      </a:solidFill>
-                      <a:prstDash val="solid"/>
-                      <a:round/>
-                      <a:headEnd type="none" w="med" len="med"/>
-                      <a:tailEnd type="none" w="med" len="med"/>
-                    </a:lnL>
-                    <a:lnR w="6350" cap="flat" cmpd="sng" algn="ctr">
-                      <a:solidFill>
-                        <a:srgbClr val="E2E8F0"/>
-                      </a:solidFill>
-                      <a:prstDash val="solid"/>
-                      <a:round/>
-                      <a:headEnd type="none" w="med" len="med"/>
-                      <a:tailEnd type="none" w="med" len="med"/>
-                    </a:lnR>
-                    <a:lnT w="6350" cap="flat" cmpd="sng" algn="ctr">
-                      <a:solidFill>
-                        <a:srgbClr val="E2E8F0"/>
-                      </a:solidFill>
-                      <a:prstDash val="solid"/>
-                      <a:round/>
-                      <a:headEnd type="none" w="med" len="med"/>
-                      <a:tailEnd type="none" w="med" len="med"/>
-                    </a:lnT>
-                    <a:lnB w="6350" cap="flat" cmpd="sng" algn="ctr">
-                      <a:solidFill>
-                        <a:srgbClr val="E2E8F0"/>
-                      </a:solidFill>
-                      <a:prstDash val="solid"/>
-                      <a:round/>
-                      <a:headEnd type="none" w="med" len="med"/>
-                      <a:tailEnd type="none" w="med" len="med"/>
-                    </a:lnB>
-                  </a:tcPr>
-                </a:tc>
-                <a:tc>
-                  <a:txBody>
-                    <a:bodyPr/>
-                    <a:lstStyle/>
-                    <a:p>
-                      <a:pPr algn="l" indent="0" marL="0">
-                        <a:buNone/>
-                      </a:pPr>
-                      <a:r>
-                        <a:rPr lang="en-US" sz="1200" dirty="0">
-                          <a:solidFill>
-                            <a:srgbClr val="16202E"/>
-                          </a:solidFill>
-                          <a:latin typeface="Calibri" pitchFamily="34" charset="0"/>
-                          <a:ea typeface="Calibri" pitchFamily="34" charset="-122"/>
-                          <a:cs typeface="Calibri" pitchFamily="34" charset="-120"/>
-                        </a:rPr>
-                        <a:t>Filters by county/depth/spud year/fuel/status; time scrubber; measure/share/print</a:t>
-                      </a:r>
-                      <a:endParaRPr lang="en-US" sz="1200" dirty="0">
-                        <a:latin typeface="Calibri" charset="0"/>
-                        <a:ea typeface="Calibri" charset="0"/>
-                        <a:cs typeface="Calibri" charset="0"/>
-                      </a:endParaRPr>
-                    </a:p>
-                  </a:txBody>
-                  <a:tcPr marL="73152" marR="73152" marT="36576" marB="36576" anchor="ctr">
-                    <a:lnL w="6350" cap="flat" cmpd="sng" algn="ctr">
-                      <a:solidFill>
-                        <a:srgbClr val="E2E8F0"/>
-                      </a:solidFill>
-                      <a:prstDash val="solid"/>
-                      <a:round/>
-                      <a:headEnd type="none" w="med" len="med"/>
-                      <a:tailEnd type="none" w="med" len="med"/>
-                    </a:lnL>
-                    <a:lnR w="6350" cap="flat" cmpd="sng" algn="ctr">
-                      <a:solidFill>
-                        <a:srgbClr val="E2E8F0"/>
-                      </a:solidFill>
-                      <a:prstDash val="solid"/>
-                      <a:round/>
-                      <a:headEnd type="none" w="med" len="med"/>
-                      <a:tailEnd type="none" w="med" len="med"/>
-                    </a:lnR>
-                    <a:lnT w="6350" cap="flat" cmpd="sng" algn="ctr">
-                      <a:solidFill>
-                        <a:srgbClr val="E2E8F0"/>
-                      </a:solidFill>
-                      <a:prstDash val="solid"/>
-                      <a:round/>
-                      <a:headEnd type="none" w="med" len="med"/>
-                      <a:tailEnd type="none" w="med" len="med"/>
-                    </a:lnT>
-                    <a:lnB w="6350" cap="flat" cmpd="sng" algn="ctr">
-                      <a:solidFill>
-                        <a:srgbClr val="E2E8F0"/>
-                      </a:solidFill>
-                      <a:prstDash val="solid"/>
-                      <a:round/>
-                      <a:headEnd type="none" w="med" len="med"/>
-                      <a:tailEnd type="none" w="med" len="med"/>
-                    </a:lnB>
-                  </a:tcPr>
-                </a:tc>
-              </a:tr>
-              <a:tr h="0">
-                <a:tc>
-                  <a:txBody>
-                    <a:bodyPr/>
-                    <a:lstStyle/>
-                    <a:p>
-                      <a:pPr algn="l" indent="0" marL="0">
-                        <a:buNone/>
-                      </a:pPr>
-                      <a:r>
-                        <a:rPr lang="en-US" sz="1200" dirty="0">
-                          <a:solidFill>
-                            <a:srgbClr val="16202E"/>
-                          </a:solidFill>
-                          <a:latin typeface="Calibri" pitchFamily="34" charset="0"/>
-                          <a:ea typeface="Calibri" pitchFamily="34" charset="-122"/>
-                          <a:cs typeface="Calibri" pitchFamily="34" charset="-120"/>
-                        </a:rPr>
-                        <a:t>Reproducibility</a:t>
-                      </a:r>
-                      <a:endParaRPr lang="en-US" sz="1200" dirty="0">
-                        <a:latin typeface="Calibri" charset="0"/>
-                        <a:ea typeface="Calibri" charset="0"/>
-                        <a:cs typeface="Calibri" charset="0"/>
-                      </a:endParaRPr>
-                    </a:p>
-                  </a:txBody>
-                  <a:tcPr marL="73152" marR="73152" marT="36576" marB="36576" anchor="ctr">
-                    <a:lnL w="6350" cap="flat" cmpd="sng" algn="ctr">
-                      <a:solidFill>
-                        <a:srgbClr val="E2E8F0"/>
-                      </a:solidFill>
-                      <a:prstDash val="solid"/>
-                      <a:round/>
-                      <a:headEnd type="none" w="med" len="med"/>
-                      <a:tailEnd type="none" w="med" len="med"/>
-                    </a:lnL>
-                    <a:lnR w="6350" cap="flat" cmpd="sng" algn="ctr">
-                      <a:solidFill>
-                        <a:srgbClr val="E2E8F0"/>
-                      </a:solidFill>
-                      <a:prstDash val="solid"/>
-                      <a:round/>
-                      <a:headEnd type="none" w="med" len="med"/>
-                      <a:tailEnd type="none" w="med" len="med"/>
-                    </a:lnR>
-                    <a:lnT w="6350" cap="flat" cmpd="sng" algn="ctr">
-                      <a:solidFill>
-                        <a:srgbClr val="E2E8F0"/>
-                      </a:solidFill>
-                      <a:prstDash val="solid"/>
-                      <a:round/>
-                      <a:headEnd type="none" w="med" len="med"/>
-                      <a:tailEnd type="none" w="med" len="med"/>
-                    </a:lnT>
-                    <a:lnB w="6350" cap="flat" cmpd="sng" algn="ctr">
-                      <a:solidFill>
-                        <a:srgbClr val="E2E8F0"/>
-                      </a:solidFill>
-                      <a:prstDash val="solid"/>
-                      <a:round/>
-                      <a:headEnd type="none" w="med" len="med"/>
-                      <a:tailEnd type="none" w="med" len="med"/>
-                    </a:lnB>
-                  </a:tcPr>
-                </a:tc>
-                <a:tc>
-                  <a:txBody>
-                    <a:bodyPr/>
-                    <a:lstStyle/>
-                    <a:p>
-                      <a:pPr algn="l" indent="0" marL="0">
-                        <a:buNone/>
-                      </a:pPr>
-                      <a:r>
-                        <a:rPr lang="en-US" sz="1200" dirty="0">
-                          <a:solidFill>
-                            <a:srgbClr val="16202E"/>
-                          </a:solidFill>
-                          <a:latin typeface="Calibri" pitchFamily="34" charset="0"/>
-                          <a:ea typeface="Calibri" pitchFamily="34" charset="-122"/>
-                          <a:cs typeface="Calibri" pitchFamily="34" charset="-120"/>
-                        </a:rPr>
-                        <a:t>Static, versioned build; deployed bundle byte-verified on release; access logged</a:t>
-                      </a:r>
-                      <a:endParaRPr lang="en-US" sz="1200" dirty="0">
-                        <a:latin typeface="Calibri" charset="0"/>
-                        <a:ea typeface="Calibri" charset="0"/>
-                        <a:cs typeface="Calibri" charset="0"/>
-                      </a:endParaRPr>
-                    </a:p>
-                  </a:txBody>
-                  <a:tcPr marL="73152" marR="73152" marT="36576" marB="36576" anchor="ctr">
-                    <a:lnL w="6350" cap="flat" cmpd="sng" algn="ctr">
-                      <a:solidFill>
-                        <a:srgbClr val="E2E8F0"/>
-                      </a:solidFill>
-                      <a:prstDash val="solid"/>
-                      <a:round/>
-                      <a:headEnd type="none" w="med" len="med"/>
-                      <a:tailEnd type="none" w="med" len="med"/>
-                    </a:lnL>
-                    <a:lnR w="6350" cap="flat" cmpd="sng" algn="ctr">
-                      <a:solidFill>
-                        <a:srgbClr val="E2E8F0"/>
-                      </a:solidFill>
-                      <a:prstDash val="solid"/>
-                      <a:round/>
-                      <a:headEnd type="none" w="med" len="med"/>
-                      <a:tailEnd type="none" w="med" len="med"/>
-                    </a:lnR>
-                    <a:lnT w="6350" cap="flat" cmpd="sng" algn="ctr">
-                      <a:solidFill>
-                        <a:srgbClr val="E2E8F0"/>
-                      </a:solidFill>
-                      <a:prstDash val="solid"/>
-                      <a:round/>
-                      <a:headEnd type="none" w="med" len="med"/>
-                      <a:tailEnd type="none" w="med" len="med"/>
-                    </a:lnT>
-                    <a:lnB w="6350" cap="flat" cmpd="sng" algn="ctr">
-                      <a:solidFill>
-                        <a:srgbClr val="E2E8F0"/>
-                      </a:solidFill>
-                      <a:prstDash val="solid"/>
-                      <a:round/>
-                      <a:headEnd type="none" w="med" len="med"/>
-                      <a:tailEnd type="none" w="med" len="med"/>
-                    </a:lnB>
-                  </a:tcPr>
-                </a:tc>
-              </a:tr>
-            </a:tbl>
-          </a:graphicData>
-        </a:graphic>
-      </p:graphicFrame>
-      <p:sp>
-        <p:nvSpPr>
-          <p:cNvPr id="5" name="Text 2"/>
-          <p:cNvSpPr/>
-          <p:nvPr/>
-        </p:nvSpPr>
-        <p:spPr>
-          <a:xfrm>
-            <a:off x="548640" y="4937760"/>
-            <a:ext cx="11064240" cy="457200"/>
+              <a:t>Amazon acquires GW Ranch — ≈ 17.3 miles from Caramba North</a:t>
+            </a:r>
+            <a:endParaRPr lang="en-US" sz="2500" dirty="0"/>
+          </a:p>
+        </p:txBody>
+      </p:sp>
+      <p:pic>
+        <p:nvPicPr>
+          <p:cNvPr id="6" name="Image 1" descr="/home/claude/repo/outputs/reports/om_exhibits/exhibit_amz_gwranch.jpg">    </p:cNvPr>
+          <p:cNvPicPr>
+            <a:picLocks noChangeAspect="1"/>
+          </p:cNvPicPr>
+          <p:nvPr/>
+        </p:nvPicPr>
+        <p:blipFill>
+          <a:blip r:embed="rId2"/>
+          <a:stretch>
+            <a:fillRect/>
+          </a:stretch>
+        </p:blipFill>
+        <p:spPr>
+          <a:xfrm>
+            <a:off x="548640" y="1737360"/>
+            <a:ext cx="5806440" cy="2223743"/>
+          </a:xfrm>
+          <a:prstGeom prst="rect">
+            <a:avLst/>
+          </a:prstGeom>
+          <a:effectLst>
+            <a:outerShdw sx="100000" sy="100000" kx="0" ky="0" algn="bl" rotWithShape="0" blurRad="88900" dist="25400" dir="5400000">
+              <a:srgbClr val="0F1B2D">
+                <a:alpha val="16000"/>
+              </a:srgbClr>
+            </a:outerShdw>
+          </a:effectLst>
+        </p:spPr>
+      </p:pic>
+      <p:sp>
+        <p:nvSpPr>
+          <p:cNvPr id="7" name="Shape 3"/>
+          <p:cNvSpPr/>
+          <p:nvPr/>
+        </p:nvSpPr>
+        <p:spPr>
+          <a:xfrm>
+            <a:off x="548640" y="1737360"/>
+            <a:ext cx="5806440" cy="2223743"/>
+          </a:xfrm>
+          <a:prstGeom prst="rect">
+            <a:avLst/>
+          </a:prstGeom>
+          <a:ln w="12700">
+            <a:solidFill>
+              <a:srgbClr val="E2E8F0"/>
+            </a:solidFill>
+            <a:prstDash val="solid"/>
+          </a:ln>
+        </p:spPr>
+      </p:sp>
+      <p:sp>
+        <p:nvSpPr>
+          <p:cNvPr id="8" name="Text 4"/>
+          <p:cNvSpPr/>
+          <p:nvPr/>
+        </p:nvSpPr>
+        <p:spPr>
+          <a:xfrm>
+            <a:off x="548640" y="4052543"/>
+            <a:ext cx="5806440" cy="640080"/>
           </a:xfrm>
           <a:prstGeom prst="rect">
             <a:avLst/>
@@ -12592,7 +15318,7 @@
               <a:buNone/>
             </a:pPr>
             <a:r>
-              <a:rPr lang="en-US" sz="1100" i="1" dirty="0">
+              <a:rPr lang="en-US" sz="950" i="1" dirty="0">
                 <a:solidFill>
                   <a:srgbClr val="64748B"/>
                 </a:solidFill>
@@ -12600,15 +15326,740 @@
                 <a:ea typeface="Calibri" pitchFamily="34" charset="-122"/>
                 <a:cs typeface="Calibri" pitchFamily="34" charset="-120"/>
               </a:rPr>
-              <a:t>lrp-tx-gis.netlify.app  ·  access credentials issued to the deal team separately (see Appendix)</a:t>
-            </a:r>
-            <a:endParaRPr lang="en-US" sz="1100" dirty="0"/>
-          </a:p>
-        </p:txBody>
-      </p:sp>
-      <p:sp>
-        <p:nvSpPr>
-          <p:cNvPr id="6" name="Text 3"/>
+              <a:t>Exhibit — GW Ranch site (highlighted) and its straight-line distance to the Caramba North tract centroid, ≈ 17.3 miles. Base map: Exhibit 7.1.</a:t>
+            </a:r>
+            <a:endParaRPr lang="en-US" sz="950" dirty="0"/>
+          </a:p>
+        </p:txBody>
+      </p:sp>
+      <p:sp>
+        <p:nvSpPr>
+          <p:cNvPr id="9" name="Shape 5"/>
+          <p:cNvSpPr/>
+          <p:nvPr/>
+        </p:nvSpPr>
+        <p:spPr>
+          <a:xfrm>
+            <a:off x="6629400" y="1792224"/>
+            <a:ext cx="457200" cy="457200"/>
+          </a:xfrm>
+          <a:prstGeom prst="ellipse">
+            <a:avLst/>
+          </a:prstGeom>
+          <a:solidFill>
+            <a:srgbClr val="B91C1C"/>
+          </a:solidFill>
+          <a:ln/>
+          <a:effectLst>
+            <a:outerShdw sx="100000" sy="100000" kx="0" ky="0" algn="bl" rotWithShape="0" blurRad="88900" dist="25400" dir="5400000">
+              <a:srgbClr val="0F1B2D">
+                <a:alpha val="16000"/>
+              </a:srgbClr>
+            </a:outerShdw>
+          </a:effectLst>
+        </p:spPr>
+      </p:sp>
+      <p:pic>
+        <p:nvPicPr>
+          <p:cNvPr id="10" name="Image 2" descr="preencoded.png">    </p:cNvPr>
+          <p:cNvPicPr>
+            <a:picLocks noChangeAspect="1"/>
+          </p:cNvPicPr>
+          <p:nvPr/>
+        </p:nvPicPr>
+        <p:blipFill>
+          <a:blip r:embed="rId3"/>
+          <a:stretch>
+            <a:fillRect/>
+          </a:stretch>
+        </p:blipFill>
+        <p:spPr>
+          <a:xfrm>
+            <a:off x="6748272" y="1911096"/>
+            <a:ext cx="219456" cy="219456"/>
+          </a:xfrm>
+          <a:prstGeom prst="rect">
+            <a:avLst/>
+          </a:prstGeom>
+        </p:spPr>
+      </p:pic>
+      <p:sp>
+        <p:nvSpPr>
+          <p:cNvPr id="11" name="Text 6"/>
+          <p:cNvSpPr/>
+          <p:nvPr/>
+        </p:nvSpPr>
+        <p:spPr>
+          <a:xfrm>
+            <a:off x="7251192" y="1691640"/>
+            <a:ext cx="4407408" cy="289682"/>
+          </a:xfrm>
+          <a:prstGeom prst="rect">
+            <a:avLst/>
+          </a:prstGeom>
+          <a:noFill/>
+          <a:ln/>
+        </p:spPr>
+        <p:txBody>
+          <a:bodyPr wrap="square" rtlCol="0" anchor="b"/>
+          <a:lstStyle/>
+          <a:p>
+            <a:pPr indent="0" marL="0">
+              <a:buNone/>
+            </a:pPr>
+            <a:r>
+              <a:rPr lang="en-US" sz="1300" b="1" dirty="0">
+                <a:solidFill>
+                  <a:srgbClr val="0F1B2D"/>
+                </a:solidFill>
+                <a:latin typeface="Calibri" pitchFamily="34" charset="0"/>
+                <a:ea typeface="Calibri" pitchFamily="34" charset="-122"/>
+                <a:cs typeface="Calibri" pitchFamily="34" charset="-120"/>
+              </a:rPr>
+              <a:t>8,000-acre site, Pecos County</a:t>
+            </a:r>
+            <a:endParaRPr lang="en-US" sz="1300" dirty="0"/>
+          </a:p>
+        </p:txBody>
+      </p:sp>
+      <p:sp>
+        <p:nvSpPr>
+          <p:cNvPr id="12" name="Text 7"/>
+          <p:cNvSpPr/>
+          <p:nvPr/>
+        </p:nvSpPr>
+        <p:spPr>
+          <a:xfrm>
+            <a:off x="7251192" y="1968155"/>
+            <a:ext cx="4407408" cy="381853"/>
+          </a:xfrm>
+          <a:prstGeom prst="rect">
+            <a:avLst/>
+          </a:prstGeom>
+          <a:noFill/>
+          <a:ln/>
+        </p:spPr>
+        <p:txBody>
+          <a:bodyPr wrap="square" rtlCol="0" anchor="t"/>
+          <a:lstStyle/>
+          <a:p>
+            <a:pPr indent="0" marL="0">
+              <a:buNone/>
+            </a:pPr>
+            <a:r>
+              <a:rPr lang="en-US" sz="1050" dirty="0">
+                <a:solidFill>
+                  <a:srgbClr val="475569"/>
+                </a:solidFill>
+                <a:latin typeface="Calibri" pitchFamily="34" charset="0"/>
+                <a:ea typeface="Calibri" pitchFamily="34" charset="-122"/>
+                <a:cs typeface="Calibri" pitchFamily="34" charset="-120"/>
+              </a:rPr>
+              <a:t>≈ 17 miles north of Fort Stockton — the same siting logic as Caramba North.</a:t>
+            </a:r>
+            <a:endParaRPr lang="en-US" sz="1050" dirty="0"/>
+          </a:p>
+        </p:txBody>
+      </p:sp>
+      <p:sp>
+        <p:nvSpPr>
+          <p:cNvPr id="13" name="Shape 8"/>
+          <p:cNvSpPr/>
+          <p:nvPr/>
+        </p:nvSpPr>
+        <p:spPr>
+          <a:xfrm>
+            <a:off x="6629400" y="2450592"/>
+            <a:ext cx="457200" cy="457200"/>
+          </a:xfrm>
+          <a:prstGeom prst="ellipse">
+            <a:avLst/>
+          </a:prstGeom>
+          <a:solidFill>
+            <a:srgbClr val="B91C1C"/>
+          </a:solidFill>
+          <a:ln/>
+          <a:effectLst>
+            <a:outerShdw sx="100000" sy="100000" kx="0" ky="0" algn="bl" rotWithShape="0" blurRad="88900" dist="25400" dir="5400000">
+              <a:srgbClr val="0F1B2D">
+                <a:alpha val="16000"/>
+              </a:srgbClr>
+            </a:outerShdw>
+          </a:effectLst>
+        </p:spPr>
+      </p:sp>
+      <p:pic>
+        <p:nvPicPr>
+          <p:cNvPr id="14" name="Image 3" descr="preencoded.png">    </p:cNvPr>
+          <p:cNvPicPr>
+            <a:picLocks noChangeAspect="1"/>
+          </p:cNvPicPr>
+          <p:nvPr/>
+        </p:nvPicPr>
+        <p:blipFill>
+          <a:blip r:embed="rId4"/>
+          <a:stretch>
+            <a:fillRect/>
+          </a:stretch>
+        </p:blipFill>
+        <p:spPr>
+          <a:xfrm>
+            <a:off x="6748272" y="2569464"/>
+            <a:ext cx="219456" cy="219456"/>
+          </a:xfrm>
+          <a:prstGeom prst="rect">
+            <a:avLst/>
+          </a:prstGeom>
+        </p:spPr>
+      </p:pic>
+      <p:sp>
+        <p:nvSpPr>
+          <p:cNvPr id="15" name="Text 9"/>
+          <p:cNvSpPr/>
+          <p:nvPr/>
+        </p:nvSpPr>
+        <p:spPr>
+          <a:xfrm>
+            <a:off x="7251192" y="2350008"/>
+            <a:ext cx="4407408" cy="289682"/>
+          </a:xfrm>
+          <a:prstGeom prst="rect">
+            <a:avLst/>
+          </a:prstGeom>
+          <a:noFill/>
+          <a:ln/>
+        </p:spPr>
+        <p:txBody>
+          <a:bodyPr wrap="square" rtlCol="0" anchor="b"/>
+          <a:lstStyle/>
+          <a:p>
+            <a:pPr indent="0" marL="0">
+              <a:buNone/>
+            </a:pPr>
+            <a:r>
+              <a:rPr lang="en-US" sz="1300" b="1" dirty="0">
+                <a:solidFill>
+                  <a:srgbClr val="0F1B2D"/>
+                </a:solidFill>
+                <a:latin typeface="Calibri" pitchFamily="34" charset="0"/>
+                <a:ea typeface="Calibri" pitchFamily="34" charset="-122"/>
+                <a:cs typeface="Calibri" pitchFamily="34" charset="-120"/>
+              </a:rPr>
+              <a:t>35 gas turbines · 7.65 GW TCEQ air permit</a:t>
+            </a:r>
+            <a:endParaRPr lang="en-US" sz="1300" dirty="0"/>
+          </a:p>
+        </p:txBody>
+      </p:sp>
+      <p:sp>
+        <p:nvSpPr>
+          <p:cNvPr id="16" name="Text 10"/>
+          <p:cNvSpPr/>
+          <p:nvPr/>
+        </p:nvSpPr>
+        <p:spPr>
+          <a:xfrm>
+            <a:off x="7251192" y="2626523"/>
+            <a:ext cx="4407408" cy="381853"/>
+          </a:xfrm>
+          <a:prstGeom prst="rect">
+            <a:avLst/>
+          </a:prstGeom>
+          <a:noFill/>
+          <a:ln/>
+        </p:spPr>
+        <p:txBody>
+          <a:bodyPr wrap="square" rtlCol="0" anchor="t"/>
+          <a:lstStyle/>
+          <a:p>
+            <a:pPr indent="0" marL="0">
+              <a:buNone/>
+            </a:pPr>
+            <a:r>
+              <a:rPr lang="en-US" sz="1050" dirty="0">
+                <a:solidFill>
+                  <a:srgbClr val="475569"/>
+                </a:solidFill>
+                <a:latin typeface="Calibri" pitchFamily="34" charset="0"/>
+                <a:ea typeface="Calibri" pitchFamily="34" charset="-122"/>
+                <a:cs typeface="Calibri" pitchFamily="34" charset="-120"/>
+              </a:rPr>
+              <a:t>Largest air permit issued in the US (Jan/Feb 2026) — plus 1.8 GW battery storage and up to 750 MW solar.</a:t>
+            </a:r>
+            <a:endParaRPr lang="en-US" sz="1050" dirty="0"/>
+          </a:p>
+        </p:txBody>
+      </p:sp>
+      <p:sp>
+        <p:nvSpPr>
+          <p:cNvPr id="17" name="Shape 11"/>
+          <p:cNvSpPr/>
+          <p:nvPr/>
+        </p:nvSpPr>
+        <p:spPr>
+          <a:xfrm>
+            <a:off x="6629400" y="3108960"/>
+            <a:ext cx="457200" cy="457200"/>
+          </a:xfrm>
+          <a:prstGeom prst="ellipse">
+            <a:avLst/>
+          </a:prstGeom>
+          <a:solidFill>
+            <a:srgbClr val="B91C1C"/>
+          </a:solidFill>
+          <a:ln/>
+          <a:effectLst>
+            <a:outerShdw sx="100000" sy="100000" kx="0" ky="0" algn="bl" rotWithShape="0" blurRad="88900" dist="25400" dir="5400000">
+              <a:srgbClr val="0F1B2D">
+                <a:alpha val="16000"/>
+              </a:srgbClr>
+            </a:outerShdw>
+          </a:effectLst>
+        </p:spPr>
+      </p:sp>
+      <p:pic>
+        <p:nvPicPr>
+          <p:cNvPr id="18" name="Image 4" descr="preencoded.png">    </p:cNvPr>
+          <p:cNvPicPr>
+            <a:picLocks noChangeAspect="1"/>
+          </p:cNvPicPr>
+          <p:nvPr/>
+        </p:nvPicPr>
+        <p:blipFill>
+          <a:blip r:embed="rId5"/>
+          <a:stretch>
+            <a:fillRect/>
+          </a:stretch>
+        </p:blipFill>
+        <p:spPr>
+          <a:xfrm>
+            <a:off x="6748272" y="3227832"/>
+            <a:ext cx="219456" cy="219456"/>
+          </a:xfrm>
+          <a:prstGeom prst="rect">
+            <a:avLst/>
+          </a:prstGeom>
+        </p:spPr>
+      </p:pic>
+      <p:sp>
+        <p:nvSpPr>
+          <p:cNvPr id="19" name="Text 12"/>
+          <p:cNvSpPr/>
+          <p:nvPr/>
+        </p:nvSpPr>
+        <p:spPr>
+          <a:xfrm>
+            <a:off x="7251192" y="3008376"/>
+            <a:ext cx="4407408" cy="289682"/>
+          </a:xfrm>
+          <a:prstGeom prst="rect">
+            <a:avLst/>
+          </a:prstGeom>
+          <a:noFill/>
+          <a:ln/>
+        </p:spPr>
+        <p:txBody>
+          <a:bodyPr wrap="square" rtlCol="0" anchor="b"/>
+          <a:lstStyle/>
+          <a:p>
+            <a:pPr indent="0" marL="0">
+              <a:buNone/>
+            </a:pPr>
+            <a:r>
+              <a:rPr lang="en-US" sz="1300" b="1" dirty="0">
+                <a:solidFill>
+                  <a:srgbClr val="0F1B2D"/>
+                </a:solidFill>
+                <a:latin typeface="Calibri" pitchFamily="34" charset="0"/>
+                <a:ea typeface="Calibri" pitchFamily="34" charset="-122"/>
+                <a:cs typeface="Calibri" pitchFamily="34" charset="-120"/>
+              </a:rPr>
+              <a:t>Three data-center buildings</a:t>
+            </a:r>
+            <a:endParaRPr lang="en-US" sz="1300" dirty="0"/>
+          </a:p>
+        </p:txBody>
+      </p:sp>
+      <p:sp>
+        <p:nvSpPr>
+          <p:cNvPr id="20" name="Text 13"/>
+          <p:cNvSpPr/>
+          <p:nvPr/>
+        </p:nvSpPr>
+        <p:spPr>
+          <a:xfrm>
+            <a:off x="7251192" y="3284891"/>
+            <a:ext cx="4407408" cy="381853"/>
+          </a:xfrm>
+          <a:prstGeom prst="rect">
+            <a:avLst/>
+          </a:prstGeom>
+          <a:noFill/>
+          <a:ln/>
+        </p:spPr>
+        <p:txBody>
+          <a:bodyPr wrap="square" rtlCol="0" anchor="t"/>
+          <a:lstStyle/>
+          <a:p>
+            <a:pPr indent="0" marL="0">
+              <a:buNone/>
+            </a:pPr>
+            <a:r>
+              <a:rPr lang="en-US" sz="1050" dirty="0">
+                <a:solidFill>
+                  <a:srgbClr val="475569"/>
+                </a:solidFill>
+                <a:latin typeface="Calibri" pitchFamily="34" charset="0"/>
+                <a:ea typeface="Calibri" pitchFamily="34" charset="-122"/>
+                <a:cs typeface="Calibri" pitchFamily="34" charset="-120"/>
+              </a:rPr>
+              <a:t>189,000 sq ft each, Gensler design, ≈ $300M per building — targeted completion Dec 2026.</a:t>
+            </a:r>
+            <a:endParaRPr lang="en-US" sz="1050" dirty="0"/>
+          </a:p>
+        </p:txBody>
+      </p:sp>
+      <p:sp>
+        <p:nvSpPr>
+          <p:cNvPr id="21" name="Shape 14"/>
+          <p:cNvSpPr/>
+          <p:nvPr/>
+        </p:nvSpPr>
+        <p:spPr>
+          <a:xfrm>
+            <a:off x="6629400" y="3767328"/>
+            <a:ext cx="457200" cy="457200"/>
+          </a:xfrm>
+          <a:prstGeom prst="ellipse">
+            <a:avLst/>
+          </a:prstGeom>
+          <a:solidFill>
+            <a:srgbClr val="B91C1C"/>
+          </a:solidFill>
+          <a:ln/>
+          <a:effectLst>
+            <a:outerShdw sx="100000" sy="100000" kx="0" ky="0" algn="bl" rotWithShape="0" blurRad="88900" dist="25400" dir="5400000">
+              <a:srgbClr val="0F1B2D">
+                <a:alpha val="16000"/>
+              </a:srgbClr>
+            </a:outerShdw>
+          </a:effectLst>
+        </p:spPr>
+      </p:sp>
+      <p:pic>
+        <p:nvPicPr>
+          <p:cNvPr id="22" name="Image 5" descr="preencoded.png">    </p:cNvPr>
+          <p:cNvPicPr>
+            <a:picLocks noChangeAspect="1"/>
+          </p:cNvPicPr>
+          <p:nvPr/>
+        </p:nvPicPr>
+        <p:blipFill>
+          <a:blip r:embed="rId6"/>
+          <a:stretch>
+            <a:fillRect/>
+          </a:stretch>
+        </p:blipFill>
+        <p:spPr>
+          <a:xfrm>
+            <a:off x="6748272" y="3886200"/>
+            <a:ext cx="219456" cy="219456"/>
+          </a:xfrm>
+          <a:prstGeom prst="rect">
+            <a:avLst/>
+          </a:prstGeom>
+        </p:spPr>
+      </p:pic>
+      <p:sp>
+        <p:nvSpPr>
+          <p:cNvPr id="23" name="Text 15"/>
+          <p:cNvSpPr/>
+          <p:nvPr/>
+        </p:nvSpPr>
+        <p:spPr>
+          <a:xfrm>
+            <a:off x="7251192" y="3666744"/>
+            <a:ext cx="4407408" cy="289682"/>
+          </a:xfrm>
+          <a:prstGeom prst="rect">
+            <a:avLst/>
+          </a:prstGeom>
+          <a:noFill/>
+          <a:ln/>
+        </p:spPr>
+        <p:txBody>
+          <a:bodyPr wrap="square" rtlCol="0" anchor="b"/>
+          <a:lstStyle/>
+          <a:p>
+            <a:pPr indent="0" marL="0">
+              <a:buNone/>
+            </a:pPr>
+            <a:r>
+              <a:rPr lang="en-US" sz="1300" b="1" dirty="0">
+                <a:solidFill>
+                  <a:srgbClr val="0F1B2D"/>
+                </a:solidFill>
+                <a:latin typeface="Calibri" pitchFamily="34" charset="0"/>
+                <a:ea typeface="Calibri" pitchFamily="34" charset="-122"/>
+                <a:cs typeface="Calibri" pitchFamily="34" charset="-120"/>
+              </a:rPr>
+              <a:t>≈ $12B estimated total project investment</a:t>
+            </a:r>
+            <a:endParaRPr lang="en-US" sz="1300" dirty="0"/>
+          </a:p>
+        </p:txBody>
+      </p:sp>
+      <p:sp>
+        <p:nvSpPr>
+          <p:cNvPr id="24" name="Text 16"/>
+          <p:cNvSpPr/>
+          <p:nvPr/>
+        </p:nvSpPr>
+        <p:spPr>
+          <a:xfrm>
+            <a:off x="7251192" y="3943259"/>
+            <a:ext cx="4407408" cy="381853"/>
+          </a:xfrm>
+          <a:prstGeom prst="rect">
+            <a:avLst/>
+          </a:prstGeom>
+          <a:noFill/>
+          <a:ln/>
+        </p:spPr>
+        <p:txBody>
+          <a:bodyPr wrap="square" rtlCol="0" anchor="t"/>
+          <a:lstStyle/>
+          <a:p>
+            <a:pPr indent="0" marL="0">
+              <a:buNone/>
+            </a:pPr>
+            <a:r>
+              <a:rPr lang="en-US" sz="1050" dirty="0">
+                <a:solidFill>
+                  <a:srgbClr val="475569"/>
+                </a:solidFill>
+                <a:latin typeface="Calibri" pitchFamily="34" charset="0"/>
+                <a:ea typeface="Calibri" pitchFamily="34" charset="-122"/>
+                <a:cs typeface="Calibri" pitchFamily="34" charset="-120"/>
+              </a:rPr>
+              <a:t>Amazon has not disclosed its specific investment amount or ultimate buildout plans.</a:t>
+            </a:r>
+            <a:endParaRPr lang="en-US" sz="1050" dirty="0"/>
+          </a:p>
+        </p:txBody>
+      </p:sp>
+      <p:sp>
+        <p:nvSpPr>
+          <p:cNvPr id="25" name="Shape 17"/>
+          <p:cNvSpPr/>
+          <p:nvPr/>
+        </p:nvSpPr>
+        <p:spPr>
+          <a:xfrm>
+            <a:off x="6629400" y="4425696"/>
+            <a:ext cx="457200" cy="457200"/>
+          </a:xfrm>
+          <a:prstGeom prst="ellipse">
+            <a:avLst/>
+          </a:prstGeom>
+          <a:solidFill>
+            <a:srgbClr val="B91C1C"/>
+          </a:solidFill>
+          <a:ln/>
+          <a:effectLst>
+            <a:outerShdw sx="100000" sy="100000" kx="0" ky="0" algn="bl" rotWithShape="0" blurRad="88900" dist="25400" dir="5400000">
+              <a:srgbClr val="0F1B2D">
+                <a:alpha val="16000"/>
+              </a:srgbClr>
+            </a:outerShdw>
+          </a:effectLst>
+        </p:spPr>
+      </p:sp>
+      <p:pic>
+        <p:nvPicPr>
+          <p:cNvPr id="26" name="Image 6" descr="preencoded.png">    </p:cNvPr>
+          <p:cNvPicPr>
+            <a:picLocks noChangeAspect="1"/>
+          </p:cNvPicPr>
+          <p:nvPr/>
+        </p:nvPicPr>
+        <p:blipFill>
+          <a:blip r:embed="rId7"/>
+          <a:stretch>
+            <a:fillRect/>
+          </a:stretch>
+        </p:blipFill>
+        <p:spPr>
+          <a:xfrm>
+            <a:off x="6748272" y="4544568"/>
+            <a:ext cx="219456" cy="219456"/>
+          </a:xfrm>
+          <a:prstGeom prst="rect">
+            <a:avLst/>
+          </a:prstGeom>
+        </p:spPr>
+      </p:pic>
+      <p:sp>
+        <p:nvSpPr>
+          <p:cNvPr id="27" name="Text 18"/>
+          <p:cNvSpPr/>
+          <p:nvPr/>
+        </p:nvSpPr>
+        <p:spPr>
+          <a:xfrm>
+            <a:off x="7251192" y="4325112"/>
+            <a:ext cx="4407408" cy="289682"/>
+          </a:xfrm>
+          <a:prstGeom prst="rect">
+            <a:avLst/>
+          </a:prstGeom>
+          <a:noFill/>
+          <a:ln/>
+        </p:spPr>
+        <p:txBody>
+          <a:bodyPr wrap="square" rtlCol="0" anchor="b"/>
+          <a:lstStyle/>
+          <a:p>
+            <a:pPr indent="0" marL="0">
+              <a:buNone/>
+            </a:pPr>
+            <a:r>
+              <a:rPr lang="en-US" sz="1300" b="1" dirty="0">
+                <a:solidFill>
+                  <a:srgbClr val="0F1B2D"/>
+                </a:solidFill>
+                <a:latin typeface="Calibri" pitchFamily="34" charset="0"/>
+                <a:ea typeface="Calibri" pitchFamily="34" charset="-122"/>
+                <a:cs typeface="Calibri" pitchFamily="34" charset="-120"/>
+              </a:rPr>
+              <a:t>Off-grid initially</a:t>
+            </a:r>
+            <a:endParaRPr lang="en-US" sz="1300" dirty="0"/>
+          </a:p>
+        </p:txBody>
+      </p:sp>
+      <p:sp>
+        <p:nvSpPr>
+          <p:cNvPr id="28" name="Text 19"/>
+          <p:cNvSpPr/>
+          <p:nvPr/>
+        </p:nvSpPr>
+        <p:spPr>
+          <a:xfrm>
+            <a:off x="7251192" y="4601627"/>
+            <a:ext cx="4407408" cy="381853"/>
+          </a:xfrm>
+          <a:prstGeom prst="rect">
+            <a:avLst/>
+          </a:prstGeom>
+          <a:noFill/>
+          <a:ln/>
+        </p:spPr>
+        <p:txBody>
+          <a:bodyPr wrap="square" rtlCol="0" anchor="t"/>
+          <a:lstStyle/>
+          <a:p>
+            <a:pPr indent="0" marL="0">
+              <a:buNone/>
+            </a:pPr>
+            <a:r>
+              <a:rPr lang="en-US" sz="1050" dirty="0">
+                <a:solidFill>
+                  <a:srgbClr val="475569"/>
+                </a:solidFill>
+                <a:latin typeface="Calibri" pitchFamily="34" charset="0"/>
+                <a:ea typeface="Calibri" pitchFamily="34" charset="-122"/>
+                <a:cs typeface="Calibri" pitchFamily="34" charset="-120"/>
+              </a:rPr>
+              <a:t>Amazon has not disclosed an ERCOT large-load interconnection filing or queue position — exploring a transition to grid-connected service.</a:t>
+            </a:r>
+            <a:endParaRPr lang="en-US" sz="1050" dirty="0"/>
+          </a:p>
+        </p:txBody>
+      </p:sp>
+      <p:sp>
+        <p:nvSpPr>
+          <p:cNvPr id="29" name="Shape 20"/>
+          <p:cNvSpPr/>
+          <p:nvPr/>
+        </p:nvSpPr>
+        <p:spPr>
+          <a:xfrm>
+            <a:off x="6629400" y="5038344"/>
+            <a:ext cx="5029200" cy="566928"/>
+          </a:xfrm>
+          <a:prstGeom prst="roundRect">
+            <a:avLst>
+              <a:gd name="adj" fmla="val 6452"/>
+            </a:avLst>
+          </a:prstGeom>
+          <a:solidFill>
+            <a:srgbClr val="FFFBEB"/>
+          </a:solidFill>
+          <a:ln w="12700">
+            <a:solidFill>
+              <a:srgbClr val="FCD34D"/>
+            </a:solidFill>
+            <a:prstDash val="solid"/>
+          </a:ln>
+        </p:spPr>
+      </p:sp>
+      <p:sp>
+        <p:nvSpPr>
+          <p:cNvPr id="30" name="Text 21"/>
+          <p:cNvSpPr/>
+          <p:nvPr/>
+        </p:nvSpPr>
+        <p:spPr>
+          <a:xfrm>
+            <a:off x="6757416" y="5084064"/>
+            <a:ext cx="4773168" cy="475488"/>
+          </a:xfrm>
+          <a:prstGeom prst="rect">
+            <a:avLst/>
+          </a:prstGeom>
+          <a:noFill/>
+          <a:ln/>
+        </p:spPr>
+        <p:txBody>
+          <a:bodyPr wrap="square" rtlCol="0" anchor="ctr"/>
+          <a:lstStyle/>
+          <a:p>
+            <a:pPr indent="0" marL="0">
+              <a:buNone/>
+            </a:pPr>
+            <a:r>
+              <a:rPr lang="en-US" sz="900" b="1" dirty="0">
+                <a:solidFill>
+                  <a:srgbClr val="78350F"/>
+                </a:solidFill>
+                <a:latin typeface="Calibri" pitchFamily="34" charset="0"/>
+                <a:ea typeface="Calibri" pitchFamily="34" charset="-122"/>
+                <a:cs typeface="Calibri" pitchFamily="34" charset="-120"/>
+              </a:rPr>
+              <a:t>Clarification — </a:t>
+            </a:r>
+            <a:pPr indent="0" marL="0">
+              <a:buNone/>
+            </a:pPr>
+            <a:r>
+              <a:rPr lang="en-US" sz="900" dirty="0">
+                <a:solidFill>
+                  <a:srgbClr val="78350F"/>
+                </a:solidFill>
+                <a:latin typeface="Calibri" pitchFamily="34" charset="0"/>
+                <a:ea typeface="Calibri" pitchFamily="34" charset="-122"/>
+                <a:cs typeface="Calibri" pitchFamily="34" charset="-120"/>
+              </a:rPr>
+              <a:t>the 7.65 GW figure is a TCEQ generation air permit, not an ERCOT interconnection queue position; subject to Texas Gov. Abbott's Aug 3, 2026 data-center permitting pause pending state audits.</a:t>
+            </a:r>
+            <a:endParaRPr lang="en-US" sz="900" dirty="0"/>
+          </a:p>
+        </p:txBody>
+      </p:sp>
+      <p:sp>
+        <p:nvSpPr>
+          <p:cNvPr id="31" name="Text 22"/>
           <p:cNvSpPr/>
           <p:nvPr/>
         </p:nvSpPr>
@@ -12647,7 +16098,7 @@
       </p:sp>
       <p:sp>
         <p:nvSpPr>
-          <p:cNvPr id="7" name="Text 4"/>
+          <p:cNvPr id="32" name="Text 23"/>
           <p:cNvSpPr/>
           <p:nvPr/>
         </p:nvSpPr>
